--- a/system-design-101/vi/lessons/sd-10-006/slides/sd-10-006.pptx
+++ b/system-design-101/vi/lessons/sd-10-006/slides/sd-10-006.pptx
@@ -5407,158 +5407,6 @@
         </p:nvSpPr>
         <p:spPr>
           <a:xfrm>
-            <a:off x="914400" y="4343400"/>
-            <a:ext cx="7620000" cy="1047750"/>
-          </a:xfrm>
-          <a:prstGeom prst="rect">
-            <a:avLst/>
-          </a:prstGeom>
-          <a:noFill/>
-          <a:ln/>
-        </p:spPr>
-        <p:txBody>
-          <a:bodyPr wrap="square" lIns="0" tIns="6001" rIns="0" bIns="-6001" rtlCol="0" anchor="t"/>
-          <a:lstStyle/>
-          <a:p>
-            <a:pPr algn="l" indent="0" marL="0">
-              <a:lnSpc>
-                <a:spcPts val="3780"/>
-              </a:lnSpc>
-              <a:buNone/>
-            </a:pPr>
-            <a:r>
-              <a:rPr lang="en-US" sz="2700" dirty="0" spc="2" kern="0">
-                <a:solidFill>
-                  <a:srgbClr val="C4C8D6"/>
-                </a:solidFill>
-                <a:latin typeface="Be Vietnam Pro" pitchFamily="34" charset="0"/>
-                <a:ea typeface="Be Vietnam Pro" pitchFamily="34" charset="-122"/>
-                <a:cs typeface="Be Vietnam Pro" pitchFamily="34" charset="-120"/>
-              </a:rPr>
-              <a:t>Mã</a:t>
-            </a:r>
-            <a:r>
-              <a:rPr lang="en-US" sz="2700" dirty="0" spc="-18" kern="0">
-                <a:solidFill>
-                  <a:srgbClr val="C4C8D6"/>
-                </a:solidFill>
-                <a:latin typeface="Be Vietnam Pro" pitchFamily="34" charset="0"/>
-                <a:ea typeface="Be Vietnam Pro" pitchFamily="34" charset="-122"/>
-                <a:cs typeface="Be Vietnam Pro" pitchFamily="34" charset="-120"/>
-              </a:rPr>
-              <a:t> gốc</a:t>
-            </a:r>
-            <a:r>
-              <a:rPr lang="en-US" sz="2700" dirty="0" spc="9" kern="0">
-                <a:solidFill>
-                  <a:srgbClr val="C4C8D6"/>
-                </a:solidFill>
-                <a:latin typeface="Be Vietnam Pro" pitchFamily="34" charset="0"/>
-                <a:ea typeface="Be Vietnam Pro" pitchFamily="34" charset="-122"/>
-                <a:cs typeface="Be Vietnam Pro" pitchFamily="34" charset="-120"/>
-              </a:rPr>
-              <a:t> được</a:t>
-            </a:r>
-            <a:r>
-              <a:rPr lang="en-US" sz="2700" dirty="0" spc="-3" kern="0">
-                <a:solidFill>
-                  <a:srgbClr val="C4C8D6"/>
-                </a:solidFill>
-                <a:latin typeface="Be Vietnam Pro" pitchFamily="34" charset="0"/>
-                <a:ea typeface="Be Vietnam Pro" pitchFamily="34" charset="-122"/>
-                <a:cs typeface="Be Vietnam Pro" pitchFamily="34" charset="-120"/>
-              </a:rPr>
-              <a:t> biên</a:t>
-            </a:r>
-            <a:r>
-              <a:rPr lang="en-US" sz="2700" dirty="0" spc="-1" kern="0">
-                <a:solidFill>
-                  <a:srgbClr val="C4C8D6"/>
-                </a:solidFill>
-                <a:latin typeface="Be Vietnam Pro" pitchFamily="34" charset="0"/>
-                <a:ea typeface="Be Vietnam Pro" pitchFamily="34" charset="-122"/>
-                <a:cs typeface="Be Vietnam Pro" pitchFamily="34" charset="-120"/>
-              </a:rPr>
-              <a:t> dịch</a:t>
-            </a:r>
-            <a:r>
-              <a:rPr lang="en-US" sz="2700" dirty="0" spc="-40" kern="0">
-                <a:solidFill>
-                  <a:srgbClr val="C4C8D6"/>
-                </a:solidFill>
-                <a:latin typeface="Be Vietnam Pro" pitchFamily="34" charset="0"/>
-                <a:ea typeface="Be Vietnam Pro" pitchFamily="34" charset="-122"/>
-                <a:cs typeface="Be Vietnam Pro" pitchFamily="34" charset="-120"/>
-              </a:rPr>
-              <a:t> ra</a:t>
-            </a:r>
-            <a:r>
-              <a:rPr lang="en-US" sz="2700" dirty="0" spc="0" kern="0">
-                <a:solidFill>
-                  <a:srgbClr val="C4C8D6"/>
-                </a:solidFill>
-                <a:latin typeface="Be Vietnam Pro" pitchFamily="34" charset="0"/>
-                <a:ea typeface="Be Vietnam Pro" pitchFamily="34" charset="-122"/>
-                <a:cs typeface="Be Vietnam Pro" pitchFamily="34" charset="-120"/>
-              </a:rPr>
-              <a:t> mô-đun</a:t>
-            </a:r>
-            <a:r>
-              <a:rPr lang="en-US" sz="2700" dirty="0" spc="-49" kern="0">
-                <a:solidFill>
-                  <a:srgbClr val="C4C8D6"/>
-                </a:solidFill>
-                <a:latin typeface="Be Vietnam Pro" pitchFamily="34" charset="0"/>
-                <a:ea typeface="Be Vietnam Pro" pitchFamily="34" charset="-122"/>
-                <a:cs typeface="Be Vietnam Pro" pitchFamily="34" charset="-120"/>
-              </a:rPr>
-              <a:t> WASM,</a:t>
-            </a:r>
-            <a:r>
-              <a:rPr lang="en-US" sz="2700" dirty="0" spc="-2" kern="0">
-                <a:solidFill>
-                  <a:srgbClr val="C4C8D6"/>
-                </a:solidFill>
-                <a:latin typeface="Be Vietnam Pro" pitchFamily="34" charset="0"/>
-                <a:ea typeface="Be Vietnam Pro" pitchFamily="34" charset="-122"/>
-                <a:cs typeface="Be Vietnam Pro" pitchFamily="34" charset="-120"/>
-              </a:rPr>
-              <a:t> không</a:t>
-            </a:r>
-            <a:r>
-              <a:rPr lang="en-US" sz="2700" dirty="0" spc="-5" kern="0">
-                <a:solidFill>
-                  <a:srgbClr val="C4C8D6"/>
-                </a:solidFill>
-                <a:latin typeface="Be Vietnam Pro" pitchFamily="34" charset="0"/>
-                <a:ea typeface="Be Vietnam Pro" pitchFamily="34" charset="-122"/>
-                <a:cs typeface="Be Vietnam Pro" pitchFamily="34" charset="-120"/>
-              </a:rPr>
-              <a:t> viết</a:t>
-            </a:r>
-            <a:r>
-              <a:rPr lang="en-US" sz="2700" dirty="0" spc="-20" kern="0">
-                <a:solidFill>
-                  <a:srgbClr val="C4C8D6"/>
-                </a:solidFill>
-                <a:latin typeface="Be Vietnam Pro" pitchFamily="34" charset="0"/>
-                <a:ea typeface="Be Vietnam Pro" pitchFamily="34" charset="-122"/>
-                <a:cs typeface="Be Vietnam Pro" pitchFamily="34" charset="-120"/>
-              </a:rPr>
-              <a:t> tay.</a:t>
-            </a:r>
-            <a:endParaRPr lang="en-US" sz="2700" dirty="0"/>
-          </a:p>
-        </p:txBody>
-      </p:sp>
-      <p:sp>
-        <p:nvSpPr>
-          <p:cNvPr id="6" name="Text 4"/>
-          <p:cNvSpPr/>
-          <p:nvPr/>
-        </p:nvSpPr>
-        <p:spPr>
-          <a:xfrm>
             <a:off x="914400" y="5619750"/>
             <a:ext cx="3810000" cy="685800"/>
           </a:xfrm>
@@ -5640,7 +5488,7 @@
       </p:sp>
       <p:sp>
         <p:nvSpPr>
-          <p:cNvPr id="7" name="Shape 5"/>
+          <p:cNvPr id="6" name="Shape 4"/>
           <p:cNvSpPr/>
           <p:nvPr/>
         </p:nvSpPr>
@@ -5667,7 +5515,7 @@
       </p:sp>
       <p:sp>
         <p:nvSpPr>
-          <p:cNvPr id="8" name="Text 6"/>
+          <p:cNvPr id="7" name="Text 5"/>
           <p:cNvSpPr/>
           <p:nvPr/>
         </p:nvSpPr>
@@ -5717,7 +5565,7 @@
       </p:sp>
       <p:sp>
         <p:nvSpPr>
-          <p:cNvPr id="9" name="Text 7"/>
+          <p:cNvPr id="8" name="Text 6"/>
           <p:cNvSpPr/>
           <p:nvPr/>
         </p:nvSpPr>
@@ -5869,7 +5717,7 @@
       </p:sp>
       <p:sp>
         <p:nvSpPr>
-          <p:cNvPr id="10" name="Shape 8"/>
+          <p:cNvPr id="9" name="Shape 7"/>
           <p:cNvSpPr/>
           <p:nvPr/>
         </p:nvSpPr>
@@ -5896,7 +5744,7 @@
       </p:sp>
       <p:sp>
         <p:nvSpPr>
-          <p:cNvPr id="11" name="Shape 9"/>
+          <p:cNvPr id="10" name="Shape 8"/>
           <p:cNvSpPr/>
           <p:nvPr/>
         </p:nvSpPr>
@@ -5923,7 +5771,7 @@
       </p:sp>
       <p:sp>
         <p:nvSpPr>
-          <p:cNvPr id="12" name="Text 10"/>
+          <p:cNvPr id="11" name="Text 9"/>
           <p:cNvSpPr/>
           <p:nvPr/>
         </p:nvSpPr>
@@ -5966,7 +5814,7 @@
       </p:sp>
       <p:sp>
         <p:nvSpPr>
-          <p:cNvPr id="13" name="Text 11"/>
+          <p:cNvPr id="12" name="Text 10"/>
           <p:cNvSpPr/>
           <p:nvPr/>
         </p:nvSpPr>
@@ -6038,7 +5886,7 @@
       </p:sp>
       <p:sp>
         <p:nvSpPr>
-          <p:cNvPr id="14" name="Text 12"/>
+          <p:cNvPr id="13" name="Text 11"/>
           <p:cNvSpPr/>
           <p:nvPr/>
         </p:nvSpPr>
@@ -6110,7 +5958,7 @@
       </p:sp>
       <p:sp>
         <p:nvSpPr>
-          <p:cNvPr id="15" name="Connector line-1792335438604-630118904"/>
+          <p:cNvPr id="14" name="Connector line-1792335438604-630118904"/>
           <p:cNvSpPr/>
           <p:nvPr/>
         </p:nvSpPr>
@@ -6135,7 +5983,7 @@
       </p:sp>
       <p:sp>
         <p:nvSpPr>
-          <p:cNvPr id="16" name="Shape 14"/>
+          <p:cNvPr id="15" name="Shape 13"/>
           <p:cNvSpPr/>
           <p:nvPr/>
         </p:nvSpPr>
@@ -6162,7 +6010,7 @@
       </p:sp>
       <p:sp>
         <p:nvSpPr>
-          <p:cNvPr id="17" name="Text 15"/>
+          <p:cNvPr id="16" name="Text 14"/>
           <p:cNvSpPr/>
           <p:nvPr/>
         </p:nvSpPr>
@@ -6205,7 +6053,7 @@
       </p:sp>
       <p:sp>
         <p:nvSpPr>
-          <p:cNvPr id="18" name="Text 16"/>
+          <p:cNvPr id="17" name="Text 15"/>
           <p:cNvSpPr/>
           <p:nvPr/>
         </p:nvSpPr>
@@ -6277,7 +6125,7 @@
       </p:sp>
       <p:sp>
         <p:nvSpPr>
-          <p:cNvPr id="19" name="Text 17"/>
+          <p:cNvPr id="18" name="Text 16"/>
           <p:cNvSpPr/>
           <p:nvPr/>
         </p:nvSpPr>
@@ -6338,7 +6186,7 @@
       </p:sp>
       <p:sp>
         <p:nvSpPr>
-          <p:cNvPr id="20" name="Connector line-1792335438610-810356881"/>
+          <p:cNvPr id="19" name="Connector line-1792335438610-810356881"/>
           <p:cNvSpPr/>
           <p:nvPr/>
         </p:nvSpPr>
@@ -6363,7 +6211,7 @@
       </p:sp>
       <p:sp>
         <p:nvSpPr>
-          <p:cNvPr id="21" name="Shape 19"/>
+          <p:cNvPr id="20" name="Shape 18"/>
           <p:cNvSpPr/>
           <p:nvPr/>
         </p:nvSpPr>
@@ -6390,7 +6238,7 @@
       </p:sp>
       <p:sp>
         <p:nvSpPr>
-          <p:cNvPr id="22" name="Text 20"/>
+          <p:cNvPr id="21" name="Text 19"/>
           <p:cNvSpPr/>
           <p:nvPr/>
         </p:nvSpPr>
@@ -6433,7 +6281,7 @@
       </p:sp>
       <p:sp>
         <p:nvSpPr>
-          <p:cNvPr id="23" name="Text 21"/>
+          <p:cNvPr id="22" name="Text 20"/>
           <p:cNvSpPr/>
           <p:nvPr/>
         </p:nvSpPr>
@@ -6494,7 +6342,7 @@
       </p:sp>
       <p:sp>
         <p:nvSpPr>
-          <p:cNvPr id="24" name="Text 22"/>
+          <p:cNvPr id="23" name="Text 21"/>
           <p:cNvSpPr/>
           <p:nvPr/>
         </p:nvSpPr>
@@ -6555,7 +6403,7 @@
       </p:sp>
       <p:sp>
         <p:nvSpPr>
-          <p:cNvPr id="25" name="Connector line-1792335438616-682919515"/>
+          <p:cNvPr id="24" name="Connector line-1792335438616-682919515"/>
           <p:cNvSpPr/>
           <p:nvPr/>
         </p:nvSpPr>
@@ -6580,7 +6428,7 @@
       </p:sp>
       <p:sp>
         <p:nvSpPr>
-          <p:cNvPr id="26" name="Shape 24"/>
+          <p:cNvPr id="25" name="Shape 23"/>
           <p:cNvSpPr/>
           <p:nvPr/>
         </p:nvSpPr>
@@ -6607,7 +6455,7 @@
       </p:sp>
       <p:sp>
         <p:nvSpPr>
-          <p:cNvPr id="27" name="Text 25"/>
+          <p:cNvPr id="26" name="Text 24"/>
           <p:cNvSpPr/>
           <p:nvPr/>
         </p:nvSpPr>
@@ -6650,7 +6498,7 @@
       </p:sp>
       <p:sp>
         <p:nvSpPr>
-          <p:cNvPr id="28" name="Text 26"/>
+          <p:cNvPr id="27" name="Text 25"/>
           <p:cNvSpPr/>
           <p:nvPr/>
         </p:nvSpPr>
@@ -6711,7 +6559,7 @@
       </p:sp>
       <p:sp>
         <p:nvSpPr>
-          <p:cNvPr id="29" name="Text 27"/>
+          <p:cNvPr id="28" name="Text 26"/>
           <p:cNvSpPr/>
           <p:nvPr/>
         </p:nvSpPr>
@@ -6816,7 +6664,7 @@
       </p:sp>
       <p:sp>
         <p:nvSpPr>
-          <p:cNvPr id="30" name="Shape 28"/>
+          <p:cNvPr id="29" name="Shape 27"/>
           <p:cNvSpPr/>
           <p:nvPr/>
         </p:nvSpPr>
@@ -6841,7 +6689,7 @@
       </p:sp>
       <p:sp>
         <p:nvSpPr>
-          <p:cNvPr id="31" name="Shape 29"/>
+          <p:cNvPr id="30" name="Shape 28"/>
           <p:cNvSpPr/>
           <p:nvPr/>
         </p:nvSpPr>
@@ -6866,7 +6714,7 @@
       </p:sp>
       <p:sp>
         <p:nvSpPr>
-          <p:cNvPr id="32" name="Shape 30"/>
+          <p:cNvPr id="31" name="Shape 29"/>
           <p:cNvSpPr/>
           <p:nvPr/>
         </p:nvSpPr>
@@ -6891,7 +6739,7 @@
       </p:sp>
       <p:sp>
         <p:nvSpPr>
-          <p:cNvPr id="33" name="Shape 31"/>
+          <p:cNvPr id="32" name="Shape 30"/>
           <p:cNvSpPr/>
           <p:nvPr/>
         </p:nvSpPr>
@@ -6916,7 +6764,7 @@
       </p:sp>
       <p:sp>
         <p:nvSpPr>
-          <p:cNvPr id="34" name="Shape 32"/>
+          <p:cNvPr id="33" name="Shape 31"/>
           <p:cNvSpPr/>
           <p:nvPr/>
         </p:nvSpPr>
@@ -6941,7 +6789,7 @@
       </p:sp>
       <p:sp>
         <p:nvSpPr>
-          <p:cNvPr id="35" name="Shape 33"/>
+          <p:cNvPr id="34" name="Shape 32"/>
           <p:cNvSpPr/>
           <p:nvPr/>
         </p:nvSpPr>
@@ -6966,7 +6814,7 @@
       </p:sp>
       <p:sp>
         <p:nvSpPr>
-          <p:cNvPr id="36" name="Shape 34"/>
+          <p:cNvPr id="35" name="Shape 33"/>
           <p:cNvSpPr/>
           <p:nvPr/>
         </p:nvSpPr>
@@ -6991,7 +6839,7 @@
       </p:sp>
       <p:sp>
         <p:nvSpPr>
-          <p:cNvPr id="37" name="Shape 35"/>
+          <p:cNvPr id="36" name="Shape 34"/>
           <p:cNvSpPr/>
           <p:nvPr/>
         </p:nvSpPr>
@@ -7016,7 +6864,7 @@
       </p:sp>
       <p:sp>
         <p:nvSpPr>
-          <p:cNvPr id="38" name="Shape 36"/>
+          <p:cNvPr id="37" name="Shape 35"/>
           <p:cNvSpPr/>
           <p:nvPr/>
         </p:nvSpPr>
@@ -7041,7 +6889,7 @@
       </p:sp>
       <p:sp>
         <p:nvSpPr>
-          <p:cNvPr id="39" name="Text 37"/>
+          <p:cNvPr id="38" name="Text 36"/>
           <p:cNvSpPr/>
           <p:nvPr/>
         </p:nvSpPr>
@@ -7152,6 +7000,145 @@
               <a:t> 03/09</a:t>
             </a:r>
             <a:endParaRPr lang="en-US" sz="1650" dirty="0"/>
+          </a:p>
+        </p:txBody>
+      </p:sp>
+      <p:sp>
+        <p:nvSpPr>
+          <p:cNvPr id="39" name="Text 37"/>
+          <p:cNvSpPr/>
+          <p:nvPr/>
+        </p:nvSpPr>
+        <p:spPr>
+          <a:xfrm>
+            <a:off x="914400" y="4343400"/>
+            <a:ext cx="7620000" cy="1047750"/>
+          </a:xfrm>
+          <a:prstGeom prst="rect">
+            <a:avLst/>
+          </a:prstGeom>
+          <a:noFill/>
+          <a:ln/>
+        </p:spPr>
+        <p:txBody>
+          <a:bodyPr wrap="square" lIns="0" tIns="6001" rIns="0" bIns="-6001" rtlCol="0" anchor="t"/>
+          <a:lstStyle/>
+          <a:p>
+            <a:pPr algn="l" indent="0" marL="0">
+              <a:lnSpc>
+                <a:spcPts val="3780"/>
+              </a:lnSpc>
+              <a:buNone/>
+            </a:pPr>
+            <a:r>
+              <a:rPr lang="en-US" sz="2700" dirty="0" spc="2" kern="0">
+                <a:solidFill>
+                  <a:srgbClr val="C4C8D6"/>
+                </a:solidFill>
+                <a:latin typeface="Be Vietnam Pro" pitchFamily="34" charset="0"/>
+                <a:ea typeface="Be Vietnam Pro" pitchFamily="34" charset="-122"/>
+                <a:cs typeface="Be Vietnam Pro" pitchFamily="34" charset="-120"/>
+              </a:rPr>
+              <a:t>Mã</a:t>
+            </a:r>
+            <a:r>
+              <a:rPr lang="en-US" sz="2700" dirty="0" spc="-18" kern="0">
+                <a:solidFill>
+                  <a:srgbClr val="C4C8D6"/>
+                </a:solidFill>
+                <a:latin typeface="Be Vietnam Pro" pitchFamily="34" charset="0"/>
+                <a:ea typeface="Be Vietnam Pro" pitchFamily="34" charset="-122"/>
+                <a:cs typeface="Be Vietnam Pro" pitchFamily="34" charset="-120"/>
+              </a:rPr>
+              <a:t> gốc</a:t>
+            </a:r>
+            <a:r>
+              <a:rPr lang="en-US" sz="2700" dirty="0" spc="6" kern="0">
+                <a:solidFill>
+                  <a:srgbClr val="C4C8D6"/>
+                </a:solidFill>
+                <a:latin typeface="Be Vietnam Pro" pitchFamily="34" charset="0"/>
+                <a:ea typeface="Be Vietnam Pro" pitchFamily="34" charset="-122"/>
+                <a:cs typeface="Be Vietnam Pro" pitchFamily="34" charset="-120"/>
+              </a:rPr>
+              <a:t> thường</a:t>
+            </a:r>
+            <a:r>
+              <a:rPr lang="en-US" sz="2700" dirty="0" spc="9" kern="0">
+                <a:solidFill>
+                  <a:srgbClr val="C4C8D6"/>
+                </a:solidFill>
+                <a:latin typeface="Be Vietnam Pro" pitchFamily="34" charset="0"/>
+                <a:ea typeface="Be Vietnam Pro" pitchFamily="34" charset="-122"/>
+                <a:cs typeface="Be Vietnam Pro" pitchFamily="34" charset="-120"/>
+              </a:rPr>
+              <a:t> được</a:t>
+            </a:r>
+            <a:r>
+              <a:rPr lang="en-US" sz="2700" dirty="0" spc="-3" kern="0">
+                <a:solidFill>
+                  <a:srgbClr val="C4C8D6"/>
+                </a:solidFill>
+                <a:latin typeface="Be Vietnam Pro" pitchFamily="34" charset="0"/>
+                <a:ea typeface="Be Vietnam Pro" pitchFamily="34" charset="-122"/>
+                <a:cs typeface="Be Vietnam Pro" pitchFamily="34" charset="-120"/>
+              </a:rPr>
+              <a:t> biên</a:t>
+            </a:r>
+            <a:r>
+              <a:rPr lang="en-US" sz="2700" dirty="0" spc="-1" kern="0">
+                <a:solidFill>
+                  <a:srgbClr val="C4C8D6"/>
+                </a:solidFill>
+                <a:latin typeface="Be Vietnam Pro" pitchFamily="34" charset="0"/>
+                <a:ea typeface="Be Vietnam Pro" pitchFamily="34" charset="-122"/>
+                <a:cs typeface="Be Vietnam Pro" pitchFamily="34" charset="-120"/>
+              </a:rPr>
+              <a:t> dịch</a:t>
+            </a:r>
+            <a:endParaRPr lang="en-US" sz="2700" dirty="0"/>
+          </a:p>
+          <a:p>
+            <a:pPr algn="l" indent="0" marL="0">
+              <a:lnSpc>
+                <a:spcPts val="3780"/>
+              </a:lnSpc>
+              <a:buNone/>
+            </a:pPr>
+            <a:r>
+              <a:rPr lang="en-US" sz="2700" dirty="0" spc="-58" kern="0">
+                <a:solidFill>
+                  <a:srgbClr val="C4C8D6"/>
+                </a:solidFill>
+                <a:latin typeface="Be Vietnam Pro" pitchFamily="34" charset="0"/>
+                <a:ea typeface="Be Vietnam Pro" pitchFamily="34" charset="-122"/>
+                <a:cs typeface="Be Vietnam Pro" pitchFamily="34" charset="-120"/>
+              </a:rPr>
+              <a:t>ra</a:t>
+            </a:r>
+            <a:r>
+              <a:rPr lang="en-US" sz="2700" dirty="0" spc="0" kern="0">
+                <a:solidFill>
+                  <a:srgbClr val="C4C8D6"/>
+                </a:solidFill>
+                <a:latin typeface="Be Vietnam Pro" pitchFamily="34" charset="0"/>
+                <a:ea typeface="Be Vietnam Pro" pitchFamily="34" charset="-122"/>
+                <a:cs typeface="Be Vietnam Pro" pitchFamily="34" charset="-120"/>
+              </a:rPr>
+              <a:t> mô-đun</a:t>
+            </a:r>
+            <a:r>
+              <a:rPr lang="en-US" sz="2700" dirty="0" spc="-50" kern="0">
+                <a:solidFill>
+                  <a:srgbClr val="C4C8D6"/>
+                </a:solidFill>
+                <a:latin typeface="Be Vietnam Pro" pitchFamily="34" charset="0"/>
+                <a:ea typeface="Be Vietnam Pro" pitchFamily="34" charset="-122"/>
+                <a:cs typeface="Be Vietnam Pro" pitchFamily="34" charset="-120"/>
+              </a:rPr>
+              <a:t> WASM.</a:t>
+            </a:r>
+            <a:endParaRPr lang="en-US" sz="2700" dirty="0"/>
           </a:p>
         </p:txBody>
       </p:sp>
@@ -14371,7 +14358,203 @@
       </p:sp>
       <p:sp>
         <p:nvSpPr>
-          <p:cNvPr id="35" name="Shape 33"/>
+          <p:cNvPr id="35" name="Text 33"/>
+          <p:cNvSpPr/>
+          <p:nvPr/>
+        </p:nvSpPr>
+        <p:spPr>
+          <a:xfrm>
+            <a:off x="914400" y="5676900"/>
+            <a:ext cx="7620000" cy="762000"/>
+          </a:xfrm>
+          <a:prstGeom prst="rect">
+            <a:avLst/>
+          </a:prstGeom>
+          <a:noFill/>
+          <a:ln/>
+        </p:spPr>
+        <p:txBody>
+          <a:bodyPr wrap="square" lIns="0" tIns="4667" rIns="0" bIns="-4667" rtlCol="0" anchor="t"/>
+          <a:lstStyle/>
+          <a:p>
+            <a:pPr algn="l" indent="0" marL="0">
+              <a:lnSpc>
+                <a:spcPts val="2940"/>
+              </a:lnSpc>
+              <a:buNone/>
+            </a:pPr>
+            <a:r>
+              <a:rPr lang="en-US" sz="2100" dirty="0" spc="-59" kern="0">
+                <a:solidFill>
+                  <a:srgbClr val="C4C8D6"/>
+                </a:solidFill>
+                <a:latin typeface="Be Vietnam Pro" pitchFamily="34" charset="0"/>
+                <a:ea typeface="Be Vietnam Pro" pitchFamily="34" charset="-122"/>
+                <a:cs typeface="Be Vietnam Pro" pitchFamily="34" charset="-120"/>
+              </a:rPr>
+              <a:t>WASM</a:t>
+            </a:r>
+            <a:r>
+              <a:rPr lang="en-US" sz="2100" dirty="0" spc="-4" kern="0">
+                <a:solidFill>
+                  <a:srgbClr val="C4C8D6"/>
+                </a:solidFill>
+                <a:latin typeface="Be Vietnam Pro" pitchFamily="34" charset="0"/>
+                <a:ea typeface="Be Vietnam Pro" pitchFamily="34" charset="-122"/>
+                <a:cs typeface="Be Vietnam Pro" pitchFamily="34" charset="-120"/>
+              </a:rPr>
+              <a:t> có</a:t>
+            </a:r>
+            <a:r>
+              <a:rPr lang="en-US" sz="2100" dirty="0" spc="-2" kern="0">
+                <a:solidFill>
+                  <a:srgbClr val="C4C8D6"/>
+                </a:solidFill>
+                <a:latin typeface="Be Vietnam Pro" pitchFamily="34" charset="0"/>
+                <a:ea typeface="Be Vietnam Pro" pitchFamily="34" charset="-122"/>
+                <a:cs typeface="Be Vietnam Pro" pitchFamily="34" charset="-120"/>
+              </a:rPr>
+              <a:t> dạng</a:t>
+            </a:r>
+            <a:r>
+              <a:rPr lang="en-US" sz="2100" dirty="0" spc="-13" kern="0">
+                <a:solidFill>
+                  <a:srgbClr val="C4C8D6"/>
+                </a:solidFill>
+                <a:latin typeface="Be Vietnam Pro" pitchFamily="34" charset="0"/>
+                <a:ea typeface="Be Vietnam Pro" pitchFamily="34" charset="-122"/>
+                <a:cs typeface="Be Vietnam Pro" pitchFamily="34" charset="-120"/>
+              </a:rPr>
+              <a:t> văn</a:t>
+            </a:r>
+            <a:r>
+              <a:rPr lang="en-US" sz="2100" dirty="0" spc="-5" kern="0">
+                <a:solidFill>
+                  <a:srgbClr val="C4C8D6"/>
+                </a:solidFill>
+                <a:latin typeface="Be Vietnam Pro" pitchFamily="34" charset="0"/>
+                <a:ea typeface="Be Vietnam Pro" pitchFamily="34" charset="-122"/>
+                <a:cs typeface="Be Vietnam Pro" pitchFamily="34" charset="-120"/>
+              </a:rPr>
+              <a:t> bản</a:t>
+            </a:r>
+            <a:r>
+              <a:rPr lang="en-US" sz="2100" dirty="0" spc="6" kern="0">
+                <a:solidFill>
+                  <a:srgbClr val="C4C8D6"/>
+                </a:solidFill>
+                <a:latin typeface="Be Vietnam Pro" pitchFamily="34" charset="0"/>
+                <a:ea typeface="Be Vietnam Pro" pitchFamily="34" charset="-122"/>
+                <a:cs typeface="Be Vietnam Pro" pitchFamily="34" charset="-120"/>
+              </a:rPr>
+              <a:t> đọc</a:t>
+            </a:r>
+            <a:r>
+              <a:rPr lang="en-US" sz="2100" dirty="0" spc="3" kern="0">
+                <a:solidFill>
+                  <a:srgbClr val="C4C8D6"/>
+                </a:solidFill>
+                <a:latin typeface="Be Vietnam Pro" pitchFamily="34" charset="0"/>
+                <a:ea typeface="Be Vietnam Pro" pitchFamily="34" charset="-122"/>
+                <a:cs typeface="Be Vietnam Pro" pitchFamily="34" charset="-120"/>
+              </a:rPr>
+              <a:t> được,</a:t>
+            </a:r>
+            <a:r>
+              <a:rPr lang="en-US" sz="2100" dirty="0" spc="14" kern="0">
+                <a:solidFill>
+                  <a:srgbClr val="C4C8D6"/>
+                </a:solidFill>
+                <a:latin typeface="Be Vietnam Pro" pitchFamily="34" charset="0"/>
+                <a:ea typeface="Be Vietnam Pro" pitchFamily="34" charset="-122"/>
+                <a:cs typeface="Be Vietnam Pro" pitchFamily="34" charset="-120"/>
+              </a:rPr>
+              <a:t> nhưng</a:t>
+            </a:r>
+            <a:r>
+              <a:rPr lang="en-US" sz="2100" dirty="0" spc="3" kern="0">
+                <a:solidFill>
+                  <a:srgbClr val="C4C8D6"/>
+                </a:solidFill>
+                <a:latin typeface="Be Vietnam Pro" pitchFamily="34" charset="0"/>
+                <a:ea typeface="Be Vietnam Pro" pitchFamily="34" charset="-122"/>
+                <a:cs typeface="Be Vietnam Pro" pitchFamily="34" charset="-120"/>
+              </a:rPr>
+              <a:t> thường</a:t>
+            </a:r>
+            <a:r>
+              <a:rPr lang="en-US" sz="2100" dirty="0" spc="-4" kern="0">
+                <a:solidFill>
+                  <a:srgbClr val="C4C8D6"/>
+                </a:solidFill>
+                <a:latin typeface="Be Vietnam Pro" pitchFamily="34" charset="0"/>
+                <a:ea typeface="Be Vietnam Pro" pitchFamily="34" charset="-122"/>
+                <a:cs typeface="Be Vietnam Pro" pitchFamily="34" charset="-120"/>
+              </a:rPr>
+              <a:t> do</a:t>
+            </a:r>
+            <a:r>
+              <a:rPr lang="en-US" sz="2100" dirty="0" spc="7" kern="0">
+                <a:solidFill>
+                  <a:srgbClr val="C4C8D6"/>
+                </a:solidFill>
+                <a:latin typeface="Be Vietnam Pro" pitchFamily="34" charset="0"/>
+                <a:ea typeface="Be Vietnam Pro" pitchFamily="34" charset="-122"/>
+                <a:cs typeface="Be Vietnam Pro" pitchFamily="34" charset="-120"/>
+              </a:rPr>
+              <a:t> trình</a:t>
+            </a:r>
+            <a:r>
+              <a:rPr lang="en-US" sz="2100" dirty="0" spc="0" kern="0">
+                <a:solidFill>
+                  <a:srgbClr val="C4C8D6"/>
+                </a:solidFill>
+                <a:latin typeface="Be Vietnam Pro" pitchFamily="34" charset="0"/>
+                <a:ea typeface="Be Vietnam Pro" pitchFamily="34" charset="-122"/>
+                <a:cs typeface="Be Vietnam Pro" pitchFamily="34" charset="-120"/>
+              </a:rPr>
+              <a:t> biên</a:t>
+            </a:r>
+            <a:r>
+              <a:rPr lang="en-US" sz="2100" dirty="0" spc="-1" kern="0">
+                <a:solidFill>
+                  <a:srgbClr val="C4C8D6"/>
+                </a:solidFill>
+                <a:latin typeface="Be Vietnam Pro" pitchFamily="34" charset="0"/>
+                <a:ea typeface="Be Vietnam Pro" pitchFamily="34" charset="-122"/>
+                <a:cs typeface="Be Vietnam Pro" pitchFamily="34" charset="-120"/>
+              </a:rPr>
+              <a:t> dịch</a:t>
+            </a:r>
+            <a:r>
+              <a:rPr lang="en-US" sz="2100" dirty="0" spc="-14" kern="0">
+                <a:solidFill>
+                  <a:srgbClr val="C4C8D6"/>
+                </a:solidFill>
+                <a:latin typeface="Be Vietnam Pro" pitchFamily="34" charset="0"/>
+                <a:ea typeface="Be Vietnam Pro" pitchFamily="34" charset="-122"/>
+                <a:cs typeface="Be Vietnam Pro" pitchFamily="34" charset="-120"/>
+              </a:rPr>
+              <a:t> tạo</a:t>
+            </a:r>
+            <a:r>
+              <a:rPr lang="en-US" sz="2100" dirty="0" spc="-22" kern="0">
+                <a:solidFill>
+                  <a:srgbClr val="C4C8D6"/>
+                </a:solidFill>
+                <a:latin typeface="Be Vietnam Pro" pitchFamily="34" charset="0"/>
+                <a:ea typeface="Be Vietnam Pro" pitchFamily="34" charset="-122"/>
+                <a:cs typeface="Be Vietnam Pro" pitchFamily="34" charset="-120"/>
+              </a:rPr>
+              <a:t> ra.</a:t>
+            </a:r>
+            <a:endParaRPr lang="en-US" sz="2100" dirty="0"/>
+          </a:p>
+        </p:txBody>
+      </p:sp>
+      <p:sp>
+        <p:nvSpPr>
+          <p:cNvPr id="36" name="Shape 34"/>
           <p:cNvSpPr/>
           <p:nvPr/>
         </p:nvSpPr>
@@ -14395,7 +14578,7 @@
       </p:sp>
       <p:pic>
         <p:nvPicPr>
-          <p:cNvPr id="36" name="Moda image moda-export-watermark-cd59b3fe-3cb3-40e1-a95a-6d4beaabb8da" descr="">    </p:cNvPr>
+          <p:cNvPr id="37" name="Moda image moda-export-watermark-cd59b3fe-3cb3-40e1-a95a-6d4beaabb8da" descr="">    </p:cNvPr>
           <p:cNvPicPr>
             <a:picLocks noChangeAspect="1"/>
           </p:cNvPicPr>

--- a/system-design-101/vi/lessons/sd-10-006/slides/sd-10-006.pptx
+++ b/system-design-101/vi/lessons/sd-10-006/slides/sd-10-006.pptx
@@ -1742,6 +1742,61 @@
               <a:t> sao</a:t>
             </a:r>
             <a:r>
+              <a:rPr lang="en-US" sz="3000" dirty="0" spc="2" kern="0">
+                <a:solidFill>
+                  <a:srgbClr val="C4C8D6"/>
+                </a:solidFill>
+                <a:latin typeface="Be Vietnam Pro" pitchFamily="34" charset="0"/>
+                <a:ea typeface="Be Vietnam Pro" pitchFamily="34" charset="-122"/>
+                <a:cs typeface="Be Vietnam Pro" pitchFamily="34" charset="-120"/>
+              </a:rPr>
+              <a:t> mã</a:t>
+            </a:r>
+            <a:r>
+              <a:rPr lang="en-US" sz="3000" dirty="0" spc="-1" kern="0">
+                <a:solidFill>
+                  <a:srgbClr val="C4C8D6"/>
+                </a:solidFill>
+                <a:latin typeface="Be Vietnam Pro" pitchFamily="34" charset="0"/>
+                <a:ea typeface="Be Vietnam Pro" pitchFamily="34" charset="-122"/>
+                <a:cs typeface="Be Vietnam Pro" pitchFamily="34" charset="-120"/>
+              </a:rPr>
+              <a:t> C,</a:t>
+            </a:r>
+            <a:r>
+              <a:rPr lang="en-US" sz="3000" dirty="0" spc="0" kern="0">
+                <a:solidFill>
+                  <a:srgbClr val="C4C8D6"/>
+                </a:solidFill>
+                <a:latin typeface="Be Vietnam Pro" pitchFamily="34" charset="0"/>
+                <a:ea typeface="Be Vietnam Pro" pitchFamily="34" charset="-122"/>
+                <a:cs typeface="Be Vietnam Pro" pitchFamily="34" charset="-120"/>
+              </a:rPr>
+              <a:t> C++</a:t>
+            </a:r>
+            <a:r>
+              <a:rPr lang="en-US" sz="3000" dirty="0" spc="-11" kern="0">
+                <a:solidFill>
+                  <a:srgbClr val="C4C8D6"/>
+                </a:solidFill>
+                <a:latin typeface="Be Vietnam Pro" pitchFamily="34" charset="0"/>
+                <a:ea typeface="Be Vietnam Pro" pitchFamily="34" charset="-122"/>
+                <a:cs typeface="Be Vietnam Pro" pitchFamily="34" charset="-120"/>
+              </a:rPr>
+              <a:t> hay</a:t>
+            </a:r>
+            <a:r>
+              <a:rPr lang="en-US" sz="3000" dirty="0" spc="-36" kern="0">
+                <a:solidFill>
+                  <a:srgbClr val="C4C8D6"/>
+                </a:solidFill>
+                <a:latin typeface="Be Vietnam Pro" pitchFamily="34" charset="0"/>
+                <a:ea typeface="Be Vietnam Pro" pitchFamily="34" charset="-122"/>
+                <a:cs typeface="Be Vietnam Pro" pitchFamily="34" charset="-120"/>
+              </a:rPr>
+              <a:t> Rust</a:t>
+            </a:r>
+            <a:r>
               <a:rPr lang="en-US" sz="3000" dirty="0" spc="-9" kern="0">
                 <a:solidFill>
                   <a:srgbClr val="C4C8D6"/>
@@ -1753,7 +1808,7 @@
               <a:t> chạy</a:t>
             </a:r>
             <a:r>
-              <a:rPr lang="en-US" sz="3000" dirty="0" spc="1" kern="0">
+              <a:rPr lang="en-US" sz="3000" dirty="0" spc="11" kern="0">
                 <a:solidFill>
                   <a:srgbClr val="C4C8D6"/>
                 </a:solidFill>
@@ -1761,10 +1816,10 @@
                 <a:ea typeface="Be Vietnam Pro" pitchFamily="34" charset="-122"/>
                 <a:cs typeface="Be Vietnam Pro" pitchFamily="34" charset="-120"/>
               </a:rPr>
-              <a:t> mã</a:t>
-            </a:r>
-            <a:r>
-              <a:rPr lang="en-US" sz="3000" dirty="0" spc="0" kern="0">
+              <a:t> được</a:t>
+            </a:r>
+            <a:r>
+              <a:rPr lang="en-US" sz="3000" dirty="0" spc="-1" kern="0">
                 <a:solidFill>
                   <a:srgbClr val="C4C8D6"/>
                 </a:solidFill>
@@ -1772,10 +1827,10 @@
                 <a:ea typeface="Be Vietnam Pro" pitchFamily="34" charset="-122"/>
                 <a:cs typeface="Be Vietnam Pro" pitchFamily="34" charset="-120"/>
               </a:rPr>
-              <a:t> C, C++</a:t>
-            </a:r>
-            <a:r>
-              <a:rPr lang="en-US" sz="3000" dirty="0" spc="-11" kern="0">
+              <a:t> cạnh</a:t>
+            </a:r>
+            <a:r>
+              <a:rPr lang="en-US" sz="3000" dirty="0" spc="-7" kern="0">
                 <a:solidFill>
                   <a:srgbClr val="C4C8D6"/>
                 </a:solidFill>
@@ -1783,10 +1838,10 @@
                 <a:ea typeface="Be Vietnam Pro" pitchFamily="34" charset="-122"/>
                 <a:cs typeface="Be Vietnam Pro" pitchFamily="34" charset="-120"/>
               </a:rPr>
-              <a:t> hay</a:t>
-            </a:r>
-            <a:r>
-              <a:rPr lang="en-US" sz="3000" dirty="0" spc="-36" kern="0">
+              <a:t> JavaScript</a:t>
+            </a:r>
+            <a:r>
+              <a:rPr lang="en-US" sz="3000" dirty="0" spc="-19" kern="0">
                 <a:solidFill>
                   <a:srgbClr val="C4C8D6"/>
                 </a:solidFill>
@@ -1794,10 +1849,10 @@
                 <a:ea typeface="Be Vietnam Pro" pitchFamily="34" charset="-122"/>
                 <a:cs typeface="Be Vietnam Pro" pitchFamily="34" charset="-120"/>
               </a:rPr>
-              <a:t> Rust</a:t>
-            </a:r>
-            <a:r>
-              <a:rPr lang="en-US" sz="3000" dirty="0" spc="-21" kern="0">
+              <a:t> trong</a:t>
+            </a:r>
+            <a:r>
+              <a:rPr lang="en-US" sz="3000" dirty="0" spc="9" kern="0">
                 <a:solidFill>
                   <a:srgbClr val="C4C8D6"/>
                 </a:solidFill>
@@ -1805,7 +1860,7 @@
                 <a:ea typeface="Be Vietnam Pro" pitchFamily="34" charset="-122"/>
                 <a:cs typeface="Be Vietnam Pro" pitchFamily="34" charset="-120"/>
               </a:rPr>
-              <a:t> ngay</a:t>
+              <a:t> trình</a:t>
             </a:r>
             <a:r>
               <a:rPr lang="en-US" sz="3000" dirty="0" spc="-20" kern="0">
@@ -1816,95 +1871,7 @@
                 <a:ea typeface="Be Vietnam Pro" pitchFamily="34" charset="-122"/>
                 <a:cs typeface="Be Vietnam Pro" pitchFamily="34" charset="-120"/>
               </a:rPr>
-              <a:t> trong</a:t>
-            </a:r>
-            <a:r>
-              <a:rPr lang="en-US" sz="3000" dirty="0" spc="9" kern="0">
-                <a:solidFill>
-                  <a:srgbClr val="C4C8D6"/>
-                </a:solidFill>
-                <a:latin typeface="Be Vietnam Pro" pitchFamily="34" charset="0"/>
-                <a:ea typeface="Be Vietnam Pro" pitchFamily="34" charset="-122"/>
-                <a:cs typeface="Be Vietnam Pro" pitchFamily="34" charset="-120"/>
-              </a:rPr>
-              <a:t> trình</a:t>
-            </a:r>
-            <a:r>
-              <a:rPr lang="en-US" sz="3000" dirty="0" spc="-19" kern="0">
-                <a:solidFill>
-                  <a:srgbClr val="C4C8D6"/>
-                </a:solidFill>
-                <a:latin typeface="Be Vietnam Pro" pitchFamily="34" charset="0"/>
-                <a:ea typeface="Be Vietnam Pro" pitchFamily="34" charset="-122"/>
-                <a:cs typeface="Be Vietnam Pro" pitchFamily="34" charset="-120"/>
-              </a:rPr>
-              <a:t> duyệt,</a:t>
-            </a:r>
-            <a:r>
-              <a:rPr lang="en-US" sz="3000" dirty="0" spc="-11" kern="0">
-                <a:solidFill>
-                  <a:srgbClr val="C4C8D6"/>
-                </a:solidFill>
-                <a:latin typeface="Be Vietnam Pro" pitchFamily="34" charset="0"/>
-                <a:ea typeface="Be Vietnam Pro" pitchFamily="34" charset="-122"/>
-                <a:cs typeface="Be Vietnam Pro" pitchFamily="34" charset="-120"/>
-              </a:rPr>
-              <a:t> với</a:t>
-            </a:r>
-            <a:r>
-              <a:rPr lang="en-US" sz="3000" dirty="0" spc="1" kern="0">
-                <a:solidFill>
-                  <a:srgbClr val="C4C8D6"/>
-                </a:solidFill>
-                <a:latin typeface="Be Vietnam Pro" pitchFamily="34" charset="0"/>
-                <a:ea typeface="Be Vietnam Pro" pitchFamily="34" charset="-122"/>
-                <a:cs typeface="Be Vietnam Pro" pitchFamily="34" charset="-120"/>
-              </a:rPr>
-              <a:t> hiệu</a:t>
-            </a:r>
-            <a:r>
-              <a:rPr lang="en-US" sz="3000" dirty="0" spc="-2" kern="0">
-                <a:solidFill>
-                  <a:srgbClr val="C4C8D6"/>
-                </a:solidFill>
-                <a:latin typeface="Be Vietnam Pro" pitchFamily="34" charset="0"/>
-                <a:ea typeface="Be Vietnam Pro" pitchFamily="34" charset="-122"/>
-                <a:cs typeface="Be Vietnam Pro" pitchFamily="34" charset="-120"/>
-              </a:rPr>
-              <a:t> năng</a:t>
-            </a:r>
-            <a:r>
-              <a:rPr lang="en-US" sz="3000" dirty="0" spc="-15" kern="0">
-                <a:solidFill>
-                  <a:srgbClr val="C4C8D6"/>
-                </a:solidFill>
-                <a:latin typeface="Be Vietnam Pro" pitchFamily="34" charset="0"/>
-                <a:ea typeface="Be Vietnam Pro" pitchFamily="34" charset="-122"/>
-                <a:cs typeface="Be Vietnam Pro" pitchFamily="34" charset="-120"/>
-              </a:rPr>
-              <a:t> gần</a:t>
-            </a:r>
-            <a:r>
-              <a:rPr lang="en-US" sz="3000" dirty="0" spc="1" kern="0">
-                <a:solidFill>
-                  <a:srgbClr val="C4C8D6"/>
-                </a:solidFill>
-                <a:latin typeface="Be Vietnam Pro" pitchFamily="34" charset="0"/>
-                <a:ea typeface="Be Vietnam Pro" pitchFamily="34" charset="-122"/>
-                <a:cs typeface="Be Vietnam Pro" pitchFamily="34" charset="-120"/>
-              </a:rPr>
-              <a:t> mã</a:t>
-            </a:r>
-            <a:r>
-              <a:rPr lang="en-US" sz="3000" dirty="0" spc="-14" kern="0">
-                <a:solidFill>
-                  <a:srgbClr val="C4C8D6"/>
-                </a:solidFill>
-                <a:latin typeface="Be Vietnam Pro" pitchFamily="34" charset="0"/>
-                <a:ea typeface="Be Vietnam Pro" pitchFamily="34" charset="-122"/>
-                <a:cs typeface="Be Vietnam Pro" pitchFamily="34" charset="-120"/>
-              </a:rPr>
-              <a:t> gốc?</a:t>
+              <a:t> duyệt?</a:t>
             </a:r>
             <a:endParaRPr lang="en-US" sz="3000" dirty="0"/>
           </a:p>
@@ -2931,7 +2898,7 @@
               <a:buNone/>
             </a:pPr>
             <a:r>
-              <a:rPr lang="en-US" sz="2100" dirty="0" spc="-14" kern="0">
+              <a:rPr lang="en-US" sz="2100" dirty="0" spc="-9" kern="0">
                 <a:solidFill>
                   <a:srgbClr val="C4C8D6"/>
                 </a:solidFill>
@@ -2939,10 +2906,10 @@
                 <a:ea typeface="Be Vietnam Pro" pitchFamily="34" charset="-122"/>
                 <a:cs typeface="Be Vietnam Pro" pitchFamily="34" charset="-120"/>
               </a:rPr>
-              <a:t>tải</a:t>
-            </a:r>
-            <a:r>
-              <a:rPr lang="en-US" sz="2100" dirty="0" spc="0" kern="0">
+              <a:t>chạy</a:t>
+            </a:r>
+            <a:r>
+              <a:rPr lang="en-US" sz="2100" dirty="0" spc="-1" kern="0">
                 <a:solidFill>
                   <a:srgbClr val="C4C8D6"/>
                 </a:solidFill>
@@ -2950,10 +2917,10 @@
                 <a:ea typeface="Be Vietnam Pro" pitchFamily="34" charset="-122"/>
                 <a:cs typeface="Be Vietnam Pro" pitchFamily="34" charset="-120"/>
               </a:rPr>
-              <a:t> mô-đun cùng</a:t>
-            </a:r>
-            <a:r>
-              <a:rPr lang="en-US" sz="2100" dirty="0" spc="-4" kern="0">
+              <a:t> cạnh</a:t>
+            </a:r>
+            <a:r>
+              <a:rPr lang="en-US" sz="2100" dirty="0" spc="-6" kern="0">
                 <a:solidFill>
                   <a:srgbClr val="C4C8D6"/>
                 </a:solidFill>
@@ -3648,7 +3615,7 @@
               <a:buNone/>
             </a:pPr>
             <a:r>
-              <a:rPr lang="en-US" sz="2850" dirty="0" spc="2" kern="0">
+              <a:rPr lang="en-US" sz="2850" dirty="0" spc="-28" kern="0">
                 <a:solidFill>
                   <a:srgbClr val="14161C"/>
                 </a:solidFill>
@@ -3656,7 +3623,29 @@
                 <a:ea typeface="Be Vietnam Pro" pitchFamily="34" charset="-122"/>
                 <a:cs typeface="Be Vietnam Pro" pitchFamily="34" charset="-120"/>
               </a:rPr>
-              <a:t>Mã</a:t>
+              <a:t>Trình</a:t>
+            </a:r>
+            <a:r>
+              <a:rPr lang="en-US" sz="2850" dirty="0" spc="-23" kern="0">
+                <a:solidFill>
+                  <a:srgbClr val="14161C"/>
+                </a:solidFill>
+                <a:latin typeface="Be Vietnam Pro" pitchFamily="34" charset="0"/>
+                <a:ea typeface="Be Vietnam Pro" pitchFamily="34" charset="-122"/>
+                <a:cs typeface="Be Vietnam Pro" pitchFamily="34" charset="-120"/>
+              </a:rPr>
+              <a:t> duyệt</a:t>
+            </a:r>
+            <a:r>
+              <a:rPr lang="en-US" sz="2850" dirty="0" spc="-1" kern="0">
+                <a:solidFill>
+                  <a:srgbClr val="14161C"/>
+                </a:solidFill>
+                <a:latin typeface="Be Vietnam Pro" pitchFamily="34" charset="0"/>
+                <a:ea typeface="Be Vietnam Pro" pitchFamily="34" charset="-122"/>
+                <a:cs typeface="Be Vietnam Pro" pitchFamily="34" charset="-120"/>
+              </a:rPr>
+              <a:t> nạp thêm loại</a:t>
             </a:r>
             <a:r>
               <a:rPr lang="en-US" sz="2850" dirty="0" spc="1" kern="0">
@@ -3667,10 +3656,10 @@
                 <a:ea typeface="Be Vietnam Pro" pitchFamily="34" charset="-122"/>
                 <a:cs typeface="Be Vietnam Pro" pitchFamily="34" charset="-120"/>
               </a:rPr>
-              <a:t> C,</a:t>
-            </a:r>
-            <a:r>
-              <a:rPr lang="en-US" sz="2850" dirty="0" spc="-2" kern="0">
+              <a:t> mã</a:t>
+            </a:r>
+            <a:r>
+              <a:rPr lang="en-US" sz="2850" dirty="0" spc="-1" kern="0">
                 <a:solidFill>
                   <a:srgbClr val="14161C"/>
                 </a:solidFill>
@@ -3678,10 +3667,10 @@
                 <a:ea typeface="Be Vietnam Pro" pitchFamily="34" charset="-122"/>
                 <a:cs typeface="Be Vietnam Pro" pitchFamily="34" charset="-120"/>
               </a:rPr>
-              <a:t> C++</a:t>
-            </a:r>
-            <a:r>
-              <a:rPr lang="en-US" sz="2850" dirty="0" spc="-8" kern="0">
+              <a:t> thứ</a:t>
+            </a:r>
+            <a:r>
+              <a:rPr lang="en-US" sz="2850" dirty="0" spc="3" kern="0">
                 <a:solidFill>
                   <a:srgbClr val="14161C"/>
                 </a:solidFill>
@@ -3689,10 +3678,10 @@
                 <a:ea typeface="Be Vietnam Pro" pitchFamily="34" charset="-122"/>
                 <a:cs typeface="Be Vietnam Pro" pitchFamily="34" charset="-120"/>
               </a:rPr>
-              <a:t> hay</a:t>
-            </a:r>
-            <a:r>
-              <a:rPr lang="en-US" sz="2850" dirty="0" spc="-34" kern="0">
+              <a:t> hai:</a:t>
+            </a:r>
+            <a:r>
+              <a:rPr lang="en-US" sz="2850" dirty="0" spc="-51" kern="0">
                 <a:solidFill>
                   <a:srgbClr val="14161C"/>
                 </a:solidFill>
@@ -3700,7 +3689,7 @@
                 <a:ea typeface="Be Vietnam Pro" pitchFamily="34" charset="-122"/>
                 <a:cs typeface="Be Vietnam Pro" pitchFamily="34" charset="-120"/>
               </a:rPr>
-              <a:t> Rust</a:t>
+              <a:t> WASM,</a:t>
             </a:r>
             <a:r>
               <a:rPr lang="en-US" sz="2850" dirty="0" spc="-9" kern="0">
@@ -3714,7 +3703,7 @@
               <a:t> chạy</a:t>
             </a:r>
             <a:r>
-              <a:rPr lang="en-US" sz="2850" dirty="0" spc="-20" kern="0">
+              <a:rPr lang="en-US" sz="2850" dirty="0" spc="-1" kern="0">
                 <a:solidFill>
                   <a:srgbClr val="14161C"/>
                 </a:solidFill>
@@ -3722,62 +3711,7 @@
                 <a:ea typeface="Be Vietnam Pro" pitchFamily="34" charset="-122"/>
                 <a:cs typeface="Be Vietnam Pro" pitchFamily="34" charset="-120"/>
               </a:rPr>
-              <a:t> ngay</a:t>
-            </a:r>
-            <a:r>
-              <a:rPr lang="en-US" sz="2850" dirty="0" spc="-19" kern="0">
-                <a:solidFill>
-                  <a:srgbClr val="14161C"/>
-                </a:solidFill>
-                <a:latin typeface="Be Vietnam Pro" pitchFamily="34" charset="0"/>
-                <a:ea typeface="Be Vietnam Pro" pitchFamily="34" charset="-122"/>
-                <a:cs typeface="Be Vietnam Pro" pitchFamily="34" charset="-120"/>
-              </a:rPr>
-              <a:t> trong</a:t>
-            </a:r>
-            <a:r>
-              <a:rPr lang="en-US" sz="2850" dirty="0" spc="10" kern="0">
-                <a:solidFill>
-                  <a:srgbClr val="14161C"/>
-                </a:solidFill>
-                <a:latin typeface="Be Vietnam Pro" pitchFamily="34" charset="0"/>
-                <a:ea typeface="Be Vietnam Pro" pitchFamily="34" charset="-122"/>
-                <a:cs typeface="Be Vietnam Pro" pitchFamily="34" charset="-120"/>
-              </a:rPr>
-              <a:t> trình</a:t>
-            </a:r>
-            <a:r>
-              <a:rPr lang="en-US" sz="2850" dirty="0" spc="-19" kern="0">
-                <a:solidFill>
-                  <a:srgbClr val="14161C"/>
-                </a:solidFill>
-                <a:latin typeface="Be Vietnam Pro" pitchFamily="34" charset="0"/>
-                <a:ea typeface="Be Vietnam Pro" pitchFamily="34" charset="-122"/>
-                <a:cs typeface="Be Vietnam Pro" pitchFamily="34" charset="-120"/>
-              </a:rPr>
-              <a:t> duyệt,</a:t>
-            </a:r>
-            <a:r>
-              <a:rPr lang="en-US" sz="2850" dirty="0" spc="-3" kern="0">
-                <a:solidFill>
-                  <a:srgbClr val="14161C"/>
-                </a:solidFill>
-                <a:latin typeface="Be Vietnam Pro" pitchFamily="34" charset="0"/>
-                <a:ea typeface="Be Vietnam Pro" pitchFamily="34" charset="-122"/>
-                <a:cs typeface="Be Vietnam Pro" pitchFamily="34" charset="-120"/>
-              </a:rPr>
-              <a:t> không</a:t>
-            </a:r>
-            <a:r>
-              <a:rPr lang="en-US" sz="2850" dirty="0" spc="0" kern="0">
-                <a:solidFill>
-                  <a:srgbClr val="14161C"/>
-                </a:solidFill>
-                <a:latin typeface="Be Vietnam Pro" pitchFamily="34" charset="0"/>
-                <a:ea typeface="Be Vietnam Pro" pitchFamily="34" charset="-122"/>
-                <a:cs typeface="Be Vietnam Pro" pitchFamily="34" charset="-120"/>
-              </a:rPr>
-              <a:t> chỉ có</a:t>
+              <a:t> cạnh</a:t>
             </a:r>
             <a:r>
               <a:rPr lang="en-US" sz="2850" dirty="0" spc="-6" kern="0">
@@ -4693,7 +4627,7 @@
               <a:buNone/>
             </a:pPr>
             <a:r>
-              <a:rPr lang="en-US" sz="2550" b="1" dirty="0" spc="2" kern="0">
+              <a:rPr lang="en-US" sz="2550" b="1" dirty="0" spc="-11" kern="0">
                 <a:solidFill>
                   <a:srgbClr val="1F3FD1"/>
                 </a:solidFill>
@@ -4701,10 +4635,10 @@
                 <a:ea typeface="Be Vietnam Pro" pitchFamily="34" charset="-122"/>
                 <a:cs typeface="Be Vietnam Pro" pitchFamily="34" charset="-120"/>
               </a:rPr>
-              <a:t>Hiệu</a:t>
-            </a:r>
-            <a:r>
-              <a:rPr lang="en-US" sz="2550" b="1" dirty="0" spc="-3" kern="0">
+              <a:t>Chạy</a:t>
+            </a:r>
+            <a:r>
+              <a:rPr lang="en-US" sz="2550" b="1" dirty="0" spc="0" kern="0">
                 <a:solidFill>
                   <a:srgbClr val="1F3FD1"/>
                 </a:solidFill>
@@ -4712,10 +4646,10 @@
                 <a:ea typeface="Be Vietnam Pro" pitchFamily="34" charset="-122"/>
                 <a:cs typeface="Be Vietnam Pro" pitchFamily="34" charset="-120"/>
               </a:rPr>
-              <a:t> năng</a:t>
-            </a:r>
-            <a:r>
-              <a:rPr lang="en-US" sz="2550" b="1" dirty="0" spc="-1" kern="0">
+              <a:t> cạnh</a:t>
+            </a:r>
+            <a:r>
+              <a:rPr lang="en-US" sz="2550" b="1" dirty="0" spc="-8" kern="0">
                 <a:solidFill>
                   <a:srgbClr val="1F3FD1"/>
                 </a:solidFill>
@@ -4723,29 +4657,7 @@
                 <a:ea typeface="Be Vietnam Pro" pitchFamily="34" charset="-122"/>
                 <a:cs typeface="Be Vietnam Pro" pitchFamily="34" charset="-120"/>
               </a:rPr>
-              <a:t> gần</a:t>
-            </a:r>
-            <a:r>
-              <a:rPr lang="en-US" sz="2550" b="1" dirty="0" spc="-5" kern="0">
-                <a:solidFill>
-                  <a:srgbClr val="1F3FD1"/>
-                </a:solidFill>
-                <a:latin typeface="Be Vietnam Pro" pitchFamily="34" charset="0"/>
-                <a:ea typeface="Be Vietnam Pro" pitchFamily="34" charset="-122"/>
-                <a:cs typeface="Be Vietnam Pro" pitchFamily="34" charset="-120"/>
-              </a:rPr>
-              <a:t> mã</a:t>
-            </a:r>
-            <a:r>
-              <a:rPr lang="en-US" sz="2550" b="1" dirty="0" spc="-6" kern="0">
-                <a:solidFill>
-                  <a:srgbClr val="1F3FD1"/>
-                </a:solidFill>
-                <a:latin typeface="Be Vietnam Pro" pitchFamily="34" charset="0"/>
-                <a:ea typeface="Be Vietnam Pro" pitchFamily="34" charset="-122"/>
-                <a:cs typeface="Be Vietnam Pro" pitchFamily="34" charset="-120"/>
-              </a:rPr>
-              <a:t> gốc</a:t>
+              <a:t> JavaScript</a:t>
             </a:r>
             <a:endParaRPr lang="en-US" sz="2550" dirty="0"/>
           </a:p>
@@ -5428,7 +5340,7 @@
               <a:buNone/>
             </a:pPr>
             <a:r>
-              <a:rPr lang="en-US" sz="2250" b="1" dirty="0" spc="3" kern="0">
+              <a:rPr lang="en-US" sz="2250" b="1" dirty="0" spc="6" kern="0">
                 <a:solidFill>
                   <a:srgbClr val="14161C"/>
                 </a:solidFill>
@@ -5436,10 +5348,10 @@
                 <a:ea typeface="Be Vietnam Pro" pitchFamily="34" charset="-122"/>
                 <a:cs typeface="Be Vietnam Pro" pitchFamily="34" charset="-120"/>
               </a:rPr>
-              <a:t>Gần</a:t>
-            </a:r>
-            <a:r>
-              <a:rPr lang="en-US" sz="2250" b="1" dirty="0" spc="-5" kern="0">
+              <a:t>Thường</a:t>
+            </a:r>
+            <a:r>
+              <a:rPr lang="en-US" sz="2250" b="1" dirty="0" spc="-6" kern="0">
                 <a:solidFill>
                   <a:srgbClr val="14161C"/>
                 </a:solidFill>
@@ -5447,10 +5359,10 @@
                 <a:ea typeface="Be Vietnam Pro" pitchFamily="34" charset="-122"/>
                 <a:cs typeface="Be Vietnam Pro" pitchFamily="34" charset="-120"/>
               </a:rPr>
-              <a:t> tốc</a:t>
-            </a:r>
-            <a:r>
-              <a:rPr lang="en-US" sz="2250" b="1" dirty="0" spc="11" kern="0">
+              <a:t> không</a:t>
+            </a:r>
+            <a:r>
+              <a:rPr lang="en-US" sz="2250" b="1" dirty="0" spc="-3" kern="0">
                 <a:solidFill>
                   <a:srgbClr val="14161C"/>
                 </a:solidFill>
@@ -5458,10 +5370,10 @@
                 <a:ea typeface="Be Vietnam Pro" pitchFamily="34" charset="-122"/>
                 <a:cs typeface="Be Vietnam Pro" pitchFamily="34" charset="-120"/>
               </a:rPr>
-              <a:t> độ</a:t>
-            </a:r>
-            <a:r>
-              <a:rPr lang="en-US" sz="2250" b="1" dirty="0" spc="-1" kern="0">
+              <a:t> viết</a:t>
+            </a:r>
+            <a:r>
+              <a:rPr lang="en-US" sz="2250" b="1" dirty="0" spc="-7" kern="0">
                 <a:solidFill>
                   <a:srgbClr val="14161C"/>
                 </a:solidFill>
@@ -5469,18 +5381,7 @@
                 <a:ea typeface="Be Vietnam Pro" pitchFamily="34" charset="-122"/>
                 <a:cs typeface="Be Vietnam Pro" pitchFamily="34" charset="-120"/>
               </a:rPr>
-              <a:t> mã</a:t>
-            </a:r>
-            <a:r>
-              <a:rPr lang="en-US" sz="2250" b="1" dirty="0" spc="-5" kern="0">
-                <a:solidFill>
-                  <a:srgbClr val="14161C"/>
-                </a:solidFill>
-                <a:latin typeface="Be Vietnam Pro" pitchFamily="34" charset="0"/>
-                <a:ea typeface="Be Vietnam Pro" pitchFamily="34" charset="-122"/>
-                <a:cs typeface="Be Vietnam Pro" pitchFamily="34" charset="-120"/>
-              </a:rPr>
-              <a:t> gốc</a:t>
+              <a:t> tay</a:t>
             </a:r>
             <a:endParaRPr lang="en-US" sz="2250" dirty="0"/>
           </a:p>
@@ -5591,7 +5492,7 @@
               <a:buNone/>
             </a:pPr>
             <a:r>
-              <a:rPr lang="en-US" sz="2550" dirty="0" spc="-9" kern="0">
+              <a:rPr lang="en-US" sz="2550" dirty="0" spc="5" kern="0">
                 <a:solidFill>
                   <a:srgbClr val="F3EEE3"/>
                 </a:solidFill>
@@ -5599,10 +5500,10 @@
                 <a:ea typeface="Be Vietnam Pro" pitchFamily="34" charset="-122"/>
                 <a:cs typeface="Be Vietnam Pro" pitchFamily="34" charset="-120"/>
               </a:rPr>
-              <a:t>JavaScript</a:t>
-            </a:r>
-            <a:r>
-              <a:rPr lang="en-US" sz="2550" dirty="0" spc="-13" kern="0">
+              <a:t>Thường</a:t>
+            </a:r>
+            <a:r>
+              <a:rPr lang="en-US" sz="2550" dirty="0" spc="-6" kern="0">
                 <a:solidFill>
                   <a:srgbClr val="F3EEE3"/>
                 </a:solidFill>
@@ -5610,7 +5511,84 @@
                 <a:ea typeface="Be Vietnam Pro" pitchFamily="34" charset="-122"/>
                 <a:cs typeface="Be Vietnam Pro" pitchFamily="34" charset="-120"/>
               </a:rPr>
-              <a:t> gọi</a:t>
+              <a:t> viết</a:t>
+            </a:r>
+            <a:r>
+              <a:rPr lang="en-US" sz="2550" dirty="0" spc="-11" kern="0">
+                <a:solidFill>
+                  <a:srgbClr val="F3EEE3"/>
+                </a:solidFill>
+                <a:latin typeface="Be Vietnam Pro" pitchFamily="34" charset="0"/>
+                <a:ea typeface="Be Vietnam Pro" pitchFamily="34" charset="-122"/>
+                <a:cs typeface="Be Vietnam Pro" pitchFamily="34" charset="-120"/>
+              </a:rPr>
+              <a:t> ngôn</a:t>
+            </a:r>
+            <a:r>
+              <a:rPr lang="en-US" sz="2550" dirty="0" spc="-1" kern="0">
+                <a:solidFill>
+                  <a:srgbClr val="F3EEE3"/>
+                </a:solidFill>
+                <a:latin typeface="Be Vietnam Pro" pitchFamily="34" charset="0"/>
+                <a:ea typeface="Be Vietnam Pro" pitchFamily="34" charset="-122"/>
+                <a:cs typeface="Be Vietnam Pro" pitchFamily="34" charset="-120"/>
+              </a:rPr>
+              <a:t> ngữ</a:t>
+            </a:r>
+            <a:r>
+              <a:rPr lang="en-US" sz="2550" dirty="0" spc="1" kern="0">
+                <a:solidFill>
+                  <a:srgbClr val="F3EEE3"/>
+                </a:solidFill>
+                <a:latin typeface="Be Vietnam Pro" pitchFamily="34" charset="0"/>
+                <a:ea typeface="Be Vietnam Pro" pitchFamily="34" charset="-122"/>
+                <a:cs typeface="Be Vietnam Pro" pitchFamily="34" charset="-120"/>
+              </a:rPr>
+              <a:t> cấp</a:t>
+            </a:r>
+            <a:r>
+              <a:rPr lang="en-US" sz="2550" dirty="0" spc="-1" kern="0">
+                <a:solidFill>
+                  <a:srgbClr val="F3EEE3"/>
+                </a:solidFill>
+                <a:latin typeface="Be Vietnam Pro" pitchFamily="34" charset="0"/>
+                <a:ea typeface="Be Vietnam Pro" pitchFamily="34" charset="-122"/>
+                <a:cs typeface="Be Vietnam Pro" pitchFamily="34" charset="-120"/>
+              </a:rPr>
+              <a:t> cao</a:t>
+            </a:r>
+            <a:r>
+              <a:rPr lang="en-US" sz="2550" dirty="0" spc="-26" kern="0">
+                <a:solidFill>
+                  <a:srgbClr val="F3EEE3"/>
+                </a:solidFill>
+                <a:latin typeface="Be Vietnam Pro" pitchFamily="34" charset="0"/>
+                <a:ea typeface="Be Vietnam Pro" pitchFamily="34" charset="-122"/>
+                <a:cs typeface="Be Vietnam Pro" pitchFamily="34" charset="-120"/>
+              </a:rPr>
+              <a:t> rồi</a:t>
+            </a:r>
+            <a:r>
+              <a:rPr lang="en-US" sz="2550" dirty="0" spc="18" kern="0">
+                <a:solidFill>
+                  <a:srgbClr val="F3EEE3"/>
+                </a:solidFill>
+                <a:latin typeface="Be Vietnam Pro" pitchFamily="34" charset="0"/>
+                <a:ea typeface="Be Vietnam Pro" pitchFamily="34" charset="-122"/>
+                <a:cs typeface="Be Vietnam Pro" pitchFamily="34" charset="-120"/>
+              </a:rPr>
+              <a:t> để</a:t>
+            </a:r>
+            <a:r>
+              <a:rPr lang="en-US" sz="2550" dirty="0" spc="9" kern="0">
+                <a:solidFill>
+                  <a:srgbClr val="F3EEE3"/>
+                </a:solidFill>
+                <a:latin typeface="Be Vietnam Pro" pitchFamily="34" charset="0"/>
+                <a:ea typeface="Be Vietnam Pro" pitchFamily="34" charset="-122"/>
+                <a:cs typeface="Be Vietnam Pro" pitchFamily="34" charset="-120"/>
+              </a:rPr>
+              <a:t> trình</a:t>
             </a:r>
             <a:r>
               <a:rPr lang="en-US" sz="2550" dirty="0" spc="0" kern="0">
@@ -5621,7 +5599,7 @@
                 <a:ea typeface="Be Vietnam Pro" pitchFamily="34" charset="-122"/>
                 <a:cs typeface="Be Vietnam Pro" pitchFamily="34" charset="-120"/>
               </a:rPr>
-              <a:t> hàm,</a:t>
+              <a:t> biên</a:t>
             </a:r>
             <a:r>
               <a:rPr lang="en-US" sz="2550" dirty="0" spc="1" kern="0">
@@ -5632,10 +5610,10 @@
                 <a:ea typeface="Be Vietnam Pro" pitchFamily="34" charset="-122"/>
                 <a:cs typeface="Be Vietnam Pro" pitchFamily="34" charset="-120"/>
               </a:rPr>
-              <a:t> mô-đun</a:t>
-            </a:r>
-            <a:r>
-              <a:rPr lang="en-US" sz="2550" dirty="0" spc="-7" kern="0">
+              <a:t> dịch</a:t>
+            </a:r>
+            <a:r>
+              <a:rPr lang="en-US" sz="2550" dirty="0" spc="-8" kern="0">
                 <a:solidFill>
                   <a:srgbClr val="F3EEE3"/>
                 </a:solidFill>
@@ -5643,10 +5621,10 @@
                 <a:ea typeface="Be Vietnam Pro" pitchFamily="34" charset="-122"/>
                 <a:cs typeface="Be Vietnam Pro" pitchFamily="34" charset="-120"/>
               </a:rPr>
-              <a:t> chạy</a:t>
-            </a:r>
-            <a:r>
-              <a:rPr lang="en-US" sz="2550" dirty="0" spc="-15" kern="0">
+              <a:t> xuất</a:t>
+            </a:r>
+            <a:r>
+              <a:rPr lang="en-US" sz="2550" dirty="0" spc="-47" kern="0">
                 <a:solidFill>
                   <a:srgbClr val="F3EEE3"/>
                 </a:solidFill>
@@ -5654,62 +5632,7 @@
                 <a:ea typeface="Be Vietnam Pro" pitchFamily="34" charset="-122"/>
                 <a:cs typeface="Be Vietnam Pro" pitchFamily="34" charset="-120"/>
               </a:rPr>
-              <a:t> với</a:t>
-            </a:r>
-            <a:r>
-              <a:rPr lang="en-US" sz="2550" dirty="0" spc="1" kern="0">
-                <a:solidFill>
-                  <a:srgbClr val="F3EEE3"/>
-                </a:solidFill>
-                <a:latin typeface="Be Vietnam Pro" pitchFamily="34" charset="0"/>
-                <a:ea typeface="Be Vietnam Pro" pitchFamily="34" charset="-122"/>
-                <a:cs typeface="Be Vietnam Pro" pitchFamily="34" charset="-120"/>
-              </a:rPr>
-              <a:t> hiệu</a:t>
-            </a:r>
-            <a:r>
-              <a:rPr lang="en-US" sz="2550" dirty="0" spc="0" kern="0">
-                <a:solidFill>
-                  <a:srgbClr val="F3EEE3"/>
-                </a:solidFill>
-                <a:latin typeface="Be Vietnam Pro" pitchFamily="34" charset="0"/>
-                <a:ea typeface="Be Vietnam Pro" pitchFamily="34" charset="-122"/>
-                <a:cs typeface="Be Vietnam Pro" pitchFamily="34" charset="-120"/>
-              </a:rPr>
-              <a:t> năng</a:t>
-            </a:r>
-            <a:r>
-              <a:rPr lang="en-US" sz="2550" dirty="0" spc="-12" kern="0">
-                <a:solidFill>
-                  <a:srgbClr val="F3EEE3"/>
-                </a:solidFill>
-                <a:latin typeface="Be Vietnam Pro" pitchFamily="34" charset="0"/>
-                <a:ea typeface="Be Vietnam Pro" pitchFamily="34" charset="-122"/>
-                <a:cs typeface="Be Vietnam Pro" pitchFamily="34" charset="-120"/>
-              </a:rPr>
-              <a:t> gần</a:t>
-            </a:r>
-            <a:r>
-              <a:rPr lang="en-US" sz="2550" dirty="0" spc="1" kern="0">
-                <a:solidFill>
-                  <a:srgbClr val="F3EEE3"/>
-                </a:solidFill>
-                <a:latin typeface="Be Vietnam Pro" pitchFamily="34" charset="0"/>
-                <a:ea typeface="Be Vietnam Pro" pitchFamily="34" charset="-122"/>
-                <a:cs typeface="Be Vietnam Pro" pitchFamily="34" charset="-120"/>
-              </a:rPr>
-              <a:t> mã</a:t>
-            </a:r>
-            <a:r>
-              <a:rPr lang="en-US" sz="2550" dirty="0" spc="-11" kern="0">
-                <a:solidFill>
-                  <a:srgbClr val="F3EEE3"/>
-                </a:solidFill>
-                <a:latin typeface="Be Vietnam Pro" pitchFamily="34" charset="0"/>
-                <a:ea typeface="Be Vietnam Pro" pitchFamily="34" charset="-122"/>
-                <a:cs typeface="Be Vietnam Pro" pitchFamily="34" charset="-120"/>
-              </a:rPr>
-              <a:t> gốc.</a:t>
+              <a:t> WASM.</a:t>
             </a:r>
             <a:endParaRPr lang="en-US" sz="2550" dirty="0"/>
           </a:p>
@@ -5837,7 +5760,7 @@
               <a:buNone/>
             </a:pPr>
             <a:r>
-              <a:rPr lang="en-US" sz="2700" b="1" dirty="0" spc="4" kern="0">
+              <a:rPr lang="en-US" sz="2700" b="1" dirty="0" spc="-7" kern="0">
                 <a:solidFill>
                   <a:srgbClr val="F3EEE3"/>
                 </a:solidFill>
@@ -5845,10 +5768,10 @@
                 <a:ea typeface="Be Vietnam Pro" pitchFamily="34" charset="-122"/>
                 <a:cs typeface="Be Vietnam Pro" pitchFamily="34" charset="-120"/>
               </a:rPr>
-              <a:t>Có</a:t>
-            </a:r>
-            <a:r>
-              <a:rPr lang="en-US" sz="2700" b="1" dirty="0" spc="-1" kern="0">
+              <a:t>Viết</a:t>
+            </a:r>
+            <a:r>
+              <a:rPr lang="en-US" sz="2700" b="1" dirty="0" spc="-9" kern="0">
                 <a:solidFill>
                   <a:srgbClr val="F3EEE3"/>
                 </a:solidFill>
@@ -5856,10 +5779,10 @@
                 <a:ea typeface="Be Vietnam Pro" pitchFamily="34" charset="-122"/>
                 <a:cs typeface="Be Vietnam Pro" pitchFamily="34" charset="-120"/>
               </a:rPr>
-              <a:t> sẵn</a:t>
-            </a:r>
-            <a:r>
-              <a:rPr lang="en-US" sz="2700" b="1" dirty="0" spc="-7" kern="0">
+              <a:t> ngôn</a:t>
+            </a:r>
+            <a:r>
+              <a:rPr lang="en-US" sz="2700" b="1" dirty="0" spc="-5" kern="0">
                 <a:solidFill>
                   <a:srgbClr val="F3EEE3"/>
                 </a:solidFill>
@@ -5867,10 +5790,10 @@
                 <a:ea typeface="Be Vietnam Pro" pitchFamily="34" charset="-122"/>
                 <a:cs typeface="Be Vietnam Pro" pitchFamily="34" charset="-120"/>
               </a:rPr>
-              <a:t> mã</a:t>
-            </a:r>
-            <a:r>
-              <a:rPr lang="en-US" sz="2700" b="1" dirty="0" spc="-9" kern="0">
+              <a:t> ngữ</a:t>
+            </a:r>
+            <a:r>
+              <a:rPr lang="en-US" sz="2700" b="1" dirty="0" spc="-2" kern="0">
                 <a:solidFill>
                   <a:srgbClr val="F3EEE3"/>
                 </a:solidFill>
@@ -5878,7 +5801,18 @@
                 <a:ea typeface="Be Vietnam Pro" pitchFamily="34" charset="-122"/>
                 <a:cs typeface="Be Vietnam Pro" pitchFamily="34" charset="-120"/>
               </a:rPr>
-              <a:t> gốc</a:t>
+              <a:t> cấp</a:t>
+            </a:r>
+            <a:r>
+              <a:rPr lang="en-US" sz="2700" b="1" dirty="0" spc="0" kern="0">
+                <a:solidFill>
+                  <a:srgbClr val="F3EEE3"/>
+                </a:solidFill>
+                <a:latin typeface="Be Vietnam Pro" pitchFamily="34" charset="0"/>
+                <a:ea typeface="Be Vietnam Pro" pitchFamily="34" charset="-122"/>
+                <a:cs typeface="Be Vietnam Pro" pitchFamily="34" charset="-120"/>
+              </a:rPr>
+              <a:t> cao</a:t>
             </a:r>
             <a:endParaRPr lang="en-US" sz="2700" dirty="0"/>
           </a:p>
@@ -6109,7 +6043,7 @@
               <a:t> ra</a:t>
             </a:r>
             <a:r>
-              <a:rPr lang="en-US" sz="2700" b="1" dirty="0" spc="-3" kern="0">
+              <a:rPr lang="en-US" sz="2700" b="1" dirty="0" spc="-55" kern="0">
                 <a:solidFill>
                   <a:srgbClr val="F3EEE3"/>
                 </a:solidFill>
@@ -6117,7 +6051,7 @@
                 <a:ea typeface="Be Vietnam Pro" pitchFamily="34" charset="-122"/>
                 <a:cs typeface="Be Vietnam Pro" pitchFamily="34" charset="-120"/>
               </a:rPr>
-              <a:t> mô-đun</a:t>
+              <a:t> WASM</a:t>
             </a:r>
             <a:endParaRPr lang="en-US" sz="2700" dirty="0"/>
           </a:p>
@@ -6148,7 +6082,7 @@
               <a:buNone/>
             </a:pPr>
             <a:r>
-              <a:rPr lang="en-US" sz="2100" dirty="0" spc="23" kern="0">
+              <a:rPr lang="en-US" sz="2100" dirty="0" spc="-15" kern="0">
                 <a:solidFill>
                   <a:srgbClr val="7C93FF"/>
                 </a:solidFill>
@@ -6156,10 +6090,10 @@
                 <a:ea typeface="Be Vietnam Pro" pitchFamily="34" charset="-122"/>
                 <a:cs typeface="Be Vietnam Pro" pitchFamily="34" charset="-120"/>
               </a:rPr>
-              <a:t>định</a:t>
-            </a:r>
-            <a:r>
-              <a:rPr lang="en-US" sz="2100" dirty="0" spc="-2" kern="0">
+              <a:t>tệp</a:t>
+            </a:r>
+            <a:r>
+              <a:rPr lang="en-US" sz="2100" dirty="0" spc="1" kern="0">
                 <a:solidFill>
                   <a:srgbClr val="7C93FF"/>
                 </a:solidFill>
@@ -6167,10 +6101,10 @@
                 <a:ea typeface="Be Vietnam Pro" pitchFamily="34" charset="-122"/>
                 <a:cs typeface="Be Vietnam Pro" pitchFamily="34" charset="-120"/>
               </a:rPr>
-              <a:t> dạng</a:t>
-            </a:r>
-            <a:r>
-              <a:rPr lang="en-US" sz="2100" dirty="0" spc="-48" kern="0">
+              <a:t> nhị</a:t>
+            </a:r>
+            <a:r>
+              <a:rPr lang="en-US" sz="2100" dirty="0" spc="-3" kern="0">
                 <a:solidFill>
                   <a:srgbClr val="7C93FF"/>
                 </a:solidFill>
@@ -6178,7 +6112,7 @@
                 <a:ea typeface="Be Vietnam Pro" pitchFamily="34" charset="-122"/>
                 <a:cs typeface="Be Vietnam Pro" pitchFamily="34" charset="-120"/>
               </a:rPr>
-              <a:t> WASM</a:t>
+              <a:t> phân</a:t>
             </a:r>
             <a:endParaRPr lang="en-US" sz="2100" dirty="0"/>
           </a:p>
@@ -6315,7 +6249,7 @@
               <a:t>Trình duyệt</a:t>
             </a:r>
             <a:r>
-              <a:rPr lang="en-US" sz="2700" b="1" dirty="0" spc="-5" kern="0">
+              <a:rPr lang="en-US" sz="2700" b="1" dirty="0" spc="-2" kern="0">
                 <a:solidFill>
                   <a:srgbClr val="F3EEE3"/>
                 </a:solidFill>
@@ -6323,10 +6257,10 @@
                 <a:ea typeface="Be Vietnam Pro" pitchFamily="34" charset="-122"/>
                 <a:cs typeface="Be Vietnam Pro" pitchFamily="34" charset="-120"/>
               </a:rPr>
-              <a:t> tải</a:t>
-            </a:r>
-            <a:r>
-              <a:rPr lang="en-US" sz="2700" b="1" dirty="0" spc="-3" kern="0">
+              <a:t> biên</a:t>
+            </a:r>
+            <a:r>
+              <a:rPr lang="en-US" sz="2700" b="1" dirty="0" spc="1" kern="0">
                 <a:solidFill>
                   <a:srgbClr val="F3EEE3"/>
                 </a:solidFill>
@@ -6334,7 +6268,7 @@
                 <a:ea typeface="Be Vietnam Pro" pitchFamily="34" charset="-122"/>
                 <a:cs typeface="Be Vietnam Pro" pitchFamily="34" charset="-120"/>
               </a:rPr>
-              <a:t> mô-đun</a:t>
+              <a:t> dịch</a:t>
             </a:r>
             <a:endParaRPr lang="en-US" sz="2700" dirty="0"/>
           </a:p>
@@ -6365,7 +6299,7 @@
               <a:buNone/>
             </a:pPr>
             <a:r>
-              <a:rPr lang="en-US" sz="2100" dirty="0" spc="2" kern="0">
+              <a:rPr lang="en-US" sz="2100" dirty="0" spc="-1" kern="0">
                 <a:solidFill>
                   <a:srgbClr val="FFB454"/>
                 </a:solidFill>
@@ -6373,10 +6307,10 @@
                 <a:ea typeface="Be Vietnam Pro" pitchFamily="34" charset="-122"/>
                 <a:cs typeface="Be Vietnam Pro" pitchFamily="34" charset="-120"/>
               </a:rPr>
-              <a:t>cùng</a:t>
-            </a:r>
-            <a:r>
-              <a:rPr lang="en-US" sz="2100" dirty="0" spc="-13" kern="0">
+              <a:t>thành</a:t>
+            </a:r>
+            <a:r>
+              <a:rPr lang="en-US" sz="2100" dirty="0" spc="-3" kern="0">
                 <a:solidFill>
                   <a:srgbClr val="FFB454"/>
                 </a:solidFill>
@@ -6384,10 +6318,10 @@
                 <a:ea typeface="Be Vietnam Pro" pitchFamily="34" charset="-122"/>
                 <a:cs typeface="Be Vietnam Pro" pitchFamily="34" charset="-120"/>
               </a:rPr>
-              <a:t> với</a:t>
-            </a:r>
-            <a:r>
-              <a:rPr lang="en-US" sz="2100" dirty="0" spc="-7" kern="0">
+              <a:t> Module (mã</a:t>
+            </a:r>
+            <a:r>
+              <a:rPr lang="en-US" sz="2100" dirty="0" spc="-9" kern="0">
                 <a:solidFill>
                   <a:srgbClr val="FFB454"/>
                 </a:solidFill>
@@ -6395,7 +6329,7 @@
                 <a:ea typeface="Be Vietnam Pro" pitchFamily="34" charset="-122"/>
                 <a:cs typeface="Be Vietnam Pro" pitchFamily="34" charset="-120"/>
               </a:rPr>
-              <a:t> JavaScript</a:t>
+              <a:t> máy)</a:t>
             </a:r>
             <a:endParaRPr lang="en-US" sz="2100" dirty="0"/>
           </a:p>
@@ -6582,7 +6516,7 @@
               <a:buNone/>
             </a:pPr>
             <a:r>
-              <a:rPr lang="en-US" sz="2100" dirty="0" spc="1" kern="0">
+              <a:rPr lang="en-US" sz="2100" dirty="0" spc="-2" kern="0">
                 <a:solidFill>
                   <a:srgbClr val="7C93FF"/>
                 </a:solidFill>
@@ -6590,10 +6524,10 @@
                 <a:ea typeface="Be Vietnam Pro" pitchFamily="34" charset="-122"/>
                 <a:cs typeface="Be Vietnam Pro" pitchFamily="34" charset="-120"/>
               </a:rPr>
-              <a:t>mô-đun</a:t>
-            </a:r>
-            <a:r>
-              <a:rPr lang="en-US" sz="2100" dirty="0" spc="-9" kern="0">
+              <a:t>qua</a:t>
+            </a:r>
+            <a:r>
+              <a:rPr lang="en-US" sz="2100" dirty="0" spc="-7" kern="0">
                 <a:solidFill>
                   <a:srgbClr val="7C93FF"/>
                 </a:solidFill>
@@ -6601,10 +6535,10 @@
                 <a:ea typeface="Be Vietnam Pro" pitchFamily="34" charset="-122"/>
                 <a:cs typeface="Be Vietnam Pro" pitchFamily="34" charset="-120"/>
               </a:rPr>
-              <a:t> chạy</a:t>
-            </a:r>
-            <a:r>
-              <a:rPr lang="en-US" sz="2100" dirty="0" spc="-11" kern="0">
+              <a:t> Instance</a:t>
+            </a:r>
+            <a:r>
+              <a:rPr lang="en-US" sz="2100" dirty="0" spc="0" kern="0">
                 <a:solidFill>
                   <a:srgbClr val="7C93FF"/>
                 </a:solidFill>
@@ -6612,10 +6546,10 @@
                 <a:ea typeface="Be Vietnam Pro" pitchFamily="34" charset="-122"/>
                 <a:cs typeface="Be Vietnam Pro" pitchFamily="34" charset="-120"/>
               </a:rPr>
-              <a:t> gần</a:t>
-            </a:r>
-            <a:r>
-              <a:rPr lang="en-US" sz="2100" dirty="0" spc="-16" kern="0">
+              <a:t> của</a:t>
+            </a:r>
+            <a:r>
+              <a:rPr lang="en-US" sz="2100" dirty="0" spc="-4" kern="0">
                 <a:solidFill>
                   <a:srgbClr val="7C93FF"/>
                 </a:solidFill>
@@ -6623,40 +6557,7 @@
                 <a:ea typeface="Be Vietnam Pro" pitchFamily="34" charset="-122"/>
                 <a:cs typeface="Be Vietnam Pro" pitchFamily="34" charset="-120"/>
               </a:rPr>
-              <a:t> tốc</a:t>
-            </a:r>
-            <a:r>
-              <a:rPr lang="en-US" sz="2100" dirty="0" spc="11" kern="0">
-                <a:solidFill>
-                  <a:srgbClr val="7C93FF"/>
-                </a:solidFill>
-                <a:latin typeface="Be Vietnam Pro" pitchFamily="34" charset="0"/>
-                <a:ea typeface="Be Vietnam Pro" pitchFamily="34" charset="-122"/>
-                <a:cs typeface="Be Vietnam Pro" pitchFamily="34" charset="-120"/>
-              </a:rPr>
-              <a:t> độ</a:t>
-            </a:r>
-            <a:r>
-              <a:rPr lang="en-US" sz="2100" dirty="0" spc="-3" kern="0">
-                <a:solidFill>
-                  <a:srgbClr val="7C93FF"/>
-                </a:solidFill>
-                <a:latin typeface="Be Vietnam Pro" pitchFamily="34" charset="0"/>
-                <a:ea typeface="Be Vietnam Pro" pitchFamily="34" charset="-122"/>
-                <a:cs typeface="Be Vietnam Pro" pitchFamily="34" charset="-120"/>
-              </a:rPr>
-              <a:t> mã</a:t>
-            </a:r>
-            <a:r>
-              <a:rPr lang="en-US" sz="2100" dirty="0" spc="-15" kern="0">
-                <a:solidFill>
-                  <a:srgbClr val="7C93FF"/>
-                </a:solidFill>
-                <a:latin typeface="Be Vietnam Pro" pitchFamily="34" charset="0"/>
-                <a:ea typeface="Be Vietnam Pro" pitchFamily="34" charset="-122"/>
-                <a:cs typeface="Be Vietnam Pro" pitchFamily="34" charset="-120"/>
-              </a:rPr>
-              <a:t> gốc</a:t>
+              <a:t> Module</a:t>
             </a:r>
             <a:endParaRPr lang="en-US" sz="2100" dirty="0"/>
           </a:p>
@@ -7031,7 +6932,7 @@
               <a:buNone/>
             </a:pPr>
             <a:r>
-              <a:rPr lang="en-US" sz="2700" dirty="0" spc="2" kern="0">
+              <a:rPr lang="en-US" sz="2700" dirty="0" spc="-73" kern="0">
                 <a:solidFill>
                   <a:srgbClr val="C4C8D6"/>
                 </a:solidFill>
@@ -7039,10 +6940,10 @@
                 <a:ea typeface="Be Vietnam Pro" pitchFamily="34" charset="-122"/>
                 <a:cs typeface="Be Vietnam Pro" pitchFamily="34" charset="-120"/>
               </a:rPr>
-              <a:t>Mã</a:t>
-            </a:r>
-            <a:r>
-              <a:rPr lang="en-US" sz="2700" dirty="0" spc="-18" kern="0">
+              <a:t>WASM</a:t>
+            </a:r>
+            <a:r>
+              <a:rPr lang="en-US" sz="2700" dirty="0" spc="6" kern="0">
                 <a:solidFill>
                   <a:srgbClr val="C4C8D6"/>
                 </a:solidFill>
@@ -7050,10 +6951,10 @@
                 <a:ea typeface="Be Vietnam Pro" pitchFamily="34" charset="-122"/>
                 <a:cs typeface="Be Vietnam Pro" pitchFamily="34" charset="-120"/>
               </a:rPr>
-              <a:t> gốc</a:t>
-            </a:r>
-            <a:r>
-              <a:rPr lang="en-US" sz="2700" dirty="0" spc="6" kern="0">
+              <a:t> thường</a:t>
+            </a:r>
+            <a:r>
+              <a:rPr lang="en-US" sz="2700" dirty="0" spc="-4" kern="0">
                 <a:solidFill>
                   <a:srgbClr val="C4C8D6"/>
                 </a:solidFill>
@@ -7061,10 +6962,10 @@
                 <a:ea typeface="Be Vietnam Pro" pitchFamily="34" charset="-122"/>
                 <a:cs typeface="Be Vietnam Pro" pitchFamily="34" charset="-120"/>
               </a:rPr>
-              <a:t> thường</a:t>
-            </a:r>
-            <a:r>
-              <a:rPr lang="en-US" sz="2700" dirty="0" spc="9" kern="0">
+              <a:t> do</a:t>
+            </a:r>
+            <a:r>
+              <a:rPr lang="en-US" sz="2700" dirty="0" spc="7" kern="0">
                 <a:solidFill>
                   <a:srgbClr val="C4C8D6"/>
                 </a:solidFill>
@@ -7072,29 +6973,7 @@
                 <a:ea typeface="Be Vietnam Pro" pitchFamily="34" charset="-122"/>
                 <a:cs typeface="Be Vietnam Pro" pitchFamily="34" charset="-120"/>
               </a:rPr>
-              <a:t> được</a:t>
-            </a:r>
-            <a:r>
-              <a:rPr lang="en-US" sz="2700" dirty="0" spc="-3" kern="0">
-                <a:solidFill>
-                  <a:srgbClr val="C4C8D6"/>
-                </a:solidFill>
-                <a:latin typeface="Be Vietnam Pro" pitchFamily="34" charset="0"/>
-                <a:ea typeface="Be Vietnam Pro" pitchFamily="34" charset="-122"/>
-                <a:cs typeface="Be Vietnam Pro" pitchFamily="34" charset="-120"/>
-              </a:rPr>
-              <a:t> biên</a:t>
-            </a:r>
-            <a:r>
-              <a:rPr lang="en-US" sz="2700" dirty="0" spc="-1" kern="0">
-                <a:solidFill>
-                  <a:srgbClr val="C4C8D6"/>
-                </a:solidFill>
-                <a:latin typeface="Be Vietnam Pro" pitchFamily="34" charset="0"/>
-                <a:ea typeface="Be Vietnam Pro" pitchFamily="34" charset="-122"/>
-                <a:cs typeface="Be Vietnam Pro" pitchFamily="34" charset="-120"/>
-              </a:rPr>
-              <a:t> dịch</a:t>
+              <a:t> trình</a:t>
             </a:r>
             <a:endParaRPr lang="en-US" sz="2700" dirty="0"/>
           </a:p>
@@ -7106,7 +6985,7 @@
               <a:buNone/>
             </a:pPr>
             <a:r>
-              <a:rPr lang="en-US" sz="2700" dirty="0" spc="-58" kern="0">
+              <a:rPr lang="en-US" sz="2700" dirty="0" spc="-3" kern="0">
                 <a:solidFill>
                   <a:srgbClr val="C4C8D6"/>
                 </a:solidFill>
@@ -7114,10 +6993,10 @@
                 <a:ea typeface="Be Vietnam Pro" pitchFamily="34" charset="-122"/>
                 <a:cs typeface="Be Vietnam Pro" pitchFamily="34" charset="-120"/>
               </a:rPr>
-              <a:t>ra</a:t>
-            </a:r>
-            <a:r>
-              <a:rPr lang="en-US" sz="2700" dirty="0" spc="0" kern="0">
+              <a:t>biên</a:t>
+            </a:r>
+            <a:r>
+              <a:rPr lang="en-US" sz="2700" dirty="0" spc="-1" kern="0">
                 <a:solidFill>
                   <a:srgbClr val="C4C8D6"/>
                 </a:solidFill>
@@ -7125,10 +7004,10 @@
                 <a:ea typeface="Be Vietnam Pro" pitchFamily="34" charset="-122"/>
                 <a:cs typeface="Be Vietnam Pro" pitchFamily="34" charset="-120"/>
               </a:rPr>
-              <a:t> mô-đun</a:t>
-            </a:r>
-            <a:r>
-              <a:rPr lang="en-US" sz="2700" dirty="0" spc="-50" kern="0">
+              <a:t> dịch</a:t>
+            </a:r>
+            <a:r>
+              <a:rPr lang="en-US" sz="2700" dirty="0" spc="-14" kern="0">
                 <a:solidFill>
                   <a:srgbClr val="C4C8D6"/>
                 </a:solidFill>
@@ -7136,7 +7015,18 @@
                 <a:ea typeface="Be Vietnam Pro" pitchFamily="34" charset="-122"/>
                 <a:cs typeface="Be Vietnam Pro" pitchFamily="34" charset="-120"/>
               </a:rPr>
-              <a:t> WASM.</a:t>
+              <a:t> tạo</a:t>
+            </a:r>
+            <a:r>
+              <a:rPr lang="en-US" sz="2700" dirty="0" spc="-31" kern="0">
+                <a:solidFill>
+                  <a:srgbClr val="C4C8D6"/>
+                </a:solidFill>
+                <a:latin typeface="Be Vietnam Pro" pitchFamily="34" charset="0"/>
+                <a:ea typeface="Be Vietnam Pro" pitchFamily="34" charset="-122"/>
+                <a:cs typeface="Be Vietnam Pro" pitchFamily="34" charset="-120"/>
+              </a:rPr>
+              <a:t> ra.</a:t>
             </a:r>
             <a:endParaRPr lang="en-US" sz="2700" dirty="0"/>
           </a:p>
@@ -7246,7 +7136,7 @@
               <a:buNone/>
             </a:pPr>
             <a:r>
-              <a:rPr lang="en-US" sz="1950" b="1" spc="216" kern="0" dirty="0">
+              <a:rPr lang="en-US" sz="1950" b="1" spc="215" kern="0" dirty="0">
                 <a:solidFill>
                   <a:srgbClr val="1F3FD1"/>
                 </a:solidFill>
@@ -7254,10 +7144,10 @@
                 <a:ea typeface="Be Vietnam Pro" pitchFamily="34" charset="-122"/>
                 <a:cs typeface="Be Vietnam Pro" pitchFamily="34" charset="-120"/>
               </a:rPr>
-              <a:t>TRƯỚC</a:t>
-            </a:r>
-            <a:r>
-              <a:rPr lang="en-US" sz="1950" b="1" spc="175" kern="0" dirty="0">
+              <a:t>BỐN</a:t>
+            </a:r>
+            <a:r>
+              <a:rPr lang="en-US" sz="1950" b="1" spc="225" kern="0" dirty="0">
                 <a:solidFill>
                   <a:srgbClr val="1F3FD1"/>
                 </a:solidFill>
@@ -7265,10 +7155,10 @@
                 <a:ea typeface="Be Vietnam Pro" pitchFamily="34" charset="-122"/>
                 <a:cs typeface="Be Vietnam Pro" pitchFamily="34" charset="-120"/>
               </a:rPr>
-              <a:t> VÀ</a:t>
-            </a:r>
-            <a:r>
-              <a:rPr lang="en-US" sz="1950" b="1" spc="212" kern="0" dirty="0">
+              <a:t> KHÁI</a:t>
+            </a:r>
+            <a:r>
+              <a:rPr lang="en-US" sz="1950" b="1" spc="223" kern="0" dirty="0">
                 <a:solidFill>
                   <a:srgbClr val="1F3FD1"/>
                 </a:solidFill>
@@ -7276,7 +7166,7 @@
                 <a:ea typeface="Be Vietnam Pro" pitchFamily="34" charset="-122"/>
                 <a:cs typeface="Be Vietnam Pro" pitchFamily="34" charset="-120"/>
               </a:rPr>
-              <a:t> SAU</a:t>
+              <a:t> NIỆM</a:t>
             </a:r>
             <a:endParaRPr lang="en-US" sz="1950" dirty="0"/>
           </a:p>
@@ -7310,7 +7200,7 @@
               <a:buNone/>
             </a:pPr>
             <a:r>
-              <a:rPr lang="en-US" sz="7500" dirty="0" spc="-127" kern="0">
+              <a:rPr lang="en-US" sz="7500" dirty="0" spc="1" kern="0">
                 <a:solidFill>
                   <a:srgbClr val="14161C"/>
                 </a:solidFill>
@@ -7318,18 +7208,7 @@
                 <a:ea typeface="Bricolage Grotesque ExtraBold" pitchFamily="34" charset="-122"/>
                 <a:cs typeface="Bricolage Grotesque ExtraBold" pitchFamily="34" charset="-120"/>
               </a:rPr>
-              <a:t>Trước</a:t>
-            </a:r>
-            <a:r>
-              <a:rPr lang="en-US" sz="7500" dirty="0" spc="-82" kern="0">
-                <a:solidFill>
-                  <a:srgbClr val="14161C"/>
-                </a:solidFill>
-                <a:latin typeface="Bricolage Grotesque ExtraBold" pitchFamily="34" charset="0"/>
-                <a:ea typeface="Bricolage Grotesque ExtraBold" pitchFamily="34" charset="-122"/>
-                <a:cs typeface="Bricolage Grotesque ExtraBold" pitchFamily="34" charset="-120"/>
-              </a:rPr>
-              <a:t> và</a:t>
+              <a:t>Bốn khái</a:t>
             </a:r>
             <a:endParaRPr lang="en-US" sz="7500" dirty="0"/>
           </a:p>
@@ -7341,7 +7220,7 @@
               <a:buNone/>
             </a:pPr>
             <a:r>
-              <a:rPr lang="en-US" sz="7500" dirty="0" spc="1" kern="0">
+              <a:rPr lang="en-US" sz="7500" dirty="0" spc="6" kern="0">
                 <a:solidFill>
                   <a:srgbClr val="14161C"/>
                 </a:solidFill>
@@ -7349,18 +7228,7 @@
                 <a:ea typeface="Bricolage Grotesque ExtraBold" pitchFamily="34" charset="-122"/>
                 <a:cs typeface="Bricolage Grotesque ExtraBold" pitchFamily="34" charset="-120"/>
               </a:rPr>
-              <a:t>sau</a:t>
-            </a:r>
-            <a:r>
-              <a:rPr lang="en-US" sz="7500" dirty="0" spc="-146" kern="0">
-                <a:solidFill>
-                  <a:srgbClr val="14161C"/>
-                </a:solidFill>
-                <a:latin typeface="Bricolage Grotesque ExtraBold" pitchFamily="34" charset="0"/>
-                <a:ea typeface="Bricolage Grotesque ExtraBold" pitchFamily="34" charset="-122"/>
-                <a:cs typeface="Bricolage Grotesque ExtraBold" pitchFamily="34" charset="-120"/>
-              </a:rPr>
-              <a:t> WASM</a:t>
+              <a:t>niệm</a:t>
             </a:r>
             <a:endParaRPr lang="en-US" sz="7500" dirty="0"/>
           </a:p>
@@ -7399,10 +7267,10 @@
                 <a:ea typeface="Be Vietnam Pro" pitchFamily="34" charset="-122"/>
                 <a:cs typeface="Be Vietnam Pro" pitchFamily="34" charset="-120"/>
               </a:rPr>
-              <a:t>Dùng</a:t>
-            </a:r>
-            <a:r>
-              <a:rPr lang="en-US" sz="3300" b="1" dirty="0" spc="-2" kern="0">
+              <a:t>Khớp</a:t>
+            </a:r>
+            <a:r>
+              <a:rPr lang="en-US" sz="3300" b="1" dirty="0" spc="-16" kern="0">
                 <a:solidFill>
                   <a:srgbClr val="1F3FD1"/>
                 </a:solidFill>
@@ -7410,7 +7278,18 @@
                 <a:ea typeface="Be Vietnam Pro" pitchFamily="34" charset="-122"/>
                 <a:cs typeface="Be Vietnam Pro" pitchFamily="34" charset="-120"/>
               </a:rPr>
-              <a:t> lại</a:t>
+              <a:t> với</a:t>
+            </a:r>
+            <a:r>
+              <a:rPr lang="en-US" sz="3300" b="1" dirty="0" spc="2" kern="0">
+                <a:solidFill>
+                  <a:srgbClr val="1F3FD1"/>
+                </a:solidFill>
+                <a:latin typeface="Be Vietnam Pro" pitchFamily="34" charset="0"/>
+                <a:ea typeface="Be Vietnam Pro" pitchFamily="34" charset="-122"/>
+                <a:cs typeface="Be Vietnam Pro" pitchFamily="34" charset="-120"/>
+              </a:rPr>
+              <a:t> giao</a:t>
             </a:r>
             <a:r>
               <a:rPr lang="en-US" sz="3300" b="1" dirty="0" spc="-3" kern="0">
@@ -7421,10 +7300,10 @@
                 <a:ea typeface="Be Vietnam Pro" pitchFamily="34" charset="-122"/>
                 <a:cs typeface="Be Vietnam Pro" pitchFamily="34" charset="-120"/>
               </a:rPr>
-              <a:t> thư</a:t>
-            </a:r>
-            <a:r>
-              <a:rPr lang="en-US" sz="3300" b="1" dirty="0" spc="-5" kern="0">
+              <a:t> diện</a:t>
+            </a:r>
+            <a:r>
+              <a:rPr lang="en-US" sz="3300" b="1" dirty="0" spc="-14" kern="0">
                 <a:solidFill>
                   <a:srgbClr val="1F3FD1"/>
                 </a:solidFill>
@@ -7432,29 +7311,7 @@
                 <a:ea typeface="Be Vietnam Pro" pitchFamily="34" charset="-122"/>
                 <a:cs typeface="Be Vietnam Pro" pitchFamily="34" charset="-120"/>
               </a:rPr>
-              <a:t> viện</a:t>
-            </a:r>
-            <a:r>
-              <a:rPr lang="en-US" sz="3300" b="1" dirty="0" spc="-9" kern="0">
-                <a:solidFill>
-                  <a:srgbClr val="1F3FD1"/>
-                </a:solidFill>
-                <a:latin typeface="Be Vietnam Pro" pitchFamily="34" charset="0"/>
-                <a:ea typeface="Be Vietnam Pro" pitchFamily="34" charset="-122"/>
-                <a:cs typeface="Be Vietnam Pro" pitchFamily="34" charset="-120"/>
-              </a:rPr>
-              <a:t> mã</a:t>
-            </a:r>
-            <a:r>
-              <a:rPr lang="en-US" sz="3300" b="1" dirty="0" spc="-12" kern="0">
-                <a:solidFill>
-                  <a:srgbClr val="1F3FD1"/>
-                </a:solidFill>
-                <a:latin typeface="Be Vietnam Pro" pitchFamily="34" charset="0"/>
-                <a:ea typeface="Be Vietnam Pro" pitchFamily="34" charset="-122"/>
-                <a:cs typeface="Be Vietnam Pro" pitchFamily="34" charset="-120"/>
-              </a:rPr>
-              <a:t> gốc</a:t>
+              <a:t> JavaScript</a:t>
             </a:r>
             <a:endParaRPr lang="en-US" sz="3300" dirty="0"/>
           </a:p>
@@ -7488,7 +7345,7 @@
               <a:buNone/>
             </a:pPr>
             <a:r>
-              <a:rPr lang="en-US" sz="2700" dirty="0" spc="1" kern="0">
+              <a:rPr lang="en-US" sz="2700" dirty="0" spc="0" kern="0">
                 <a:solidFill>
                   <a:srgbClr val="14161C"/>
                 </a:solidFill>
@@ -7496,10 +7353,10 @@
                 <a:ea typeface="Be Vietnam Pro" pitchFamily="34" charset="-122"/>
                 <a:cs typeface="Be Vietnam Pro" pitchFamily="34" charset="-120"/>
               </a:rPr>
-              <a:t>Ví</a:t>
-            </a:r>
-            <a:r>
-              <a:rPr lang="en-US" sz="2700" dirty="0" spc="-3" kern="0">
+              <a:t>Module, Memory,</a:t>
+            </a:r>
+            <a:r>
+              <a:rPr lang="en-US" sz="2700" dirty="0" spc="-41" kern="0">
                 <a:solidFill>
                   <a:srgbClr val="14161C"/>
                 </a:solidFill>
@@ -7507,10 +7364,10 @@
                 <a:ea typeface="Be Vietnam Pro" pitchFamily="34" charset="-122"/>
                 <a:cs typeface="Be Vietnam Pro" pitchFamily="34" charset="-120"/>
               </a:rPr>
-              <a:t> dụ:</a:t>
-            </a:r>
-            <a:r>
-              <a:rPr lang="en-US" sz="2700" dirty="0" spc="1" kern="0">
+              <a:t> Table</a:t>
+            </a:r>
+            <a:r>
+              <a:rPr lang="en-US" sz="2700" dirty="0" spc="-17" kern="0">
                 <a:solidFill>
                   <a:srgbClr val="14161C"/>
                 </a:solidFill>
@@ -7518,10 +7375,10 @@
                 <a:ea typeface="Be Vietnam Pro" pitchFamily="34" charset="-122"/>
                 <a:cs typeface="Be Vietnam Pro" pitchFamily="34" charset="-120"/>
               </a:rPr>
-              <a:t> thư</a:t>
-            </a:r>
-            <a:r>
-              <a:rPr lang="en-US" sz="2700" dirty="0" spc="-1" kern="0">
+              <a:t> và</a:t>
+            </a:r>
+            <a:r>
+              <a:rPr lang="en-US" sz="2700" dirty="0" spc="-9" kern="0">
                 <a:solidFill>
                   <a:srgbClr val="14161C"/>
                 </a:solidFill>
@@ -7529,95 +7386,7 @@
                 <a:ea typeface="Be Vietnam Pro" pitchFamily="34" charset="-122"/>
                 <a:cs typeface="Be Vietnam Pro" pitchFamily="34" charset="-120"/>
               </a:rPr>
-              <a:t> viện</a:t>
-            </a:r>
-            <a:r>
-              <a:rPr lang="en-US" sz="2700" dirty="0" spc="-2" kern="0">
-                <a:solidFill>
-                  <a:srgbClr val="14161C"/>
-                </a:solidFill>
-                <a:latin typeface="Be Vietnam Pro" pitchFamily="34" charset="0"/>
-                <a:ea typeface="Be Vietnam Pro" pitchFamily="34" charset="-122"/>
-                <a:cs typeface="Be Vietnam Pro" pitchFamily="34" charset="-120"/>
-              </a:rPr>
-              <a:t> mã</a:t>
-            </a:r>
-            <a:r>
-              <a:rPr lang="en-US" sz="2700" dirty="0" spc="-6" kern="0">
-                <a:solidFill>
-                  <a:srgbClr val="14161C"/>
-                </a:solidFill>
-                <a:latin typeface="Be Vietnam Pro" pitchFamily="34" charset="0"/>
-                <a:ea typeface="Be Vietnam Pro" pitchFamily="34" charset="-122"/>
-                <a:cs typeface="Be Vietnam Pro" pitchFamily="34" charset="-120"/>
-              </a:rPr>
-              <a:t> hóa</a:t>
-            </a:r>
-            <a:r>
-              <a:rPr lang="en-US" sz="2700" dirty="0" spc="-18" kern="0">
-                <a:solidFill>
-                  <a:srgbClr val="14161C"/>
-                </a:solidFill>
-                <a:latin typeface="Be Vietnam Pro" pitchFamily="34" charset="0"/>
-                <a:ea typeface="Be Vietnam Pro" pitchFamily="34" charset="-122"/>
-                <a:cs typeface="Be Vietnam Pro" pitchFamily="34" charset="-120"/>
-              </a:rPr>
-              <a:t> và</a:t>
-            </a:r>
-            <a:r>
-              <a:rPr lang="en-US" sz="2700" dirty="0" spc="-1" kern="0">
-                <a:solidFill>
-                  <a:srgbClr val="14161C"/>
-                </a:solidFill>
-                <a:latin typeface="Be Vietnam Pro" pitchFamily="34" charset="0"/>
-                <a:ea typeface="Be Vietnam Pro" pitchFamily="34" charset="-122"/>
-                <a:cs typeface="Be Vietnam Pro" pitchFamily="34" charset="-120"/>
-              </a:rPr>
-              <a:t> giải mã</a:t>
-            </a:r>
-            <a:r>
-              <a:rPr lang="en-US" sz="2700" dirty="0" spc="-2" kern="0">
-                <a:solidFill>
-                  <a:srgbClr val="14161C"/>
-                </a:solidFill>
-                <a:latin typeface="Be Vietnam Pro" pitchFamily="34" charset="0"/>
-                <a:ea typeface="Be Vietnam Pro" pitchFamily="34" charset="-122"/>
-                <a:cs typeface="Be Vietnam Pro" pitchFamily="34" charset="-120"/>
-              </a:rPr>
-              <a:t> video</a:t>
-            </a:r>
-            <a:r>
-              <a:rPr lang="en-US" sz="2700" dirty="0" spc="-6" kern="0">
-                <a:solidFill>
-                  <a:srgbClr val="14161C"/>
-                </a:solidFill>
-                <a:latin typeface="Be Vietnam Pro" pitchFamily="34" charset="0"/>
-                <a:ea typeface="Be Vietnam Pro" pitchFamily="34" charset="-122"/>
-                <a:cs typeface="Be Vietnam Pro" pitchFamily="34" charset="-120"/>
-              </a:rPr>
-              <a:t> viết</a:t>
-            </a:r>
-            <a:r>
-              <a:rPr lang="en-US" sz="2700" dirty="0" spc="-4" kern="0">
-                <a:solidFill>
-                  <a:srgbClr val="14161C"/>
-                </a:solidFill>
-                <a:latin typeface="Be Vietnam Pro" pitchFamily="34" charset="0"/>
-                <a:ea typeface="Be Vietnam Pro" pitchFamily="34" charset="-122"/>
-                <a:cs typeface="Be Vietnam Pro" pitchFamily="34" charset="-120"/>
-              </a:rPr>
-              <a:t> bằng</a:t>
-            </a:r>
-            <a:r>
-              <a:rPr lang="en-US" sz="2700" dirty="0" spc="1" kern="0">
-                <a:solidFill>
-                  <a:srgbClr val="14161C"/>
-                </a:solidFill>
-                <a:latin typeface="Be Vietnam Pro" pitchFamily="34" charset="0"/>
-                <a:ea typeface="Be Vietnam Pro" pitchFamily="34" charset="-122"/>
-                <a:cs typeface="Be Vietnam Pro" pitchFamily="34" charset="-120"/>
-              </a:rPr>
-              <a:t> C++.</a:t>
+              <a:t> Instance.</a:t>
             </a:r>
             <a:endParaRPr lang="en-US" sz="2700" dirty="0"/>
           </a:p>
@@ -7652,6 +7421,28 @@
               <a:buNone/>
             </a:pPr>
             <a:r>
+              <a:rPr lang="en-US" sz="2250" b="1" dirty="0" spc="6" kern="0">
+                <a:solidFill>
+                  <a:srgbClr val="F3EEE3"/>
+                </a:solidFill>
+                <a:latin typeface="Be Vietnam Pro" pitchFamily="34" charset="0"/>
+                <a:ea typeface="Be Vietnam Pro" pitchFamily="34" charset="-122"/>
+                <a:cs typeface="Be Vietnam Pro" pitchFamily="34" charset="-120"/>
+              </a:rPr>
+              <a:t>giao</a:t>
+            </a:r>
+            <a:r>
+              <a:rPr lang="en-US" sz="2250" b="1" dirty="0" spc="-1" kern="0">
+                <a:solidFill>
+                  <a:srgbClr val="F3EEE3"/>
+                </a:solidFill>
+                <a:latin typeface="Be Vietnam Pro" pitchFamily="34" charset="0"/>
+                <a:ea typeface="Be Vietnam Pro" pitchFamily="34" charset="-122"/>
+                <a:cs typeface="Be Vietnam Pro" pitchFamily="34" charset="-120"/>
+              </a:rPr>
+              <a:t> diện</a:t>
+            </a:r>
+            <a:r>
               <a:rPr lang="en-US" sz="2250" b="1" dirty="0" spc="-6" kern="0">
                 <a:solidFill>
                   <a:srgbClr val="F3EEE3"/>
@@ -7660,40 +7451,7 @@
                 <a:ea typeface="Be Vietnam Pro" pitchFamily="34" charset="-122"/>
                 <a:cs typeface="Be Vietnam Pro" pitchFamily="34" charset="-120"/>
               </a:rPr>
-              <a:t>Mã</a:t>
-            </a:r>
-            <a:r>
-              <a:rPr lang="en-US" sz="2250" b="1" dirty="0" spc="-5" kern="0">
-                <a:solidFill>
-                  <a:srgbClr val="F3EEE3"/>
-                </a:solidFill>
-                <a:latin typeface="Be Vietnam Pro" pitchFamily="34" charset="0"/>
-                <a:ea typeface="Be Vietnam Pro" pitchFamily="34" charset="-122"/>
-                <a:cs typeface="Be Vietnam Pro" pitchFamily="34" charset="-120"/>
-              </a:rPr>
-              <a:t> gốc</a:t>
-            </a:r>
-            <a:r>
-              <a:rPr lang="en-US" sz="2250" b="1" dirty="0" spc="0" kern="0">
-                <a:solidFill>
-                  <a:srgbClr val="F3EEE3"/>
-                </a:solidFill>
-                <a:latin typeface="Be Vietnam Pro" pitchFamily="34" charset="0"/>
-                <a:ea typeface="Be Vietnam Pro" pitchFamily="34" charset="-122"/>
-                <a:cs typeface="Be Vietnam Pro" pitchFamily="34" charset="-120"/>
-              </a:rPr>
-              <a:t> có</a:t>
-            </a:r>
-            <a:r>
-              <a:rPr lang="en-US" sz="2250" b="1" dirty="0" spc="-1" kern="0">
-                <a:solidFill>
-                  <a:srgbClr val="F3EEE3"/>
-                </a:solidFill>
-                <a:latin typeface="Be Vietnam Pro" pitchFamily="34" charset="0"/>
-                <a:ea typeface="Be Vietnam Pro" pitchFamily="34" charset="-122"/>
-                <a:cs typeface="Be Vietnam Pro" pitchFamily="34" charset="-120"/>
-              </a:rPr>
-              <a:t> sẵn</a:t>
+              <a:t> JavaScript</a:t>
             </a:r>
             <a:endParaRPr lang="en-US" sz="2250" dirty="0"/>
           </a:p>
@@ -7799,7 +7557,7 @@
               <a:buNone/>
             </a:pPr>
             <a:r>
-              <a:rPr lang="en-US" sz="2550" dirty="0" spc="-4" kern="0">
+              <a:rPr lang="en-US" sz="2550" dirty="0" spc="-10" kern="0">
                 <a:solidFill>
                   <a:srgbClr val="14161C"/>
                 </a:solidFill>
@@ -7807,7 +7565,18 @@
                 <a:ea typeface="Be Vietnam Pro" pitchFamily="34" charset="-122"/>
                 <a:cs typeface="Be Vietnam Pro" pitchFamily="34" charset="-120"/>
               </a:rPr>
-              <a:t>Thư</a:t>
+              <a:t>Instance</a:t>
+            </a:r>
+            <a:r>
+              <a:rPr lang="en-US" sz="2550" dirty="0" spc="0" kern="0">
+                <a:solidFill>
+                  <a:srgbClr val="14161C"/>
+                </a:solidFill>
+                <a:latin typeface="Be Vietnam Pro" pitchFamily="34" charset="0"/>
+                <a:ea typeface="Be Vietnam Pro" pitchFamily="34" charset="-122"/>
+                <a:cs typeface="Be Vietnam Pro" pitchFamily="34" charset="-120"/>
+              </a:rPr>
+              <a:t> là</a:t>
             </a:r>
             <a:r>
               <a:rPr lang="en-US" sz="2550" dirty="0" spc="-1" kern="0">
@@ -7818,7 +7587,7 @@
                 <a:ea typeface="Be Vietnam Pro" pitchFamily="34" charset="-122"/>
                 <a:cs typeface="Be Vietnam Pro" pitchFamily="34" charset="-120"/>
               </a:rPr>
-              <a:t> viện</a:t>
+              <a:t> Module</a:t>
             </a:r>
             <a:r>
               <a:rPr lang="en-US" sz="2550" dirty="0" spc="0" kern="0">
@@ -7829,10 +7598,10 @@
                 <a:ea typeface="Be Vietnam Pro" pitchFamily="34" charset="-122"/>
                 <a:cs typeface="Be Vietnam Pro" pitchFamily="34" charset="-120"/>
               </a:rPr>
-              <a:t> mã</a:t>
-            </a:r>
-            <a:r>
-              <a:rPr lang="en-US" sz="2550" dirty="0" spc="-15" kern="0">
+              <a:t> cộng</a:t>
+            </a:r>
+            <a:r>
+              <a:rPr lang="en-US" sz="2550" dirty="0" spc="-16" kern="0">
                 <a:solidFill>
                   <a:srgbClr val="14161C"/>
                 </a:solidFill>
@@ -7840,10 +7609,10 @@
                 <a:ea typeface="Be Vietnam Pro" pitchFamily="34" charset="-122"/>
                 <a:cs typeface="Be Vietnam Pro" pitchFamily="34" charset="-120"/>
               </a:rPr>
-              <a:t> gốc</a:t>
-            </a:r>
-            <a:r>
-              <a:rPr lang="en-US" sz="2550" dirty="0" spc="-8" kern="0">
+              <a:t> trạng</a:t>
+            </a:r>
+            <a:r>
+              <a:rPr lang="en-US" sz="2550" dirty="0" spc="1" kern="0">
                 <a:solidFill>
                   <a:srgbClr val="14161C"/>
                 </a:solidFill>
@@ -7851,10 +7620,10 @@
                 <a:ea typeface="Be Vietnam Pro" pitchFamily="34" charset="-122"/>
                 <a:cs typeface="Be Vietnam Pro" pitchFamily="34" charset="-120"/>
               </a:rPr>
-              <a:t> chạy</a:t>
-            </a:r>
-            <a:r>
-              <a:rPr lang="en-US" sz="2550" dirty="0" spc="7" kern="0">
+              <a:t> thái</a:t>
+            </a:r>
+            <a:r>
+              <a:rPr lang="en-US" sz="2550" dirty="0" spc="-1" kern="0">
                 <a:solidFill>
                   <a:srgbClr val="14161C"/>
                 </a:solidFill>
@@ -7862,10 +7631,10 @@
                 <a:ea typeface="Be Vietnam Pro" pitchFamily="34" charset="-122"/>
                 <a:cs typeface="Be Vietnam Pro" pitchFamily="34" charset="-120"/>
               </a:rPr>
-              <a:t> được</a:t>
-            </a:r>
-            <a:r>
-              <a:rPr lang="en-US" sz="2550" dirty="0" spc="-17" kern="0">
+              <a:t> lúc</a:t>
+            </a:r>
+            <a:r>
+              <a:rPr lang="en-US" sz="2550" dirty="0" spc="-6" kern="0">
                 <a:solidFill>
                   <a:srgbClr val="14161C"/>
                 </a:solidFill>
@@ -7873,29 +7642,7 @@
                 <a:ea typeface="Be Vietnam Pro" pitchFamily="34" charset="-122"/>
                 <a:cs typeface="Be Vietnam Pro" pitchFamily="34" charset="-120"/>
               </a:rPr>
-              <a:t> trong</a:t>
-            </a:r>
-            <a:r>
-              <a:rPr lang="en-US" sz="2550" dirty="0" spc="10" kern="0">
-                <a:solidFill>
-                  <a:srgbClr val="14161C"/>
-                </a:solidFill>
-                <a:latin typeface="Be Vietnam Pro" pitchFamily="34" charset="0"/>
-                <a:ea typeface="Be Vietnam Pro" pitchFamily="34" charset="-122"/>
-                <a:cs typeface="Be Vietnam Pro" pitchFamily="34" charset="-120"/>
-              </a:rPr>
-              <a:t> trình</a:t>
-            </a:r>
-            <a:r>
-              <a:rPr lang="en-US" sz="2550" dirty="0" spc="-15" kern="0">
-                <a:solidFill>
-                  <a:srgbClr val="14161C"/>
-                </a:solidFill>
-                <a:latin typeface="Be Vietnam Pro" pitchFamily="34" charset="0"/>
-                <a:ea typeface="Be Vietnam Pro" pitchFamily="34" charset="-122"/>
-                <a:cs typeface="Be Vietnam Pro" pitchFamily="34" charset="-120"/>
-              </a:rPr>
-              <a:t> duyệt.</a:t>
+              <a:t> chạy.</a:t>
             </a:r>
             <a:endParaRPr lang="en-US" sz="2550" dirty="0"/>
           </a:p>
@@ -7975,7 +7722,7 @@
               <a:buNone/>
             </a:pPr>
             <a:r>
-              <a:rPr lang="en-US" sz="1800" b="1" spc="217" kern="0" dirty="0">
+              <a:rPr lang="en-US" sz="1800" b="1" spc="226" kern="0" dirty="0">
                 <a:solidFill>
                   <a:srgbClr val="B45309"/>
                 </a:solidFill>
@@ -7983,10 +7730,10 @@
                 <a:ea typeface="Be Vietnam Pro" pitchFamily="34" charset="-122"/>
                 <a:cs typeface="Be Vietnam Pro" pitchFamily="34" charset="-120"/>
               </a:rPr>
-              <a:t>TRƯỚC</a:t>
-            </a:r>
-            <a:r>
-              <a:rPr lang="en-US" sz="1800" b="1" spc="163" kern="0" dirty="0">
+              <a:t>MODULE</a:t>
+            </a:r>
+            <a:r>
+              <a:rPr lang="en-US" sz="1800" b="1" spc="179" kern="0" dirty="0">
                 <a:solidFill>
                   <a:srgbClr val="B45309"/>
                 </a:solidFill>
@@ -7994,7 +7741,18 @@
                 <a:ea typeface="Be Vietnam Pro" pitchFamily="34" charset="-122"/>
                 <a:cs typeface="Be Vietnam Pro" pitchFamily="34" charset="-120"/>
               </a:rPr>
-              <a:t> ĐÂY</a:t>
+              <a:t> VÀ</a:t>
+            </a:r>
+            <a:r>
+              <a:rPr lang="en-US" sz="1800" b="1" spc="201" kern="0" dirty="0">
+                <a:solidFill>
+                  <a:srgbClr val="B45309"/>
+                </a:solidFill>
+                <a:latin typeface="Be Vietnam Pro" pitchFamily="34" charset="0"/>
+                <a:ea typeface="Be Vietnam Pro" pitchFamily="34" charset="-122"/>
+                <a:cs typeface="Be Vietnam Pro" pitchFamily="34" charset="-120"/>
+              </a:rPr>
+              <a:t> INSTANCE</a:t>
             </a:r>
             <a:endParaRPr lang="en-US" sz="1800" dirty="0"/>
           </a:p>
@@ -8025,7 +7783,7 @@
               <a:buNone/>
             </a:pPr>
             <a:r>
-              <a:rPr lang="en-US" sz="4500" dirty="0" spc="6" kern="0">
+              <a:rPr lang="en-US" sz="4500" dirty="0" spc="1" kern="0">
                 <a:solidFill>
                   <a:srgbClr val="B45309"/>
                 </a:solidFill>
@@ -8033,10 +7791,10 @@
                 <a:ea typeface="Bricolage Grotesque ExtraBold" pitchFamily="34" charset="-122"/>
                 <a:cs typeface="Bricolage Grotesque ExtraBold" pitchFamily="34" charset="-120"/>
               </a:rPr>
-              <a:t>Chỉ</a:t>
-            </a:r>
-            <a:r>
-              <a:rPr lang="en-US" sz="4500" dirty="0" spc="1" kern="0">
+              <a:t>Module</a:t>
+            </a:r>
+            <a:r>
+              <a:rPr lang="en-US" sz="4500" dirty="0" spc="3" kern="0">
                 <a:solidFill>
                   <a:srgbClr val="B45309"/>
                 </a:solidFill>
@@ -8044,10 +7802,10 @@
                 <a:ea typeface="Bricolage Grotesque ExtraBold" pitchFamily="34" charset="-122"/>
                 <a:cs typeface="Bricolage Grotesque ExtraBold" pitchFamily="34" charset="-120"/>
               </a:rPr>
-              <a:t> có</a:t>
-            </a:r>
-            <a:r>
-              <a:rPr lang="en-US" sz="4500" dirty="0" spc="-25" kern="0">
+              <a:t> →</a:t>
+            </a:r>
+            <a:r>
+              <a:rPr lang="en-US" sz="4500" dirty="0" spc="2" kern="0">
                 <a:solidFill>
                   <a:srgbClr val="B45309"/>
                 </a:solidFill>
@@ -8055,7 +7813,7 @@
                 <a:ea typeface="Bricolage Grotesque ExtraBold" pitchFamily="34" charset="-122"/>
                 <a:cs typeface="Bricolage Grotesque ExtraBold" pitchFamily="34" charset="-120"/>
               </a:rPr>
-              <a:t> JavaScript</a:t>
+              <a:t> Instance</a:t>
             </a:r>
             <a:endParaRPr lang="en-US" sz="4500" dirty="0"/>
           </a:p>
@@ -8094,7 +7852,7 @@
               <a:buChar char="•"/>
             </a:pPr>
             <a:r>
-              <a:rPr lang="en-US" sz="2400" dirty="0" spc="-24" kern="0">
+              <a:rPr lang="en-US" sz="2400" dirty="0" spc="-2" kern="0">
                 <a:solidFill>
                   <a:srgbClr val="14161C"/>
                 </a:solidFill>
@@ -8102,10 +7860,10 @@
                 <a:ea typeface="Be Vietnam Pro" pitchFamily="34" charset="-122"/>
                 <a:cs typeface="Be Vietnam Pro" pitchFamily="34" charset="-120"/>
               </a:rPr>
-              <a:t>Trình</a:t>
-            </a:r>
-            <a:r>
-              <a:rPr lang="en-US" sz="2400" dirty="0" spc="-18" kern="0">
+              <a:t>Module:</a:t>
+            </a:r>
+            <a:r>
+              <a:rPr lang="en-US" sz="2400" dirty="0" spc="-1" kern="0">
                 <a:solidFill>
                   <a:srgbClr val="14161C"/>
                 </a:solidFill>
@@ -8113,7 +7871,7 @@
                 <a:ea typeface="Be Vietnam Pro" pitchFamily="34" charset="-122"/>
                 <a:cs typeface="Be Vietnam Pro" pitchFamily="34" charset="-120"/>
               </a:rPr>
-              <a:t> duyệt</a:t>
+              <a:t> bản</a:t>
             </a:r>
             <a:r>
               <a:rPr lang="en-US" sz="2400" dirty="0" spc="0" kern="0">
@@ -8124,10 +7882,10 @@
                 <a:ea typeface="Be Vietnam Pro" pitchFamily="34" charset="-122"/>
                 <a:cs typeface="Be Vietnam Pro" pitchFamily="34" charset="-120"/>
               </a:rPr>
-              <a:t> chỉ</a:t>
-            </a:r>
-            <a:r>
-              <a:rPr lang="en-US" sz="2400" dirty="0" spc="3" kern="0">
+              <a:t> nhị</a:t>
+            </a:r>
+            <a:r>
+              <a:rPr lang="en-US" sz="2400" dirty="0" spc="2" kern="0">
                 <a:solidFill>
                   <a:srgbClr val="14161C"/>
                 </a:solidFill>
@@ -8135,10 +7893,10 @@
                 <a:ea typeface="Be Vietnam Pro" pitchFamily="34" charset="-122"/>
                 <a:cs typeface="Be Vietnam Pro" pitchFamily="34" charset="-120"/>
               </a:rPr>
-              <a:t> làm</a:t>
-            </a:r>
-            <a:r>
-              <a:rPr lang="en-US" sz="2400" dirty="0" spc="-5" kern="0">
+              <a:t> phân</a:t>
+            </a:r>
+            <a:r>
+              <a:rPr lang="en-US" sz="2400" dirty="0" spc="19" kern="0">
                 <a:solidFill>
                   <a:srgbClr val="14161C"/>
                 </a:solidFill>
@@ -8146,10 +7904,10 @@
                 <a:ea typeface="Be Vietnam Pro" pitchFamily="34" charset="-122"/>
                 <a:cs typeface="Be Vietnam Pro" pitchFamily="34" charset="-120"/>
               </a:rPr>
-              <a:t> việc</a:t>
-            </a:r>
-            <a:r>
-              <a:rPr lang="en-US" sz="2400" dirty="0" spc="-13" kern="0">
+              <a:t> đã</a:t>
+            </a:r>
+            <a:r>
+              <a:rPr lang="en-US" sz="2400" dirty="0" spc="0" kern="0">
                 <a:solidFill>
                   <a:srgbClr val="14161C"/>
                 </a:solidFill>
@@ -8157,18 +7915,7 @@
                 <a:ea typeface="Be Vietnam Pro" pitchFamily="34" charset="-122"/>
                 <a:cs typeface="Be Vietnam Pro" pitchFamily="34" charset="-120"/>
               </a:rPr>
-              <a:t> với</a:t>
-            </a:r>
-            <a:r>
-              <a:rPr lang="en-US" sz="2400" dirty="0" spc="-6" kern="0">
-                <a:solidFill>
-                  <a:srgbClr val="14161C"/>
-                </a:solidFill>
-                <a:latin typeface="Be Vietnam Pro" pitchFamily="34" charset="0"/>
-                <a:ea typeface="Be Vietnam Pro" pitchFamily="34" charset="-122"/>
-                <a:cs typeface="Be Vietnam Pro" pitchFamily="34" charset="-120"/>
-              </a:rPr>
-              <a:t> JavaScript</a:t>
+              <a:t> biên dịch</a:t>
             </a:r>
             <a:endParaRPr lang="en-US" sz="2400" dirty="0"/>
           </a:p>
@@ -8182,6 +7929,17 @@
               <a:buChar char="•"/>
             </a:pPr>
             <a:r>
+              <a:rPr lang="en-US" sz="2400" dirty="0" spc="-9" kern="0">
+                <a:solidFill>
+                  <a:srgbClr val="14161C"/>
+                </a:solidFill>
+                <a:latin typeface="Be Vietnam Pro" pitchFamily="34" charset="0"/>
+                <a:ea typeface="Be Vietnam Pro" pitchFamily="34" charset="-122"/>
+                <a:cs typeface="Be Vietnam Pro" pitchFamily="34" charset="-120"/>
+              </a:rPr>
+              <a:t>Instance:</a:t>
+            </a:r>
+            <a:r>
               <a:rPr lang="en-US" sz="2400" dirty="0" spc="-2" kern="0">
                 <a:solidFill>
                   <a:srgbClr val="14161C"/>
@@ -8190,10 +7948,10 @@
                 <a:ea typeface="Be Vietnam Pro" pitchFamily="34" charset="-122"/>
                 <a:cs typeface="Be Vietnam Pro" pitchFamily="34" charset="-120"/>
               </a:rPr>
-              <a:t>Hiệu</a:t>
-            </a:r>
-            <a:r>
-              <a:rPr lang="en-US" sz="2400" dirty="0" spc="3" kern="0">
+              <a:t> Module</a:t>
+            </a:r>
+            <a:r>
+              <a:rPr lang="en-US" sz="2400" dirty="0" spc="2" kern="0">
                 <a:solidFill>
                   <a:srgbClr val="14161C"/>
                 </a:solidFill>
@@ -8201,10 +7959,10 @@
                 <a:ea typeface="Be Vietnam Pro" pitchFamily="34" charset="-122"/>
                 <a:cs typeface="Be Vietnam Pro" pitchFamily="34" charset="-120"/>
               </a:rPr>
-              <a:t> năng</a:t>
-            </a:r>
-            <a:r>
-              <a:rPr lang="en-US" sz="2400" dirty="0" spc="0" kern="0">
+              <a:t> cùng</a:t>
+            </a:r>
+            <a:r>
+              <a:rPr lang="en-US" sz="2400" dirty="0" spc="-13" kern="0">
                 <a:solidFill>
                   <a:srgbClr val="14161C"/>
                 </a:solidFill>
@@ -8212,10 +7970,10 @@
                 <a:ea typeface="Be Vietnam Pro" pitchFamily="34" charset="-122"/>
                 <a:cs typeface="Be Vietnam Pro" pitchFamily="34" charset="-120"/>
               </a:rPr>
-              <a:t> không</a:t>
-            </a:r>
-            <a:r>
-              <a:rPr lang="en-US" sz="2400" dirty="0" spc="-4" kern="0">
+              <a:t> trạng</a:t>
+            </a:r>
+            <a:r>
+              <a:rPr lang="en-US" sz="2400" dirty="0" spc="1" kern="0">
                 <a:solidFill>
                   <a:srgbClr val="14161C"/>
                 </a:solidFill>
@@ -8223,40 +7981,7 @@
                 <a:ea typeface="Be Vietnam Pro" pitchFamily="34" charset="-122"/>
                 <a:cs typeface="Be Vietnam Pro" pitchFamily="34" charset="-120"/>
               </a:rPr>
-              <a:t> sánh</a:t>
-            </a:r>
-            <a:r>
-              <a:rPr lang="en-US" sz="2400" dirty="0" spc="6" kern="0">
-                <a:solidFill>
-                  <a:srgbClr val="14161C"/>
-                </a:solidFill>
-                <a:latin typeface="Be Vietnam Pro" pitchFamily="34" charset="0"/>
-                <a:ea typeface="Be Vietnam Pro" pitchFamily="34" charset="-122"/>
-                <a:cs typeface="Be Vietnam Pro" pitchFamily="34" charset="-120"/>
-              </a:rPr>
-              <a:t> được</a:t>
-            </a:r>
-            <a:r>
-              <a:rPr lang="en-US" sz="2400" dirty="0" spc="5" kern="0">
-                <a:solidFill>
-                  <a:srgbClr val="14161C"/>
-                </a:solidFill>
-                <a:latin typeface="Be Vietnam Pro" pitchFamily="34" charset="0"/>
-                <a:ea typeface="Be Vietnam Pro" pitchFamily="34" charset="-122"/>
-                <a:cs typeface="Be Vietnam Pro" pitchFamily="34" charset="-120"/>
-              </a:rPr>
-              <a:t> mã</a:t>
-            </a:r>
-            <a:r>
-              <a:rPr lang="en-US" sz="2400" dirty="0" spc="-14" kern="0">
-                <a:solidFill>
-                  <a:srgbClr val="14161C"/>
-                </a:solidFill>
-                <a:latin typeface="Be Vietnam Pro" pitchFamily="34" charset="0"/>
-                <a:ea typeface="Be Vietnam Pro" pitchFamily="34" charset="-122"/>
-                <a:cs typeface="Be Vietnam Pro" pitchFamily="34" charset="-120"/>
-              </a:rPr>
-              <a:t> gốc</a:t>
+              <a:t> thái</a:t>
             </a:r>
             <a:endParaRPr lang="en-US" sz="2400" dirty="0"/>
           </a:p>
@@ -8334,7 +8059,7 @@
               <a:buNone/>
             </a:pPr>
             <a:r>
-              <a:rPr lang="en-US" sz="1800" b="1" spc="214" kern="0" dirty="0">
+              <a:rPr lang="en-US" sz="1800" b="1" spc="215" kern="0" dirty="0">
                 <a:solidFill>
                   <a:srgbClr val="1F3FD1"/>
                 </a:solidFill>
@@ -8342,10 +8067,10 @@
                 <a:ea typeface="Be Vietnam Pro" pitchFamily="34" charset="-122"/>
                 <a:cs typeface="Be Vietnam Pro" pitchFamily="34" charset="-120"/>
               </a:rPr>
-              <a:t>VỚI</a:t>
-            </a:r>
-            <a:r>
-              <a:rPr lang="en-US" sz="1800" b="1" spc="188" kern="0" dirty="0">
+              <a:t>BỘ</a:t>
+            </a:r>
+            <a:r>
+              <a:rPr lang="en-US" sz="1800" b="1" spc="227" kern="0" dirty="0">
                 <a:solidFill>
                   <a:srgbClr val="1F3FD1"/>
                 </a:solidFill>
@@ -8353,7 +8078,40 @@
                 <a:ea typeface="Be Vietnam Pro" pitchFamily="34" charset="-122"/>
                 <a:cs typeface="Be Vietnam Pro" pitchFamily="34" charset="-120"/>
               </a:rPr>
-              <a:t> WASM</a:t>
+              <a:t> NHỚ</a:t>
+            </a:r>
+            <a:r>
+              <a:rPr lang="en-US" sz="1800" b="1" spc="179" kern="0" dirty="0">
+                <a:solidFill>
+                  <a:srgbClr val="1F3FD1"/>
+                </a:solidFill>
+                <a:latin typeface="Be Vietnam Pro" pitchFamily="34" charset="0"/>
+                <a:ea typeface="Be Vietnam Pro" pitchFamily="34" charset="-122"/>
+                <a:cs typeface="Be Vietnam Pro" pitchFamily="34" charset="-120"/>
+              </a:rPr>
+              <a:t> VÀ</a:t>
+            </a:r>
+            <a:r>
+              <a:rPr lang="en-US" sz="1800" b="1" spc="225" kern="0" dirty="0">
+                <a:solidFill>
+                  <a:srgbClr val="1F3FD1"/>
+                </a:solidFill>
+                <a:latin typeface="Be Vietnam Pro" pitchFamily="34" charset="0"/>
+                <a:ea typeface="Be Vietnam Pro" pitchFamily="34" charset="-122"/>
+                <a:cs typeface="Be Vietnam Pro" pitchFamily="34" charset="-120"/>
+              </a:rPr>
+              <a:t> THAM</a:t>
+            </a:r>
+            <a:r>
+              <a:rPr lang="en-US" sz="1800" b="1" spc="227" kern="0" dirty="0">
+                <a:solidFill>
+                  <a:srgbClr val="1F3FD1"/>
+                </a:solidFill>
+                <a:latin typeface="Be Vietnam Pro" pitchFamily="34" charset="0"/>
+                <a:ea typeface="Be Vietnam Pro" pitchFamily="34" charset="-122"/>
+                <a:cs typeface="Be Vietnam Pro" pitchFamily="34" charset="-120"/>
+              </a:rPr>
+              <a:t> CHIẾU</a:t>
             </a:r>
             <a:endParaRPr lang="en-US" sz="1800" dirty="0"/>
           </a:p>
@@ -8384,7 +8142,7 @@
               <a:buNone/>
             </a:pPr>
             <a:r>
-              <a:rPr lang="en-US" sz="4500" dirty="0" spc="0" kern="0">
+              <a:rPr lang="en-US" sz="4500" dirty="0" spc="7" kern="0">
                 <a:solidFill>
                   <a:srgbClr val="1F3FD1"/>
                 </a:solidFill>
@@ -8392,10 +8150,10 @@
                 <a:ea typeface="Bricolage Grotesque ExtraBold" pitchFamily="34" charset="-122"/>
                 <a:cs typeface="Bricolage Grotesque ExtraBold" pitchFamily="34" charset="-120"/>
               </a:rPr>
-              <a:t>Dùng</a:t>
-            </a:r>
-            <a:r>
-              <a:rPr lang="en-US" sz="4500" dirty="0" spc="4" kern="0">
+              <a:t>Memory</a:t>
+            </a:r>
+            <a:r>
+              <a:rPr lang="en-US" sz="4500" dirty="0" spc="-47" kern="0">
                 <a:solidFill>
                   <a:srgbClr val="1F3FD1"/>
                 </a:solidFill>
@@ -8403,10 +8161,10 @@
                 <a:ea typeface="Bricolage Grotesque ExtraBold" pitchFamily="34" charset="-122"/>
                 <a:cs typeface="Bricolage Grotesque ExtraBold" pitchFamily="34" charset="-120"/>
               </a:rPr>
-              <a:t> lại</a:t>
-            </a:r>
-            <a:r>
-              <a:rPr lang="en-US" sz="4500" dirty="0" spc="0" kern="0">
+              <a:t> và</a:t>
+            </a:r>
+            <a:r>
+              <a:rPr lang="en-US" sz="4500" dirty="0" spc="-50" kern="0">
                 <a:solidFill>
                   <a:srgbClr val="1F3FD1"/>
                 </a:solidFill>
@@ -8414,18 +8172,7 @@
                 <a:ea typeface="Bricolage Grotesque ExtraBold" pitchFamily="34" charset="-122"/>
                 <a:cs typeface="Bricolage Grotesque ExtraBold" pitchFamily="34" charset="-120"/>
               </a:rPr>
-              <a:t> mã</a:t>
-            </a:r>
-            <a:r>
-              <a:rPr lang="en-US" sz="4500" dirty="0" spc="-27" kern="0">
-                <a:solidFill>
-                  <a:srgbClr val="1F3FD1"/>
-                </a:solidFill>
-                <a:latin typeface="Bricolage Grotesque ExtraBold" pitchFamily="34" charset="0"/>
-                <a:ea typeface="Bricolage Grotesque ExtraBold" pitchFamily="34" charset="-122"/>
-                <a:cs typeface="Bricolage Grotesque ExtraBold" pitchFamily="34" charset="-120"/>
-              </a:rPr>
-              <a:t> gốc</a:t>
+              <a:t> Table</a:t>
             </a:r>
             <a:endParaRPr lang="en-US" sz="4500" dirty="0"/>
           </a:p>
@@ -8464,7 +8211,7 @@
               <a:buChar char="•"/>
             </a:pPr>
             <a:r>
-              <a:rPr lang="en-US" sz="2400" dirty="0" spc="-73" kern="0">
+              <a:rPr lang="en-US" sz="2400" dirty="0" spc="1" kern="0">
                 <a:solidFill>
                   <a:srgbClr val="14161C"/>
                 </a:solidFill>
@@ -8472,10 +8219,10 @@
                 <a:ea typeface="Be Vietnam Pro" pitchFamily="34" charset="-122"/>
                 <a:cs typeface="Be Vietnam Pro" pitchFamily="34" charset="-120"/>
               </a:rPr>
-              <a:t>Tái</a:t>
-            </a:r>
-            <a:r>
-              <a:rPr lang="en-US" sz="2400" dirty="0" spc="1" kern="0">
+              <a:t>Memory:</a:t>
+            </a:r>
+            <a:r>
+              <a:rPr lang="en-US" sz="2400" dirty="0" spc="2" kern="0">
                 <a:solidFill>
                   <a:srgbClr val="14161C"/>
                 </a:solidFill>
@@ -8483,10 +8230,10 @@
                 <a:ea typeface="Be Vietnam Pro" pitchFamily="34" charset="-122"/>
                 <a:cs typeface="Be Vietnam Pro" pitchFamily="34" charset="-120"/>
               </a:rPr>
-              <a:t> sử</a:t>
-            </a:r>
-            <a:r>
-              <a:rPr lang="en-US" sz="2400" dirty="0" spc="3" kern="0">
+              <a:t> vùng</a:t>
+            </a:r>
+            <a:r>
+              <a:rPr lang="en-US" sz="2400" dirty="0" spc="-16" kern="0">
                 <a:solidFill>
                   <a:srgbClr val="14161C"/>
                 </a:solidFill>
@@ -8494,7 +8241,7 @@
                 <a:ea typeface="Be Vietnam Pro" pitchFamily="34" charset="-122"/>
                 <a:cs typeface="Be Vietnam Pro" pitchFamily="34" charset="-120"/>
               </a:rPr>
-              <a:t> dụng</a:t>
+              <a:t> byte</a:t>
             </a:r>
             <a:r>
               <a:rPr lang="en-US" sz="2400" dirty="0" spc="0" kern="0">
@@ -8505,10 +8252,10 @@
                 <a:ea typeface="Be Vietnam Pro" pitchFamily="34" charset="-122"/>
                 <a:cs typeface="Be Vietnam Pro" pitchFamily="34" charset="-120"/>
               </a:rPr>
-              <a:t> thư</a:t>
-            </a:r>
-            <a:r>
-              <a:rPr lang="en-US" sz="2400" dirty="0" spc="-2" kern="0">
+              <a:t> liền</a:t>
+            </a:r>
+            <a:r>
+              <a:rPr lang="en-US" sz="2400" dirty="0" spc="-38" kern="0">
                 <a:solidFill>
                   <a:srgbClr val="14161C"/>
                 </a:solidFill>
@@ -8516,51 +8263,7 @@
                 <a:ea typeface="Be Vietnam Pro" pitchFamily="34" charset="-122"/>
                 <a:cs typeface="Be Vietnam Pro" pitchFamily="34" charset="-120"/>
               </a:rPr>
-              <a:t> viện</a:t>
-            </a:r>
-            <a:r>
-              <a:rPr lang="en-US" sz="2400" dirty="0" spc="5" kern="0">
-                <a:solidFill>
-                  <a:srgbClr val="14161C"/>
-                </a:solidFill>
-                <a:latin typeface="Be Vietnam Pro" pitchFamily="34" charset="0"/>
-                <a:ea typeface="Be Vietnam Pro" pitchFamily="34" charset="-122"/>
-                <a:cs typeface="Be Vietnam Pro" pitchFamily="34" charset="-120"/>
-              </a:rPr>
-              <a:t> mã</a:t>
-            </a:r>
-            <a:r>
-              <a:rPr lang="en-US" sz="2400" dirty="0" spc="-14" kern="0">
-                <a:solidFill>
-                  <a:srgbClr val="14161C"/>
-                </a:solidFill>
-                <a:latin typeface="Be Vietnam Pro" pitchFamily="34" charset="0"/>
-                <a:ea typeface="Be Vietnam Pro" pitchFamily="34" charset="-122"/>
-                <a:cs typeface="Be Vietnam Pro" pitchFamily="34" charset="-120"/>
-              </a:rPr>
-              <a:t> gốc</a:t>
-            </a:r>
-            <a:r>
-              <a:rPr lang="en-US" sz="2400" dirty="0" spc="1" kern="0">
-                <a:solidFill>
-                  <a:srgbClr val="14161C"/>
-                </a:solidFill>
-                <a:latin typeface="Be Vietnam Pro" pitchFamily="34" charset="0"/>
-                <a:ea typeface="Be Vietnam Pro" pitchFamily="34" charset="-122"/>
-                <a:cs typeface="Be Vietnam Pro" pitchFamily="34" charset="-120"/>
-              </a:rPr>
-              <a:t> có</a:t>
-            </a:r>
-            <a:r>
-              <a:rPr lang="en-US" sz="2400" dirty="0" spc="-6" kern="0">
-                <a:solidFill>
-                  <a:srgbClr val="14161C"/>
-                </a:solidFill>
-                <a:latin typeface="Be Vietnam Pro" pitchFamily="34" charset="0"/>
-                <a:ea typeface="Be Vietnam Pro" pitchFamily="34" charset="-122"/>
-                <a:cs typeface="Be Vietnam Pro" pitchFamily="34" charset="-120"/>
-              </a:rPr>
-              <a:t> sẵn</a:t>
+              <a:t> kề</a:t>
             </a:r>
             <a:endParaRPr lang="en-US" sz="2400" dirty="0"/>
           </a:p>
@@ -8577,7 +8280,7 @@
               <a:buChar char="•"/>
             </a:pPr>
             <a:r>
-              <a:rPr lang="en-US" sz="2400" dirty="0" spc="-3" kern="0">
+              <a:rPr lang="en-US" sz="2400" dirty="0" spc="-36" kern="0">
                 <a:solidFill>
                   <a:srgbClr val="14161C"/>
                 </a:solidFill>
@@ -8585,7 +8288,18 @@
                 <a:ea typeface="Be Vietnam Pro" pitchFamily="34" charset="-122"/>
                 <a:cs typeface="Be Vietnam Pro" pitchFamily="34" charset="-120"/>
               </a:rPr>
-              <a:t>Ví</a:t>
+              <a:t>Table:</a:t>
+            </a:r>
+            <a:r>
+              <a:rPr lang="en-US" sz="2400" dirty="0" spc="4" kern="0">
+                <a:solidFill>
+                  <a:srgbClr val="14161C"/>
+                </a:solidFill>
+                <a:latin typeface="Be Vietnam Pro" pitchFamily="34" charset="0"/>
+                <a:ea typeface="Be Vietnam Pro" pitchFamily="34" charset="-122"/>
+                <a:cs typeface="Be Vietnam Pro" pitchFamily="34" charset="-120"/>
+              </a:rPr>
+              <a:t> mảng</a:t>
             </a:r>
             <a:r>
               <a:rPr lang="en-US" sz="2400" dirty="0" spc="2" kern="0">
@@ -8596,10 +8310,10 @@
                 <a:ea typeface="Be Vietnam Pro" pitchFamily="34" charset="-122"/>
                 <a:cs typeface="Be Vietnam Pro" pitchFamily="34" charset="-120"/>
               </a:rPr>
-              <a:t> dụ:</a:t>
-            </a:r>
-            <a:r>
-              <a:rPr lang="en-US" sz="2400" dirty="0" spc="5" kern="0">
+              <a:t> tham</a:t>
+            </a:r>
+            <a:r>
+              <a:rPr lang="en-US" sz="2400" dirty="0" spc="-1" kern="0">
                 <a:solidFill>
                   <a:srgbClr val="14161C"/>
                 </a:solidFill>
@@ -8607,10 +8321,10 @@
                 <a:ea typeface="Be Vietnam Pro" pitchFamily="34" charset="-122"/>
                 <a:cs typeface="Be Vietnam Pro" pitchFamily="34" charset="-120"/>
               </a:rPr>
-              <a:t> mã</a:t>
-            </a:r>
-            <a:r>
-              <a:rPr lang="en-US" sz="2400" dirty="0" spc="-1" kern="0">
+              <a:t> chiếu, như</a:t>
+            </a:r>
+            <a:r>
+              <a:rPr lang="en-US" sz="2400" dirty="0" spc="3" kern="0">
                 <a:solidFill>
                   <a:srgbClr val="14161C"/>
                 </a:solidFill>
@@ -8618,62 +8332,7 @@
                 <a:ea typeface="Be Vietnam Pro" pitchFamily="34" charset="-122"/>
                 <a:cs typeface="Be Vietnam Pro" pitchFamily="34" charset="-120"/>
               </a:rPr>
-              <a:t> hóa,</a:t>
-            </a:r>
-            <a:r>
-              <a:rPr lang="en-US" sz="2400" dirty="0" spc="1" kern="0">
-                <a:solidFill>
-                  <a:srgbClr val="14161C"/>
-                </a:solidFill>
-                <a:latin typeface="Be Vietnam Pro" pitchFamily="34" charset="0"/>
-                <a:ea typeface="Be Vietnam Pro" pitchFamily="34" charset="-122"/>
-                <a:cs typeface="Be Vietnam Pro" pitchFamily="34" charset="-120"/>
-              </a:rPr>
-              <a:t> giải</a:t>
-            </a:r>
-            <a:r>
-              <a:rPr lang="en-US" sz="2400" dirty="0" spc="4" kern="0">
-                <a:solidFill>
-                  <a:srgbClr val="14161C"/>
-                </a:solidFill>
-                <a:latin typeface="Be Vietnam Pro" pitchFamily="34" charset="0"/>
-                <a:ea typeface="Be Vietnam Pro" pitchFamily="34" charset="-122"/>
-                <a:cs typeface="Be Vietnam Pro" pitchFamily="34" charset="-120"/>
-              </a:rPr>
-              <a:t> mã</a:t>
-            </a:r>
-            <a:r>
-              <a:rPr lang="en-US" sz="2400" dirty="0" spc="-2" kern="0">
-                <a:solidFill>
-                  <a:srgbClr val="14161C"/>
-                </a:solidFill>
-                <a:latin typeface="Be Vietnam Pro" pitchFamily="34" charset="0"/>
-                <a:ea typeface="Be Vietnam Pro" pitchFamily="34" charset="-122"/>
-                <a:cs typeface="Be Vietnam Pro" pitchFamily="34" charset="-120"/>
-              </a:rPr>
-              <a:t> video</a:t>
-            </a:r>
-            <a:r>
-              <a:rPr lang="en-US" sz="2400" dirty="0" spc="0" kern="0">
-                <a:solidFill>
-                  <a:srgbClr val="14161C"/>
-                </a:solidFill>
-                <a:latin typeface="Be Vietnam Pro" pitchFamily="34" charset="0"/>
-                <a:ea typeface="Be Vietnam Pro" pitchFamily="34" charset="-122"/>
-                <a:cs typeface="Be Vietnam Pro" pitchFamily="34" charset="-120"/>
-              </a:rPr>
-              <a:t> bằng</a:t>
-            </a:r>
-            <a:r>
-              <a:rPr lang="en-US" sz="2400" dirty="0" spc="-1" kern="0">
-                <a:solidFill>
-                  <a:srgbClr val="14161C"/>
-                </a:solidFill>
-                <a:latin typeface="Be Vietnam Pro" pitchFamily="34" charset="0"/>
-                <a:ea typeface="Be Vietnam Pro" pitchFamily="34" charset="-122"/>
-                <a:cs typeface="Be Vietnam Pro" pitchFamily="34" charset="-120"/>
-              </a:rPr>
-              <a:t> C++</a:t>
+              <a:t> hàm</a:t>
             </a:r>
             <a:endParaRPr lang="en-US" sz="2400" dirty="0"/>
           </a:p>
@@ -8687,7 +8346,7 @@
               <a:buChar char="•"/>
             </a:pPr>
             <a:r>
-              <a:rPr lang="en-US" sz="2400" dirty="0" spc="-9" kern="0">
+              <a:rPr lang="en-US" sz="2400" dirty="0" spc="1" kern="0">
                 <a:solidFill>
                   <a:srgbClr val="14161C"/>
                 </a:solidFill>
@@ -8695,10 +8354,10 @@
                 <a:ea typeface="Be Vietnam Pro" pitchFamily="34" charset="-122"/>
                 <a:cs typeface="Be Vietnam Pro" pitchFamily="34" charset="-120"/>
               </a:rPr>
-              <a:t>Chạy</a:t>
-            </a:r>
-            <a:r>
-              <a:rPr lang="en-US" sz="2400" dirty="0" spc="-13" kern="0">
+              <a:t>Cả</a:t>
+            </a:r>
+            <a:r>
+              <a:rPr lang="en-US" sz="2400" dirty="0" spc="0" kern="0">
                 <a:solidFill>
                   <a:srgbClr val="14161C"/>
                 </a:solidFill>
@@ -8706,10 +8365,10 @@
                 <a:ea typeface="Be Vietnam Pro" pitchFamily="34" charset="-122"/>
                 <a:cs typeface="Be Vietnam Pro" pitchFamily="34" charset="-120"/>
               </a:rPr>
-              <a:t> trong</a:t>
-            </a:r>
-            <a:r>
-              <a:rPr lang="en-US" sz="2400" dirty="0" spc="9" kern="0">
+              <a:t> hai</a:t>
+            </a:r>
+            <a:r>
+              <a:rPr lang="en-US" sz="2400" dirty="0" spc="12" kern="0">
                 <a:solidFill>
                   <a:srgbClr val="14161C"/>
                 </a:solidFill>
@@ -8717,10 +8376,10 @@
                 <a:ea typeface="Be Vietnam Pro" pitchFamily="34" charset="-122"/>
                 <a:cs typeface="Be Vietnam Pro" pitchFamily="34" charset="-120"/>
               </a:rPr>
-              <a:t> trình</a:t>
-            </a:r>
-            <a:r>
-              <a:rPr lang="en-US" sz="2400" dirty="0" spc="-15" kern="0">
+              <a:t> đều</a:t>
+            </a:r>
+            <a:r>
+              <a:rPr lang="en-US" sz="2400" dirty="0" spc="0" kern="0">
                 <a:solidFill>
                   <a:srgbClr val="14161C"/>
                 </a:solidFill>
@@ -8728,10 +8387,10 @@
                 <a:ea typeface="Be Vietnam Pro" pitchFamily="34" charset="-122"/>
                 <a:cs typeface="Be Vietnam Pro" pitchFamily="34" charset="-120"/>
               </a:rPr>
-              <a:t> duyệt,</a:t>
-            </a:r>
-            <a:r>
-              <a:rPr lang="en-US" sz="2400" dirty="0" spc="-9" kern="0">
+              <a:t> có</a:t>
+            </a:r>
+            <a:r>
+              <a:rPr lang="en-US" sz="2400" dirty="0" spc="1" kern="0">
                 <a:solidFill>
                   <a:srgbClr val="14161C"/>
                 </a:solidFill>
@@ -8739,10 +8398,10 @@
                 <a:ea typeface="Be Vietnam Pro" pitchFamily="34" charset="-122"/>
                 <a:cs typeface="Be Vietnam Pro" pitchFamily="34" charset="-120"/>
               </a:rPr>
-              <a:t> gần</a:t>
-            </a:r>
-            <a:r>
-              <a:rPr lang="en-US" sz="2400" dirty="0" spc="4" kern="0">
+              <a:t> thể lớn</a:t>
+            </a:r>
+            <a:r>
+              <a:rPr lang="en-US" sz="2400" dirty="0" spc="2" kern="0">
                 <a:solidFill>
                   <a:srgbClr val="14161C"/>
                 </a:solidFill>
@@ -8750,18 +8409,7 @@
                 <a:ea typeface="Be Vietnam Pro" pitchFamily="34" charset="-122"/>
                 <a:cs typeface="Be Vietnam Pro" pitchFamily="34" charset="-120"/>
               </a:rPr>
-              <a:t> mã</a:t>
-            </a:r>
-            <a:r>
-              <a:rPr lang="en-US" sz="2400" dirty="0" spc="-13" kern="0">
-                <a:solidFill>
-                  <a:srgbClr val="14161C"/>
-                </a:solidFill>
-                <a:latin typeface="Be Vietnam Pro" pitchFamily="34" charset="0"/>
-                <a:ea typeface="Be Vietnam Pro" pitchFamily="34" charset="-122"/>
-                <a:cs typeface="Be Vietnam Pro" pitchFamily="34" charset="-120"/>
-              </a:rPr>
-              <a:t> gốc</a:t>
+              <a:t> dần</a:t>
             </a:r>
             <a:endParaRPr lang="en-US" sz="2400" dirty="0"/>
           </a:p>
@@ -10891,7 +10539,7 @@
               <a:buNone/>
             </a:pPr>
             <a:r>
-              <a:rPr lang="en-US" sz="1950" b="1" spc="226" kern="0" dirty="0">
+              <a:rPr lang="en-US" sz="1950" b="1" spc="223" kern="0" dirty="0">
                 <a:solidFill>
                   <a:srgbClr val="1F3FD1"/>
                 </a:solidFill>
@@ -10899,10 +10547,10 @@
                 <a:ea typeface="Be Vietnam Pro" pitchFamily="34" charset="-122"/>
                 <a:cs typeface="Be Vietnam Pro" pitchFamily="34" charset="-120"/>
               </a:rPr>
-              <a:t>ĐIỆN</a:t>
-            </a:r>
-            <a:r>
-              <a:rPr lang="en-US" sz="1950" b="1" spc="191" kern="0" dirty="0">
+              <a:t>MỤC</a:t>
+            </a:r>
+            <a:r>
+              <a:rPr lang="en-US" sz="1950" b="1" spc="225" kern="0" dirty="0">
                 <a:solidFill>
                   <a:srgbClr val="1F3FD1"/>
                 </a:solidFill>
@@ -10910,10 +10558,10 @@
                 <a:ea typeface="Be Vietnam Pro" pitchFamily="34" charset="-122"/>
                 <a:cs typeface="Be Vietnam Pro" pitchFamily="34" charset="-120"/>
               </a:rPr>
-              <a:t> TOÁN</a:t>
-            </a:r>
-            <a:r>
-              <a:rPr lang="en-US" sz="1950" b="1" spc="204" kern="0" dirty="0">
+              <a:t> TIÊU THIẾT</a:t>
+            </a:r>
+            <a:r>
+              <a:rPr lang="en-US" sz="1950" b="1" spc="223" kern="0" dirty="0">
                 <a:solidFill>
                   <a:srgbClr val="1F3FD1"/>
                 </a:solidFill>
@@ -10921,29 +10569,7 @@
                 <a:ea typeface="Be Vietnam Pro" pitchFamily="34" charset="-122"/>
                 <a:cs typeface="Be Vietnam Pro" pitchFamily="34" charset="-120"/>
               </a:rPr>
-              <a:t> ĐÁM</a:t>
-            </a:r>
-            <a:r>
-              <a:rPr lang="en-US" sz="1950" b="1" spc="175" kern="0" dirty="0">
-                <a:solidFill>
-                  <a:srgbClr val="1F3FD1"/>
-                </a:solidFill>
-                <a:latin typeface="Be Vietnam Pro" pitchFamily="34" charset="0"/>
-                <a:ea typeface="Be Vietnam Pro" pitchFamily="34" charset="-122"/>
-                <a:cs typeface="Be Vietnam Pro" pitchFamily="34" charset="-120"/>
-              </a:rPr>
-              <a:t> MÂY VÀ</a:t>
-            </a:r>
-            <a:r>
-              <a:rPr lang="en-US" sz="1950" b="1" spc="223" kern="0" dirty="0">
-                <a:solidFill>
-                  <a:srgbClr val="1F3FD1"/>
-                </a:solidFill>
-                <a:latin typeface="Be Vietnam Pro" pitchFamily="34" charset="0"/>
-                <a:ea typeface="Be Vietnam Pro" pitchFamily="34" charset="-122"/>
-                <a:cs typeface="Be Vietnam Pro" pitchFamily="34" charset="-120"/>
-              </a:rPr>
-              <a:t> BIÊN</a:t>
+              <a:t> KẾ</a:t>
             </a:r>
             <a:endParaRPr lang="en-US" sz="1950" dirty="0"/>
           </a:p>
@@ -10977,7 +10603,7 @@
               <a:buNone/>
             </a:pPr>
             <a:r>
-              <a:rPr lang="en-US" sz="7500" dirty="0" spc="-23" kern="0">
+              <a:rPr lang="en-US" sz="7500" dirty="0" spc="1" kern="0">
                 <a:solidFill>
                   <a:srgbClr val="14161C"/>
                 </a:solidFill>
@@ -10985,18 +10611,7 @@
                 <a:ea typeface="Bricolage Grotesque ExtraBold" pitchFamily="34" charset="-122"/>
                 <a:cs typeface="Bricolage Grotesque ExtraBold" pitchFamily="34" charset="-120"/>
               </a:rPr>
-              <a:t>Đám</a:t>
-            </a:r>
-            <a:r>
-              <a:rPr lang="en-US" sz="7500" dirty="0" spc="0" kern="0">
-                <a:solidFill>
-                  <a:srgbClr val="14161C"/>
-                </a:solidFill>
-                <a:latin typeface="Bricolage Grotesque ExtraBold" pitchFamily="34" charset="0"/>
-                <a:ea typeface="Bricolage Grotesque ExtraBold" pitchFamily="34" charset="-122"/>
-                <a:cs typeface="Bricolage Grotesque ExtraBold" pitchFamily="34" charset="-120"/>
-              </a:rPr>
-              <a:t> mây</a:t>
+              <a:t>Bốn mục</a:t>
             </a:r>
             <a:endParaRPr lang="en-US" sz="7500" dirty="0"/>
           </a:p>
@@ -11008,7 +10623,7 @@
               <a:buNone/>
             </a:pPr>
             <a:r>
-              <a:rPr lang="en-US" sz="7500" dirty="0" spc="-121" kern="0">
+              <a:rPr lang="en-US" sz="7500" dirty="0" spc="8" kern="0">
                 <a:solidFill>
                   <a:srgbClr val="14161C"/>
                 </a:solidFill>
@@ -11016,18 +10631,7 @@
                 <a:ea typeface="Bricolage Grotesque ExtraBold" pitchFamily="34" charset="-122"/>
                 <a:cs typeface="Bricolage Grotesque ExtraBold" pitchFamily="34" charset="-120"/>
               </a:rPr>
-              <a:t>và</a:t>
-            </a:r>
-            <a:r>
-              <a:rPr lang="en-US" sz="7500" dirty="0" spc="3" kern="0">
-                <a:solidFill>
-                  <a:srgbClr val="14161C"/>
-                </a:solidFill>
-                <a:latin typeface="Bricolage Grotesque ExtraBold" pitchFamily="34" charset="0"/>
-                <a:ea typeface="Bricolage Grotesque ExtraBold" pitchFamily="34" charset="-122"/>
-                <a:cs typeface="Bricolage Grotesque ExtraBold" pitchFamily="34" charset="-120"/>
-              </a:rPr>
-              <a:t> biên</a:t>
+              <a:t>tiêu</a:t>
             </a:r>
             <a:endParaRPr lang="en-US" sz="7500" dirty="0"/>
           </a:p>
@@ -11058,6 +10662,17 @@
               <a:buNone/>
             </a:pPr>
             <a:r>
+              <a:rPr lang="en-US" sz="3300" b="1" dirty="0" spc="-11" kern="0">
+                <a:solidFill>
+                  <a:srgbClr val="1F3FD1"/>
+                </a:solidFill>
+                <a:latin typeface="Be Vietnam Pro" pitchFamily="34" charset="0"/>
+                <a:ea typeface="Be Vietnam Pro" pitchFamily="34" charset="-122"/>
+                <a:cs typeface="Be Vietnam Pro" pitchFamily="34" charset="-120"/>
+              </a:rPr>
+              <a:t>Theo</a:t>
+            </a:r>
+            <a:r>
               <a:rPr lang="en-US" sz="3300" b="1" dirty="0" spc="-5" kern="0">
                 <a:solidFill>
                   <a:srgbClr val="1F3FD1"/>
@@ -11066,10 +10681,10 @@
                 <a:ea typeface="Be Vietnam Pro" pitchFamily="34" charset="-122"/>
                 <a:cs typeface="Be Vietnam Pro" pitchFamily="34" charset="-120"/>
               </a:rPr>
-              <a:t>Nhận</a:t>
-            </a:r>
-            <a:r>
-              <a:rPr lang="en-US" sz="3300" b="1" dirty="0" spc="14" kern="0">
+              <a:t> tài</a:t>
+            </a:r>
+            <a:r>
+              <a:rPr lang="en-US" sz="3300" b="1" dirty="0" spc="0" kern="0">
                 <a:solidFill>
                   <a:srgbClr val="1F3FD1"/>
                 </a:solidFill>
@@ -11077,10 +10692,10 @@
                 <a:ea typeface="Be Vietnam Pro" pitchFamily="34" charset="-122"/>
                 <a:cs typeface="Be Vietnam Pro" pitchFamily="34" charset="-120"/>
               </a:rPr>
-              <a:t> định</a:t>
-            </a:r>
-            <a:r>
-              <a:rPr lang="en-US" sz="3300" b="1" dirty="0" spc="-2" kern="0">
+              <a:t> liệu</a:t>
+            </a:r>
+            <a:r>
+              <a:rPr lang="en-US" sz="3300" b="1" dirty="0" spc="1" kern="0">
                 <a:solidFill>
                   <a:srgbClr val="1F3FD1"/>
                 </a:solidFill>
@@ -11088,29 +10703,7 @@
                 <a:ea typeface="Be Vietnam Pro" pitchFamily="34" charset="-122"/>
                 <a:cs typeface="Be Vietnam Pro" pitchFamily="34" charset="-120"/>
               </a:rPr>
-              <a:t> của</a:t>
-            </a:r>
-            <a:r>
-              <a:rPr lang="en-US" sz="3300" b="1" dirty="0" spc="-1" kern="0">
-                <a:solidFill>
-                  <a:srgbClr val="1F3FD1"/>
-                </a:solidFill>
-                <a:latin typeface="Be Vietnam Pro" pitchFamily="34" charset="0"/>
-                <a:ea typeface="Be Vietnam Pro" pitchFamily="34" charset="-122"/>
-                <a:cs typeface="Be Vietnam Pro" pitchFamily="34" charset="-120"/>
-              </a:rPr>
-              <a:t> bài</a:t>
-            </a:r>
-            <a:r>
-              <a:rPr lang="en-US" sz="3300" b="1" dirty="0" spc="-8" kern="0">
-                <a:solidFill>
-                  <a:srgbClr val="1F3FD1"/>
-                </a:solidFill>
-                <a:latin typeface="Be Vietnam Pro" pitchFamily="34" charset="0"/>
-                <a:ea typeface="Be Vietnam Pro" pitchFamily="34" charset="-122"/>
-                <a:cs typeface="Be Vietnam Pro" pitchFamily="34" charset="-120"/>
-              </a:rPr>
-              <a:t> nguồn</a:t>
+              <a:t> MDN</a:t>
             </a:r>
             <a:endParaRPr lang="en-US" sz="3300" dirty="0"/>
           </a:p>
@@ -11144,6 +10737,17 @@
               <a:buNone/>
             </a:pPr>
             <a:r>
+              <a:rPr lang="en-US" sz="2700" dirty="0" spc="-73" kern="0">
+                <a:solidFill>
+                  <a:srgbClr val="14161C"/>
+                </a:solidFill>
+                <a:latin typeface="Be Vietnam Pro" pitchFamily="34" charset="0"/>
+                <a:ea typeface="Be Vietnam Pro" pitchFamily="34" charset="-122"/>
+                <a:cs typeface="Be Vietnam Pro" pitchFamily="34" charset="-120"/>
+              </a:rPr>
+              <a:t>WASM</a:t>
+            </a:r>
+            <a:r>
               <a:rPr lang="en-US" sz="2700" dirty="0" spc="-1" kern="0">
                 <a:solidFill>
                   <a:srgbClr val="14161C"/>
@@ -11152,10 +10756,10 @@
                 <a:ea typeface="Be Vietnam Pro" pitchFamily="34" charset="-122"/>
                 <a:cs typeface="Be Vietnam Pro" pitchFamily="34" charset="-120"/>
               </a:rPr>
-              <a:t>Bài</a:t>
-            </a:r>
-            <a:r>
-              <a:rPr lang="en-US" sz="2700" dirty="0" spc="-2" kern="0">
+              <a:t> là</a:t>
+            </a:r>
+            <a:r>
+              <a:rPr lang="en-US" sz="2700" dirty="0" spc="0" kern="0">
                 <a:solidFill>
                   <a:srgbClr val="14161C"/>
                 </a:solidFill>
@@ -11163,7 +10767,51 @@
                 <a:ea typeface="Be Vietnam Pro" pitchFamily="34" charset="-122"/>
                 <a:cs typeface="Be Vietnam Pro" pitchFamily="34" charset="-120"/>
               </a:rPr>
-              <a:t> nguồn</a:t>
+              <a:t> chuẩn mở,</a:t>
+            </a:r>
+            <a:r>
+              <a:rPr lang="en-US" sz="2700" dirty="0" spc="-4" kern="0">
+                <a:solidFill>
+                  <a:srgbClr val="14161C"/>
+                </a:solidFill>
+                <a:latin typeface="Be Vietnam Pro" pitchFamily="34" charset="0"/>
+                <a:ea typeface="Be Vietnam Pro" pitchFamily="34" charset="-122"/>
+                <a:cs typeface="Be Vietnam Pro" pitchFamily="34" charset="-120"/>
+              </a:rPr>
+              <a:t> thiết</a:t>
+            </a:r>
+            <a:r>
+              <a:rPr lang="en-US" sz="2700" dirty="0" spc="-45" kern="0">
+                <a:solidFill>
+                  <a:srgbClr val="14161C"/>
+                </a:solidFill>
+                <a:latin typeface="Be Vietnam Pro" pitchFamily="34" charset="0"/>
+                <a:ea typeface="Be Vietnam Pro" pitchFamily="34" charset="-122"/>
+                <a:cs typeface="Be Vietnam Pro" pitchFamily="34" charset="-120"/>
+              </a:rPr>
+              <a:t> kế</a:t>
+            </a:r>
+            <a:r>
+              <a:rPr lang="en-US" sz="2700" dirty="0" spc="-13" kern="0">
+                <a:solidFill>
+                  <a:srgbClr val="14161C"/>
+                </a:solidFill>
+                <a:latin typeface="Be Vietnam Pro" pitchFamily="34" charset="0"/>
+                <a:ea typeface="Be Vietnam Pro" pitchFamily="34" charset="-122"/>
+                <a:cs typeface="Be Vietnam Pro" pitchFamily="34" charset="-120"/>
+              </a:rPr>
+              <a:t> với</a:t>
+            </a:r>
+            <a:r>
+              <a:rPr lang="en-US" sz="2700" dirty="0" spc="-7" kern="0">
+                <a:solidFill>
+                  <a:srgbClr val="14161C"/>
+                </a:solidFill>
+                <a:latin typeface="Be Vietnam Pro" pitchFamily="34" charset="0"/>
+                <a:ea typeface="Be Vietnam Pro" pitchFamily="34" charset="-122"/>
+                <a:cs typeface="Be Vietnam Pro" pitchFamily="34" charset="-120"/>
+              </a:rPr>
+              <a:t> bốn</a:t>
             </a:r>
             <a:r>
               <a:rPr lang="en-US" sz="2700" dirty="0" spc="-1" kern="0">
@@ -11174,10 +10822,10 @@
                 <a:ea typeface="Be Vietnam Pro" pitchFamily="34" charset="-122"/>
                 <a:cs typeface="Be Vietnam Pro" pitchFamily="34" charset="-120"/>
               </a:rPr>
-              <a:t> cho</a:t>
-            </a:r>
-            <a:r>
-              <a:rPr lang="en-US" sz="2700" dirty="0" spc="-24" kern="0">
+              <a:t> mục</a:t>
+            </a:r>
+            <a:r>
+              <a:rPr lang="en-US" sz="2700" dirty="0" spc="0" kern="0">
                 <a:solidFill>
                   <a:srgbClr val="14161C"/>
                 </a:solidFill>
@@ -11185,84 +10833,7 @@
                 <a:ea typeface="Be Vietnam Pro" pitchFamily="34" charset="-122"/>
                 <a:cs typeface="Be Vietnam Pro" pitchFamily="34" charset="-120"/>
               </a:rPr>
-              <a:t> rằng</a:t>
-            </a:r>
-            <a:r>
-              <a:rPr lang="en-US" sz="2700" dirty="0" spc="-59" kern="0">
-                <a:solidFill>
-                  <a:srgbClr val="14161C"/>
-                </a:solidFill>
-                <a:latin typeface="Be Vietnam Pro" pitchFamily="34" charset="0"/>
-                <a:ea typeface="Be Vietnam Pro" pitchFamily="34" charset="-122"/>
-                <a:cs typeface="Be Vietnam Pro" pitchFamily="34" charset="-120"/>
-              </a:rPr>
-              <a:t> WASM</a:t>
-            </a:r>
-            <a:r>
-              <a:rPr lang="en-US" sz="2700" dirty="0" spc="-2" kern="0">
-                <a:solidFill>
-                  <a:srgbClr val="14161C"/>
-                </a:solidFill>
-                <a:latin typeface="Be Vietnam Pro" pitchFamily="34" charset="0"/>
-                <a:ea typeface="Be Vietnam Pro" pitchFamily="34" charset="-122"/>
-                <a:cs typeface="Be Vietnam Pro" pitchFamily="34" charset="-120"/>
-              </a:rPr>
-              <a:t> mở</a:t>
-            </a:r>
-            <a:r>
-              <a:rPr lang="en-US" sz="2700" dirty="0" spc="-40" kern="0">
-                <a:solidFill>
-                  <a:srgbClr val="14161C"/>
-                </a:solidFill>
-                <a:latin typeface="Be Vietnam Pro" pitchFamily="34" charset="0"/>
-                <a:ea typeface="Be Vietnam Pro" pitchFamily="34" charset="-122"/>
-                <a:cs typeface="Be Vietnam Pro" pitchFamily="34" charset="-120"/>
-              </a:rPr>
-              <a:t> ra</a:t>
-            </a:r>
-            <a:r>
-              <a:rPr lang="en-US" sz="2700" dirty="0" spc="-2" kern="0">
-                <a:solidFill>
-                  <a:srgbClr val="14161C"/>
-                </a:solidFill>
-                <a:latin typeface="Be Vietnam Pro" pitchFamily="34" charset="0"/>
-                <a:ea typeface="Be Vietnam Pro" pitchFamily="34" charset="-122"/>
-                <a:cs typeface="Be Vietnam Pro" pitchFamily="34" charset="-120"/>
-              </a:rPr>
-              <a:t> khả năng</a:t>
-            </a:r>
-            <a:r>
-              <a:rPr lang="en-US" sz="2700" dirty="0" spc="-13" kern="0">
-                <a:solidFill>
-                  <a:srgbClr val="14161C"/>
-                </a:solidFill>
-                <a:latin typeface="Be Vietnam Pro" pitchFamily="34" charset="0"/>
-                <a:ea typeface="Be Vietnam Pro" pitchFamily="34" charset="-122"/>
-                <a:cs typeface="Be Vietnam Pro" pitchFamily="34" charset="-120"/>
-              </a:rPr>
-              <a:t> ngoài</a:t>
-            </a:r>
-            <a:r>
-              <a:rPr lang="en-US" sz="2700" dirty="0" spc="7" kern="0">
-                <a:solidFill>
-                  <a:srgbClr val="14161C"/>
-                </a:solidFill>
-                <a:latin typeface="Be Vietnam Pro" pitchFamily="34" charset="0"/>
-                <a:ea typeface="Be Vietnam Pro" pitchFamily="34" charset="-122"/>
-                <a:cs typeface="Be Vietnam Pro" pitchFamily="34" charset="-120"/>
-              </a:rPr>
-              <a:t> trình</a:t>
-            </a:r>
-            <a:r>
-              <a:rPr lang="en-US" sz="2700" dirty="0" spc="-18" kern="0">
-                <a:solidFill>
-                  <a:srgbClr val="14161C"/>
-                </a:solidFill>
-                <a:latin typeface="Be Vietnam Pro" pitchFamily="34" charset="0"/>
-                <a:ea typeface="Be Vietnam Pro" pitchFamily="34" charset="-122"/>
-                <a:cs typeface="Be Vietnam Pro" pitchFamily="34" charset="-120"/>
-              </a:rPr>
-              <a:t> duyệt.</a:t>
+              <a:t> tiêu.</a:t>
             </a:r>
             <a:endParaRPr lang="en-US" sz="2700" dirty="0"/>
           </a:p>
@@ -11297,7 +10868,7 @@
               <a:buNone/>
             </a:pPr>
             <a:r>
-              <a:rPr lang="en-US" sz="2250" b="1" dirty="0" spc="14" kern="0">
+              <a:rPr lang="en-US" sz="2250" b="1" dirty="0" spc="3" kern="0">
                 <a:solidFill>
                   <a:srgbClr val="F3EEE3"/>
                 </a:solidFill>
@@ -11305,10 +10876,10 @@
                 <a:ea typeface="Be Vietnam Pro" pitchFamily="34" charset="-122"/>
                 <a:cs typeface="Be Vietnam Pro" pitchFamily="34" charset="-120"/>
               </a:rPr>
-              <a:t>Chưa</a:t>
-            </a:r>
-            <a:r>
-              <a:rPr lang="en-US" sz="2250" b="1" dirty="0" spc="12" kern="0">
+              <a:t>chuẩn</a:t>
+            </a:r>
+            <a:r>
+              <a:rPr lang="en-US" sz="2250" b="1" dirty="0" spc="-1" kern="0">
                 <a:solidFill>
                   <a:srgbClr val="F3EEE3"/>
                 </a:solidFill>
@@ -11316,29 +10887,7 @@
                 <a:ea typeface="Be Vietnam Pro" pitchFamily="34" charset="-122"/>
                 <a:cs typeface="Be Vietnam Pro" pitchFamily="34" charset="-120"/>
               </a:rPr>
-              <a:t> được</a:t>
-            </a:r>
-            <a:r>
-              <a:rPr lang="en-US" sz="2250" b="1" dirty="0" spc="8" kern="0">
-                <a:solidFill>
-                  <a:srgbClr val="F3EEE3"/>
-                </a:solidFill>
-                <a:latin typeface="Be Vietnam Pro" pitchFamily="34" charset="0"/>
-                <a:ea typeface="Be Vietnam Pro" pitchFamily="34" charset="-122"/>
-                <a:cs typeface="Be Vietnam Pro" pitchFamily="34" charset="-120"/>
-              </a:rPr>
-              <a:t> đối</a:t>
-            </a:r>
-            <a:r>
-              <a:rPr lang="en-US" sz="2250" b="1" dirty="0" spc="3" kern="0">
-                <a:solidFill>
-                  <a:srgbClr val="F3EEE3"/>
-                </a:solidFill>
-                <a:latin typeface="Be Vietnam Pro" pitchFamily="34" charset="0"/>
-                <a:ea typeface="Be Vietnam Pro" pitchFamily="34" charset="-122"/>
-                <a:cs typeface="Be Vietnam Pro" pitchFamily="34" charset="-120"/>
-              </a:rPr>
-              <a:t> chiếu</a:t>
+              <a:t> mở</a:t>
             </a:r>
             <a:endParaRPr lang="en-US" sz="2250" dirty="0"/>
           </a:p>
@@ -11444,7 +10993,7 @@
               <a:buNone/>
             </a:pPr>
             <a:r>
-              <a:rPr lang="en-US" sz="2550" dirty="0" spc="-7" kern="0">
+              <a:rPr lang="en-US" sz="2550" dirty="0" spc="-9" kern="0">
                 <a:solidFill>
                   <a:srgbClr val="14161C"/>
                 </a:solidFill>
@@ -11452,10 +11001,10 @@
                 <a:ea typeface="Be Vietnam Pro" pitchFamily="34" charset="-122"/>
                 <a:cs typeface="Be Vietnam Pro" pitchFamily="34" charset="-120"/>
               </a:rPr>
-              <a:t>Serverless</a:t>
-            </a:r>
-            <a:r>
-              <a:rPr lang="en-US" sz="2550" dirty="0" spc="-17" kern="0">
+              <a:t>Chạy</a:t>
+            </a:r>
+            <a:r>
+              <a:rPr lang="en-US" sz="2550" dirty="0" spc="0" kern="0">
                 <a:solidFill>
                   <a:srgbClr val="14161C"/>
                 </a:solidFill>
@@ -11463,7 +11012,18 @@
                 <a:ea typeface="Be Vietnam Pro" pitchFamily="34" charset="-122"/>
                 <a:cs typeface="Be Vietnam Pro" pitchFamily="34" charset="-120"/>
               </a:rPr>
-              <a:t> và</a:t>
+              <a:t> cách ly,</a:t>
+            </a:r>
+            <a:r>
+              <a:rPr lang="en-US" sz="2550" dirty="0" spc="-2" kern="0">
+                <a:solidFill>
+                  <a:srgbClr val="14161C"/>
+                </a:solidFill>
+                <a:latin typeface="Be Vietnam Pro" pitchFamily="34" charset="0"/>
+                <a:ea typeface="Be Vietnam Pro" pitchFamily="34" charset="-122"/>
+                <a:cs typeface="Be Vietnam Pro" pitchFamily="34" charset="-120"/>
+              </a:rPr>
+              <a:t> theo</a:t>
             </a:r>
             <a:r>
               <a:rPr lang="en-US" sz="2550" dirty="0" spc="0" kern="0">
@@ -11474,10 +11034,10 @@
                 <a:ea typeface="Be Vietnam Pro" pitchFamily="34" charset="-122"/>
                 <a:cs typeface="Be Vietnam Pro" pitchFamily="34" charset="-120"/>
               </a:rPr>
-              <a:t> khởi</a:t>
-            </a:r>
-            <a:r>
-              <a:rPr lang="en-US" sz="2550" dirty="0" spc="10" kern="0">
+              <a:t> chính</a:t>
+            </a:r>
+            <a:r>
+              <a:rPr lang="en-US" sz="2550" dirty="0" spc="-6" kern="0">
                 <a:solidFill>
                   <a:srgbClr val="14161C"/>
                 </a:solidFill>
@@ -11485,10 +11045,10 @@
                 <a:ea typeface="Be Vietnam Pro" pitchFamily="34" charset="-122"/>
                 <a:cs typeface="Be Vietnam Pro" pitchFamily="34" charset="-120"/>
               </a:rPr>
-              <a:t> động</a:t>
-            </a:r>
-            <a:r>
-              <a:rPr lang="en-US" sz="2550" dirty="0" spc="9" kern="0">
+              <a:t> sách</a:t>
+            </a:r>
+            <a:r>
+              <a:rPr lang="en-US" sz="2550" dirty="0" spc="-1" kern="0">
                 <a:solidFill>
                   <a:srgbClr val="14161C"/>
                 </a:solidFill>
@@ -11496,10 +11056,10 @@
                 <a:ea typeface="Be Vietnam Pro" pitchFamily="34" charset="-122"/>
                 <a:cs typeface="Be Vietnam Pro" pitchFamily="34" charset="-120"/>
               </a:rPr>
-              <a:t> tức</a:t>
-            </a:r>
-            <a:r>
-              <a:rPr lang="en-US" sz="2550" dirty="0" spc="2" kern="0">
+              <a:t> cùng</a:t>
+            </a:r>
+            <a:r>
+              <a:rPr lang="en-US" sz="2550" dirty="0" spc="1" kern="0">
                 <a:solidFill>
                   <a:srgbClr val="14161C"/>
                 </a:solidFill>
@@ -11507,10 +11067,10 @@
                 <a:ea typeface="Be Vietnam Pro" pitchFamily="34" charset="-122"/>
                 <a:cs typeface="Be Vietnam Pro" pitchFamily="34" charset="-120"/>
               </a:rPr>
-              <a:t> thì</a:t>
-            </a:r>
-            <a:r>
-              <a:rPr lang="en-US" sz="2550" dirty="0" spc="6" kern="0">
+              <a:t> nguồn</a:t>
+            </a:r>
+            <a:r>
+              <a:rPr lang="en-US" sz="2550" dirty="0" spc="-12" kern="0">
                 <a:solidFill>
                   <a:srgbClr val="14161C"/>
                 </a:solidFill>
@@ -11518,62 +11078,7 @@
                 <a:ea typeface="Be Vietnam Pro" pitchFamily="34" charset="-122"/>
                 <a:cs typeface="Be Vietnam Pro" pitchFamily="34" charset="-120"/>
               </a:rPr>
-              <a:t> chưa</a:t>
-            </a:r>
-            <a:r>
-              <a:rPr lang="en-US" sz="2550" dirty="0" spc="1" kern="0">
-                <a:solidFill>
-                  <a:srgbClr val="14161C"/>
-                </a:solidFill>
-                <a:latin typeface="Be Vietnam Pro" pitchFamily="34" charset="0"/>
-                <a:ea typeface="Be Vietnam Pro" pitchFamily="34" charset="-122"/>
-                <a:cs typeface="Be Vietnam Pro" pitchFamily="34" charset="-120"/>
-              </a:rPr>
-              <a:t> kiểm</a:t>
-            </a:r>
-            <a:r>
-              <a:rPr lang="en-US" sz="2550" dirty="0" spc="-25" kern="0">
-                <a:solidFill>
-                  <a:srgbClr val="14161C"/>
-                </a:solidFill>
-                <a:latin typeface="Be Vietnam Pro" pitchFamily="34" charset="0"/>
-                <a:ea typeface="Be Vietnam Pro" pitchFamily="34" charset="-122"/>
-                <a:cs typeface="Be Vietnam Pro" pitchFamily="34" charset="-120"/>
-              </a:rPr>
-              <a:t> tra</a:t>
-            </a:r>
-            <a:r>
-              <a:rPr lang="en-US" sz="2550" dirty="0" spc="-15" kern="0">
-                <a:solidFill>
-                  <a:srgbClr val="14161C"/>
-                </a:solidFill>
-                <a:latin typeface="Be Vietnam Pro" pitchFamily="34" charset="0"/>
-                <a:ea typeface="Be Vietnam Pro" pitchFamily="34" charset="-122"/>
-                <a:cs typeface="Be Vietnam Pro" pitchFamily="34" charset="-120"/>
-              </a:rPr>
-              <a:t> với</a:t>
-            </a:r>
-            <a:r>
-              <a:rPr lang="en-US" sz="2550" dirty="0" spc="-12" kern="0">
-                <a:solidFill>
-                  <a:srgbClr val="14161C"/>
-                </a:solidFill>
-                <a:latin typeface="Be Vietnam Pro" pitchFamily="34" charset="0"/>
-                <a:ea typeface="Be Vietnam Pro" pitchFamily="34" charset="-122"/>
-                <a:cs typeface="Be Vietnam Pro" pitchFamily="34" charset="-120"/>
-              </a:rPr>
-              <a:t> tài</a:t>
-            </a:r>
-            <a:r>
-              <a:rPr lang="en-US" sz="2550" dirty="0" spc="1" kern="0">
-                <a:solidFill>
-                  <a:srgbClr val="14161C"/>
-                </a:solidFill>
-                <a:latin typeface="Be Vietnam Pro" pitchFamily="34" charset="0"/>
-                <a:ea typeface="Be Vietnam Pro" pitchFamily="34" charset="-122"/>
-                <a:cs typeface="Be Vietnam Pro" pitchFamily="34" charset="-120"/>
-              </a:rPr>
-              <a:t> liệu nào.</a:t>
+              <a:t> gốc.</a:t>
             </a:r>
             <a:endParaRPr lang="en-US" sz="2550" dirty="0"/>
           </a:p>
@@ -11639,7 +11144,18 @@
                 <a:ea typeface="Be Vietnam Pro" pitchFamily="34" charset="-122"/>
                 <a:cs typeface="Be Vietnam Pro" pitchFamily="34" charset="-120"/>
               </a:rPr>
-              <a:t>BÀI</a:t>
+              <a:t>BỐN</a:t>
+            </a:r>
+            <a:r>
+              <a:rPr lang="en-US" sz="1800" b="1" spc="227" kern="0" dirty="0">
+                <a:solidFill>
+                  <a:srgbClr val="6B6A66"/>
+                </a:solidFill>
+                <a:latin typeface="Be Vietnam Pro" pitchFamily="34" charset="0"/>
+                <a:ea typeface="Be Vietnam Pro" pitchFamily="34" charset="-122"/>
+                <a:cs typeface="Be Vietnam Pro" pitchFamily="34" charset="-120"/>
+              </a:rPr>
+              <a:t> MỤC</a:t>
             </a:r>
             <a:r>
               <a:rPr lang="en-US" sz="1800" b="1" spc="225" kern="0" dirty="0">
@@ -11650,29 +11166,7 @@
                 <a:ea typeface="Be Vietnam Pro" pitchFamily="34" charset="-122"/>
                 <a:cs typeface="Be Vietnam Pro" pitchFamily="34" charset="-120"/>
               </a:rPr>
-              <a:t> NGUỒN</a:t>
-            </a:r>
-            <a:r>
-              <a:rPr lang="en-US" sz="1800" b="1" spc="229" kern="0" dirty="0">
-                <a:solidFill>
-                  <a:srgbClr val="6B6A66"/>
-                </a:solidFill>
-                <a:latin typeface="Be Vietnam Pro" pitchFamily="34" charset="0"/>
-                <a:ea typeface="Be Vietnam Pro" pitchFamily="34" charset="-122"/>
-                <a:cs typeface="Be Vietnam Pro" pitchFamily="34" charset="-120"/>
-              </a:rPr>
-              <a:t> CHO</a:t>
-            </a:r>
-            <a:r>
-              <a:rPr lang="en-US" sz="1800" b="1" spc="222" kern="0" dirty="0">
-                <a:solidFill>
-                  <a:srgbClr val="6B6A66"/>
-                </a:solidFill>
-                <a:latin typeface="Be Vietnam Pro" pitchFamily="34" charset="0"/>
-                <a:ea typeface="Be Vietnam Pro" pitchFamily="34" charset="-122"/>
-                <a:cs typeface="Be Vietnam Pro" pitchFamily="34" charset="-120"/>
-              </a:rPr>
-              <a:t> RẰNG</a:t>
+              <a:t> TIÊU</a:t>
             </a:r>
             <a:endParaRPr lang="en-US" sz="1800" dirty="0"/>
           </a:p>
@@ -11798,7 +11292,7 @@
               <a:buNone/>
             </a:pPr>
             <a:r>
-              <a:rPr lang="en-US" sz="1800" b="1" spc="256" kern="0" dirty="0">
+              <a:rPr lang="en-US" sz="1800" b="1" spc="224" kern="0" dirty="0">
                 <a:solidFill>
                   <a:srgbClr val="E8472B"/>
                 </a:solidFill>
@@ -11806,10 +11300,10 @@
                 <a:ea typeface="Be Vietnam Pro" pitchFamily="34" charset="-122"/>
                 <a:cs typeface="Be Vietnam Pro" pitchFamily="34" charset="-120"/>
               </a:rPr>
-              <a:t>ỨNG</a:t>
-            </a:r>
-            <a:r>
-              <a:rPr lang="en-US" sz="1800" b="1" spc="226" kern="0" dirty="0">
+              <a:t>THIẾT</a:t>
+            </a:r>
+            <a:r>
+              <a:rPr lang="en-US" sz="1800" b="1" spc="227" kern="0" dirty="0">
                 <a:solidFill>
                   <a:srgbClr val="E8472B"/>
                 </a:solidFill>
@@ -11817,10 +11311,10 @@
                 <a:ea typeface="Be Vietnam Pro" pitchFamily="34" charset="-122"/>
                 <a:cs typeface="Be Vietnam Pro" pitchFamily="34" charset="-120"/>
               </a:rPr>
-              <a:t> DỤNG</a:t>
-            </a:r>
-            <a:r>
-              <a:rPr lang="en-US" sz="1800" b="1" spc="221" kern="0" dirty="0">
+              <a:t> KẾ</a:t>
+            </a:r>
+            <a:r>
+              <a:rPr lang="en-US" sz="1800" b="1" spc="225" kern="0" dirty="0">
                 <a:solidFill>
                   <a:srgbClr val="E8472B"/>
                 </a:solidFill>
@@ -11828,7 +11322,7 @@
                 <a:ea typeface="Be Vietnam Pro" pitchFamily="34" charset="-122"/>
                 <a:cs typeface="Be Vietnam Pro" pitchFamily="34" charset="-120"/>
               </a:rPr>
-              <a:t> SERVERLESS</a:t>
+              <a:t> ĐỂ</a:t>
             </a:r>
             <a:endParaRPr lang="en-US" sz="1800" dirty="0"/>
           </a:p>
@@ -11863,7 +11357,7 @@
               <a:buNone/>
             </a:pPr>
             <a:r>
-              <a:rPr lang="en-US" sz="2850" b="1" dirty="0" spc="-1" kern="0">
+              <a:rPr lang="en-US" sz="2850" b="1" dirty="0" spc="-3" kern="0">
                 <a:solidFill>
                   <a:srgbClr val="1F3FD1"/>
                 </a:solidFill>
@@ -11871,10 +11365,10 @@
                 <a:ea typeface="Be Vietnam Pro" pitchFamily="34" charset="-122"/>
                 <a:cs typeface="Be Vietnam Pro" pitchFamily="34" charset="-120"/>
               </a:rPr>
-              <a:t>Ít tài</a:t>
-            </a:r>
-            <a:r>
-              <a:rPr lang="en-US" sz="2850" b="1" dirty="0" spc="-15" kern="0">
+              <a:t>Nhanh,</a:t>
+            </a:r>
+            <a:r>
+              <a:rPr lang="en-US" sz="2850" b="1" dirty="0" spc="-5" kern="0">
                 <a:solidFill>
                   <a:srgbClr val="1F3FD1"/>
                 </a:solidFill>
@@ -11882,10 +11376,10 @@
                 <a:ea typeface="Be Vietnam Pro" pitchFamily="34" charset="-122"/>
                 <a:cs typeface="Be Vietnam Pro" pitchFamily="34" charset="-120"/>
               </a:rPr>
-              <a:t> nguyên</a:t>
-            </a:r>
-            <a:r>
-              <a:rPr lang="en-US" sz="2850" b="1" dirty="0" spc="-5" kern="0">
+              <a:t> khả</a:t>
+            </a:r>
+            <a:r>
+              <a:rPr lang="en-US" sz="2850" b="1" dirty="0" spc="-14" kern="0">
                 <a:solidFill>
                   <a:srgbClr val="1F3FD1"/>
                 </a:solidFill>
@@ -11893,7 +11387,7 @@
                 <a:ea typeface="Be Vietnam Pro" pitchFamily="34" charset="-122"/>
                 <a:cs typeface="Be Vietnam Pro" pitchFamily="34" charset="-120"/>
               </a:rPr>
-              <a:t> hơn</a:t>
+              <a:t> chuyển</a:t>
             </a:r>
             <a:endParaRPr lang="en-US" sz="2850" dirty="0"/>
           </a:p>
@@ -11928,7 +11422,7 @@
               <a:buNone/>
             </a:pPr>
             <a:r>
-              <a:rPr lang="en-US" sz="2850" b="1" dirty="0" spc="3" kern="0">
+              <a:rPr lang="en-US" sz="2850" b="1" dirty="0" spc="-3" kern="0">
                 <a:solidFill>
                   <a:srgbClr val="1F3FD1"/>
                 </a:solidFill>
@@ -11936,10 +11430,10 @@
                 <a:ea typeface="Be Vietnam Pro" pitchFamily="34" charset="-122"/>
                 <a:cs typeface="Be Vietnam Pro" pitchFamily="34" charset="-120"/>
               </a:rPr>
-              <a:t>Khởi</a:t>
-            </a:r>
-            <a:r>
-              <a:rPr lang="en-US" sz="2850" b="1" dirty="0" spc="1" kern="0">
+              <a:t>Đọc, gỡ lỗi</a:t>
+            </a:r>
+            <a:r>
+              <a:rPr lang="en-US" sz="2850" b="1" dirty="0" spc="14" kern="0">
                 <a:solidFill>
                   <a:srgbClr val="1F3FD1"/>
                 </a:solidFill>
@@ -11947,29 +11441,7 @@
                 <a:ea typeface="Be Vietnam Pro" pitchFamily="34" charset="-122"/>
                 <a:cs typeface="Be Vietnam Pro" pitchFamily="34" charset="-120"/>
               </a:rPr>
-              <a:t> động</a:t>
-            </a:r>
-            <a:r>
-              <a:rPr lang="en-US" sz="2850" b="1" dirty="0" spc="17" kern="0">
-                <a:solidFill>
-                  <a:srgbClr val="1F3FD1"/>
-                </a:solidFill>
-                <a:latin typeface="Be Vietnam Pro" pitchFamily="34" charset="0"/>
-                <a:ea typeface="Be Vietnam Pro" pitchFamily="34" charset="-122"/>
-                <a:cs typeface="Be Vietnam Pro" pitchFamily="34" charset="-120"/>
-              </a:rPr>
-              <a:t> tức</a:t>
-            </a:r>
-            <a:r>
-              <a:rPr lang="en-US" sz="2850" b="1" dirty="0" spc="-1" kern="0">
-                <a:solidFill>
-                  <a:srgbClr val="1F3FD1"/>
-                </a:solidFill>
-                <a:latin typeface="Be Vietnam Pro" pitchFamily="34" charset="0"/>
-                <a:ea typeface="Be Vietnam Pro" pitchFamily="34" charset="-122"/>
-                <a:cs typeface="Be Vietnam Pro" pitchFamily="34" charset="-120"/>
-              </a:rPr>
-              <a:t> thì</a:t>
+              <a:t> được</a:t>
             </a:r>
             <a:endParaRPr lang="en-US" sz="2850" dirty="0"/>
           </a:p>
@@ -12004,7 +11476,7 @@
               <a:buNone/>
             </a:pPr>
             <a:r>
-              <a:rPr lang="en-US" sz="2550" b="1" dirty="0" spc="14" kern="0">
+              <a:rPr lang="en-US" sz="2550" b="1" dirty="0" spc="-1" kern="0">
                 <a:solidFill>
                   <a:srgbClr val="F3EEE3"/>
                 </a:solidFill>
@@ -12012,10 +11484,10 @@
                 <a:ea typeface="Be Vietnam Pro" pitchFamily="34" charset="-122"/>
                 <a:cs typeface="Be Vietnam Pro" pitchFamily="34" charset="-120"/>
               </a:rPr>
-              <a:t>Chưa</a:t>
-            </a:r>
-            <a:r>
-              <a:rPr lang="en-US" sz="2550" b="1" dirty="0" spc="10" kern="0">
+              <a:t>An</a:t>
+            </a:r>
+            <a:r>
+              <a:rPr lang="en-US" sz="2550" b="1" dirty="0" spc="-3" kern="0">
                 <a:solidFill>
                   <a:srgbClr val="F3EEE3"/>
                 </a:solidFill>
@@ -12023,10 +11495,10 @@
                 <a:ea typeface="Be Vietnam Pro" pitchFamily="34" charset="-122"/>
                 <a:cs typeface="Be Vietnam Pro" pitchFamily="34" charset="-120"/>
               </a:rPr>
-              <a:t> được</a:t>
-            </a:r>
-            <a:r>
-              <a:rPr lang="en-US" sz="2550" b="1" dirty="0" spc="5" kern="0">
+              <a:t> toàn</a:t>
+            </a:r>
+            <a:r>
+              <a:rPr lang="en-US" sz="2550" b="1" dirty="0" spc="0" kern="0">
                 <a:solidFill>
                   <a:srgbClr val="F3EEE3"/>
                 </a:solidFill>
@@ -12034,10 +11506,10 @@
                 <a:ea typeface="Be Vietnam Pro" pitchFamily="34" charset="-122"/>
                 <a:cs typeface="Be Vietnam Pro" pitchFamily="34" charset="-120"/>
               </a:rPr>
-              <a:t> đối</a:t>
-            </a:r>
-            <a:r>
-              <a:rPr lang="en-US" sz="2550" b="1" dirty="0" spc="2" kern="0">
+              <a:t> ·</a:t>
+            </a:r>
+            <a:r>
+              <a:rPr lang="en-US" sz="2550" b="1" dirty="0" spc="-6" kern="0">
                 <a:solidFill>
                   <a:srgbClr val="F3EEE3"/>
                 </a:solidFill>
@@ -12045,7 +11517,18 @@
                 <a:ea typeface="Be Vietnam Pro" pitchFamily="34" charset="-122"/>
                 <a:cs typeface="Be Vietnam Pro" pitchFamily="34" charset="-120"/>
               </a:rPr>
-              <a:t> chiếu</a:t>
+              <a:t> không phá</a:t>
+            </a:r>
+            <a:r>
+              <a:rPr lang="en-US" sz="2550" b="1" dirty="0" spc="-18" kern="0">
+                <a:solidFill>
+                  <a:srgbClr val="F3EEE3"/>
+                </a:solidFill>
+                <a:latin typeface="Be Vietnam Pro" pitchFamily="34" charset="0"/>
+                <a:ea typeface="Be Vietnam Pro" pitchFamily="34" charset="-122"/>
+                <a:cs typeface="Be Vietnam Pro" pitchFamily="34" charset="-120"/>
+              </a:rPr>
+              <a:t> web</a:t>
             </a:r>
             <a:endParaRPr lang="en-US" sz="2550" dirty="0"/>
           </a:p>
@@ -12727,7 +12210,7 @@
               <a:buNone/>
             </a:pPr>
             <a:r>
-              <a:rPr lang="en-US" sz="2700" dirty="0" spc="-60" kern="0">
+              <a:rPr lang="en-US" sz="2700" dirty="0" spc="0" kern="0">
                 <a:solidFill>
                   <a:srgbClr val="C4C8D6"/>
                 </a:solidFill>
@@ -12735,7 +12218,29 @@
                 <a:ea typeface="Be Vietnam Pro" pitchFamily="34" charset="-122"/>
                 <a:cs typeface="Be Vietnam Pro" pitchFamily="34" charset="-120"/>
               </a:rPr>
-              <a:t>Về</a:t>
+              <a:t>Gần</a:t>
+            </a:r>
+            <a:r>
+              <a:rPr lang="en-US" sz="2700" dirty="0" spc="-16" kern="0">
+                <a:solidFill>
+                  <a:srgbClr val="C4C8D6"/>
+                </a:solidFill>
+                <a:latin typeface="Be Vietnam Pro" pitchFamily="34" charset="0"/>
+                <a:ea typeface="Be Vietnam Pro" pitchFamily="34" charset="-122"/>
+                <a:cs typeface="Be Vietnam Pro" pitchFamily="34" charset="-120"/>
+              </a:rPr>
+              <a:t> tốc</a:t>
+            </a:r>
+            <a:r>
+              <a:rPr lang="en-US" sz="2700" dirty="0" spc="16" kern="0">
+                <a:solidFill>
+                  <a:srgbClr val="C4C8D6"/>
+                </a:solidFill>
+                <a:latin typeface="Be Vietnam Pro" pitchFamily="34" charset="0"/>
+                <a:ea typeface="Be Vietnam Pro" pitchFamily="34" charset="-122"/>
+                <a:cs typeface="Be Vietnam Pro" pitchFamily="34" charset="-120"/>
+              </a:rPr>
+              <a:t> độ</a:t>
             </a:r>
             <a:r>
               <a:rPr lang="en-US" sz="2700" dirty="0" spc="-2" kern="0">
@@ -12746,7 +12251,18 @@
                 <a:ea typeface="Be Vietnam Pro" pitchFamily="34" charset="-122"/>
                 <a:cs typeface="Be Vietnam Pro" pitchFamily="34" charset="-120"/>
               </a:rPr>
-              <a:t> hiệu</a:t>
+              <a:t> mã</a:t>
+            </a:r>
+            <a:r>
+              <a:rPr lang="en-US" sz="2700" dirty="0" spc="-17" kern="0">
+                <a:solidFill>
+                  <a:srgbClr val="C4C8D6"/>
+                </a:solidFill>
+                <a:latin typeface="Be Vietnam Pro" pitchFamily="34" charset="0"/>
+                <a:ea typeface="Be Vietnam Pro" pitchFamily="34" charset="-122"/>
+                <a:cs typeface="Be Vietnam Pro" pitchFamily="34" charset="-120"/>
+              </a:rPr>
+              <a:t> gốc</a:t>
             </a:r>
             <a:r>
               <a:rPr lang="en-US" sz="2700" dirty="0" spc="-1" kern="0">
@@ -12757,7 +12273,62 @@
                 <a:ea typeface="Be Vietnam Pro" pitchFamily="34" charset="-122"/>
                 <a:cs typeface="Be Vietnam Pro" pitchFamily="34" charset="-120"/>
               </a:rPr>
-              <a:t> năng,</a:t>
+              <a:t> là</a:t>
+            </a:r>
+            <a:r>
+              <a:rPr lang="en-US" sz="2700" dirty="0" spc="1" kern="0">
+                <a:solidFill>
+                  <a:srgbClr val="C4C8D6"/>
+                </a:solidFill>
+                <a:latin typeface="Be Vietnam Pro" pitchFamily="34" charset="0"/>
+                <a:ea typeface="Be Vietnam Pro" pitchFamily="34" charset="-122"/>
+                <a:cs typeface="Be Vietnam Pro" pitchFamily="34" charset="-120"/>
+              </a:rPr>
+              <a:t> cách</a:t>
+            </a:r>
+            <a:r>
+              <a:rPr lang="en-US" sz="2700" dirty="0" spc="-13" kern="0">
+                <a:solidFill>
+                  <a:srgbClr val="C4C8D6"/>
+                </a:solidFill>
+                <a:latin typeface="Be Vietnam Pro" pitchFamily="34" charset="0"/>
+                <a:ea typeface="Be Vietnam Pro" pitchFamily="34" charset="-122"/>
+                <a:cs typeface="Be Vietnam Pro" pitchFamily="34" charset="-120"/>
+              </a:rPr>
+              <a:t> tài</a:t>
+            </a:r>
+            <a:r>
+              <a:rPr lang="en-US" sz="2700" dirty="0" spc="-1" kern="0">
+                <a:solidFill>
+                  <a:srgbClr val="C4C8D6"/>
+                </a:solidFill>
+                <a:latin typeface="Be Vietnam Pro" pitchFamily="34" charset="0"/>
+                <a:ea typeface="Be Vietnam Pro" pitchFamily="34" charset="-122"/>
+                <a:cs typeface="Be Vietnam Pro" pitchFamily="34" charset="-120"/>
+              </a:rPr>
+              <a:t> liệu</a:t>
+            </a:r>
+            <a:r>
+              <a:rPr lang="en-US" sz="2700" dirty="0" spc="-2" kern="0">
+                <a:solidFill>
+                  <a:srgbClr val="C4C8D6"/>
+                </a:solidFill>
+                <a:latin typeface="Be Vietnam Pro" pitchFamily="34" charset="0"/>
+                <a:ea typeface="Be Vietnam Pro" pitchFamily="34" charset="-122"/>
+                <a:cs typeface="Be Vietnam Pro" pitchFamily="34" charset="-120"/>
+              </a:rPr>
+              <a:t> mô</a:t>
+            </a:r>
+            <a:r>
+              <a:rPr lang="en-US" sz="2700" dirty="0" spc="-12" kern="0">
+                <a:solidFill>
+                  <a:srgbClr val="C4C8D6"/>
+                </a:solidFill>
+                <a:latin typeface="Be Vietnam Pro" pitchFamily="34" charset="0"/>
+                <a:ea typeface="Be Vietnam Pro" pitchFamily="34" charset="-122"/>
+                <a:cs typeface="Be Vietnam Pro" pitchFamily="34" charset="-120"/>
+              </a:rPr>
+              <a:t> tả;</a:t>
             </a:r>
             <a:r>
               <a:rPr lang="en-US" sz="2700" dirty="0" spc="-4" kern="0">
@@ -12771,6 +12342,17 @@
               <a:t> bài</a:t>
             </a:r>
             <a:r>
+              <a:rPr lang="en-US" sz="2700" dirty="0" spc="-12" kern="0">
+                <a:solidFill>
+                  <a:srgbClr val="C4C8D6"/>
+                </a:solidFill>
+                <a:latin typeface="Be Vietnam Pro" pitchFamily="34" charset="0"/>
+                <a:ea typeface="Be Vietnam Pro" pitchFamily="34" charset="-122"/>
+                <a:cs typeface="Be Vietnam Pro" pitchFamily="34" charset="-120"/>
+              </a:rPr>
+              <a:t> này</a:t>
+            </a:r>
+            <a:r>
               <a:rPr lang="en-US" sz="2700" dirty="0" spc="-2" kern="0">
                 <a:solidFill>
                   <a:srgbClr val="C4C8D6"/>
@@ -12779,10 +12361,10 @@
                 <a:ea typeface="Be Vietnam Pro" pitchFamily="34" charset="-122"/>
                 <a:cs typeface="Be Vietnam Pro" pitchFamily="34" charset="-120"/>
               </a:rPr>
-              <a:t> giữ</a:t>
-            </a:r>
-            <a:r>
-              <a:rPr lang="en-US" sz="2700" dirty="0" spc="1" kern="0">
+              <a:t> không</a:t>
+            </a:r>
+            <a:r>
+              <a:rPr lang="en-US" sz="2700" dirty="0" spc="10" kern="0">
                 <a:solidFill>
                   <a:srgbClr val="C4C8D6"/>
                 </a:solidFill>
@@ -12790,106 +12372,7 @@
                 <a:ea typeface="Be Vietnam Pro" pitchFamily="34" charset="-122"/>
                 <a:cs typeface="Be Vietnam Pro" pitchFamily="34" charset="-120"/>
               </a:rPr>
-              <a:t> cách</a:t>
-            </a:r>
-            <a:r>
-              <a:rPr lang="en-US" sz="2700" dirty="0" spc="-2" kern="0">
-                <a:solidFill>
-                  <a:srgbClr val="C4C8D6"/>
-                </a:solidFill>
-                <a:latin typeface="Be Vietnam Pro" pitchFamily="34" charset="0"/>
-                <a:ea typeface="Be Vietnam Pro" pitchFamily="34" charset="-122"/>
-                <a:cs typeface="Be Vietnam Pro" pitchFamily="34" charset="-120"/>
-              </a:rPr>
-              <a:t> nói của</a:t>
-            </a:r>
-            <a:r>
-              <a:rPr lang="en-US" sz="2700" dirty="0" spc="0" kern="0">
-                <a:solidFill>
-                  <a:srgbClr val="C4C8D6"/>
-                </a:solidFill>
-                <a:latin typeface="Be Vietnam Pro" pitchFamily="34" charset="0"/>
-                <a:ea typeface="Be Vietnam Pro" pitchFamily="34" charset="-122"/>
-                <a:cs typeface="Be Vietnam Pro" pitchFamily="34" charset="-120"/>
-              </a:rPr>
-              <a:t> MDN:</a:t>
-            </a:r>
-            <a:r>
-              <a:rPr lang="en-US" sz="2700" dirty="0" spc="-7" kern="0">
-                <a:solidFill>
-                  <a:srgbClr val="C4C8D6"/>
-                </a:solidFill>
-                <a:latin typeface="Be Vietnam Pro" pitchFamily="34" charset="0"/>
-                <a:ea typeface="Be Vietnam Pro" pitchFamily="34" charset="-122"/>
-                <a:cs typeface="Be Vietnam Pro" pitchFamily="34" charset="-120"/>
-              </a:rPr>
-              <a:t> JavaScript</a:t>
-            </a:r>
-            <a:r>
-              <a:rPr lang="en-US" sz="2700" dirty="0" spc="-15" kern="0">
-                <a:solidFill>
-                  <a:srgbClr val="C4C8D6"/>
-                </a:solidFill>
-                <a:latin typeface="Be Vietnam Pro" pitchFamily="34" charset="0"/>
-                <a:ea typeface="Be Vietnam Pro" pitchFamily="34" charset="-122"/>
-                <a:cs typeface="Be Vietnam Pro" pitchFamily="34" charset="-120"/>
-              </a:rPr>
-              <a:t> gặp</a:t>
-            </a:r>
-            <a:r>
-              <a:rPr lang="en-US" sz="2700" dirty="0" spc="-14" kern="0">
-                <a:solidFill>
-                  <a:srgbClr val="C4C8D6"/>
-                </a:solidFill>
-                <a:latin typeface="Be Vietnam Pro" pitchFamily="34" charset="0"/>
-                <a:ea typeface="Be Vietnam Pro" pitchFamily="34" charset="-122"/>
-                <a:cs typeface="Be Vietnam Pro" pitchFamily="34" charset="-120"/>
-              </a:rPr>
-              <a:t> vấn</a:t>
-            </a:r>
-            <a:r>
-              <a:rPr lang="en-US" sz="2700" dirty="0" spc="15" kern="0">
-                <a:solidFill>
-                  <a:srgbClr val="C4C8D6"/>
-                </a:solidFill>
-                <a:latin typeface="Be Vietnam Pro" pitchFamily="34" charset="0"/>
-                <a:ea typeface="Be Vietnam Pro" pitchFamily="34" charset="-122"/>
-                <a:cs typeface="Be Vietnam Pro" pitchFamily="34" charset="-120"/>
-              </a:rPr>
-              <a:t> đề</a:t>
-            </a:r>
-            <a:r>
-              <a:rPr lang="en-US" sz="2700" dirty="0" spc="-3" kern="0">
-                <a:solidFill>
-                  <a:srgbClr val="C4C8D6"/>
-                </a:solidFill>
-                <a:latin typeface="Be Vietnam Pro" pitchFamily="34" charset="0"/>
-                <a:ea typeface="Be Vietnam Pro" pitchFamily="34" charset="-122"/>
-                <a:cs typeface="Be Vietnam Pro" pitchFamily="34" charset="-120"/>
-              </a:rPr>
-              <a:t> ở</a:t>
-            </a:r>
-            <a:r>
-              <a:rPr lang="en-US" sz="2700" dirty="0" spc="-2" kern="0">
-                <a:solidFill>
-                  <a:srgbClr val="C4C8D6"/>
-                </a:solidFill>
-                <a:latin typeface="Be Vietnam Pro" pitchFamily="34" charset="0"/>
-                <a:ea typeface="Be Vietnam Pro" pitchFamily="34" charset="-122"/>
-                <a:cs typeface="Be Vietnam Pro" pitchFamily="34" charset="-120"/>
-              </a:rPr>
-              <a:t> việc</a:t>
-            </a:r>
-            <a:r>
-              <a:rPr lang="en-US" sz="2700" dirty="0" spc="-3" kern="0">
-                <a:solidFill>
-                  <a:srgbClr val="C4C8D6"/>
-                </a:solidFill>
-                <a:latin typeface="Be Vietnam Pro" pitchFamily="34" charset="0"/>
-                <a:ea typeface="Be Vietnam Pro" pitchFamily="34" charset="-122"/>
-                <a:cs typeface="Be Vietnam Pro" pitchFamily="34" charset="-120"/>
-              </a:rPr>
-              <a:t> nặng.</a:t>
+              <a:t> đo.</a:t>
             </a:r>
             <a:endParaRPr lang="en-US" sz="2700" dirty="0"/>
           </a:p>
@@ -13813,7 +13296,7 @@
               <a:buNone/>
             </a:pPr>
             <a:r>
-              <a:rPr lang="en-US" sz="2850" b="1" dirty="0" spc="4" kern="0">
+              <a:rPr lang="en-US" sz="2850" b="1" dirty="0" spc="-98" kern="0">
                 <a:solidFill>
                   <a:srgbClr val="F3EEE3"/>
                 </a:solidFill>
@@ -13821,10 +13304,10 @@
                 <a:ea typeface="Be Vietnam Pro" pitchFamily="34" charset="-122"/>
                 <a:cs typeface="Be Vietnam Pro" pitchFamily="34" charset="-120"/>
               </a:rPr>
-              <a:t>Đám</a:t>
-            </a:r>
-            <a:r>
-              <a:rPr lang="en-US" sz="2850" b="1" dirty="0" spc="-10" kern="0">
+              <a:t>Tốc</a:t>
+            </a:r>
+            <a:r>
+              <a:rPr lang="en-US" sz="2850" b="1" dirty="0" spc="9" kern="0">
                 <a:solidFill>
                   <a:srgbClr val="F3EEE3"/>
                 </a:solidFill>
@@ -13832,10 +13315,10 @@
                 <a:ea typeface="Be Vietnam Pro" pitchFamily="34" charset="-122"/>
                 <a:cs typeface="Be Vietnam Pro" pitchFamily="34" charset="-120"/>
               </a:rPr>
-              <a:t> mây</a:t>
-            </a:r>
-            <a:r>
-              <a:rPr lang="en-US" sz="2850" b="1" dirty="0" spc="-20" kern="0">
+              <a:t> độ</a:t>
+            </a:r>
+            <a:r>
+              <a:rPr lang="en-US" sz="2850" b="1" dirty="0" spc="-8" kern="0">
                 <a:solidFill>
                   <a:srgbClr val="F3EEE3"/>
                 </a:solidFill>
@@ -13843,10 +13326,10 @@
                 <a:ea typeface="Be Vietnam Pro" pitchFamily="34" charset="-122"/>
                 <a:cs typeface="Be Vietnam Pro" pitchFamily="34" charset="-120"/>
               </a:rPr>
-              <a:t> và</a:t>
-            </a:r>
-            <a:r>
-              <a:rPr lang="en-US" sz="2850" b="1" dirty="0" spc="0" kern="0">
+              <a:t> thật</a:t>
+            </a:r>
+            <a:r>
+              <a:rPr lang="en-US" sz="2850" b="1" dirty="0" spc="1" kern="0">
                 <a:solidFill>
                   <a:srgbClr val="F3EEE3"/>
                 </a:solidFill>
@@ -13854,7 +13337,18 @@
                 <a:ea typeface="Be Vietnam Pro" pitchFamily="34" charset="-122"/>
                 <a:cs typeface="Be Vietnam Pro" pitchFamily="34" charset="-120"/>
               </a:rPr>
-              <a:t> biên</a:t>
+              <a:t> tùy</a:t>
+            </a:r>
+            <a:r>
+              <a:rPr lang="en-US" sz="2850" b="1" dirty="0" spc="2" kern="0">
+                <a:solidFill>
+                  <a:srgbClr val="F3EEE3"/>
+                </a:solidFill>
+                <a:latin typeface="Be Vietnam Pro" pitchFamily="34" charset="0"/>
+                <a:ea typeface="Be Vietnam Pro" pitchFamily="34" charset="-122"/>
+                <a:cs typeface="Be Vietnam Pro" pitchFamily="34" charset="-120"/>
+              </a:rPr>
+              <a:t> việc</a:t>
             </a:r>
             <a:endParaRPr lang="en-US" sz="2850" dirty="0"/>
           </a:p>
@@ -13885,7 +13379,7 @@
               <a:buNone/>
             </a:pPr>
             <a:r>
-              <a:rPr lang="en-US" sz="2250" dirty="0" spc="7" kern="0">
+              <a:rPr lang="en-US" sz="2250" dirty="0" spc="-6" kern="0">
                 <a:solidFill>
                   <a:srgbClr val="C4C8D6"/>
                 </a:solidFill>
@@ -13893,10 +13387,10 @@
                 <a:ea typeface="Be Vietnam Pro" pitchFamily="34" charset="-122"/>
                 <a:cs typeface="Be Vietnam Pro" pitchFamily="34" charset="-120"/>
               </a:rPr>
-              <a:t>chưa</a:t>
-            </a:r>
-            <a:r>
-              <a:rPr lang="en-US" sz="2250" dirty="0" spc="9" kern="0">
+              <a:t>bài</a:t>
+            </a:r>
+            <a:r>
+              <a:rPr lang="en-US" sz="2250" dirty="0" spc="-9" kern="0">
                 <a:solidFill>
                   <a:srgbClr val="C4C8D6"/>
                 </a:solidFill>
@@ -13904,10 +13398,10 @@
                 <a:ea typeface="Be Vietnam Pro" pitchFamily="34" charset="-122"/>
                 <a:cs typeface="Be Vietnam Pro" pitchFamily="34" charset="-120"/>
               </a:rPr>
-              <a:t> được</a:t>
-            </a:r>
-            <a:r>
-              <a:rPr lang="en-US" sz="2250" dirty="0" spc="13" kern="0">
+              <a:t> này</a:t>
+            </a:r>
+            <a:r>
+              <a:rPr lang="en-US" sz="2250" dirty="0" spc="1" kern="0">
                 <a:solidFill>
                   <a:srgbClr val="C4C8D6"/>
                 </a:solidFill>
@@ -13915,10 +13409,10 @@
                 <a:ea typeface="Be Vietnam Pro" pitchFamily="34" charset="-122"/>
                 <a:cs typeface="Be Vietnam Pro" pitchFamily="34" charset="-120"/>
               </a:rPr>
-              <a:t> đối</a:t>
-            </a:r>
-            <a:r>
-              <a:rPr lang="en-US" sz="2250" dirty="0" spc="-1" kern="0">
+              <a:t> không</a:t>
+            </a:r>
+            <a:r>
+              <a:rPr lang="en-US" sz="2250" dirty="0" spc="16" kern="0">
                 <a:solidFill>
                   <a:srgbClr val="C4C8D6"/>
                 </a:solidFill>
@@ -13926,7 +13420,7 @@
                 <a:ea typeface="Be Vietnam Pro" pitchFamily="34" charset="-122"/>
                 <a:cs typeface="Be Vietnam Pro" pitchFamily="34" charset="-120"/>
               </a:rPr>
-              <a:t> chiếu</a:t>
+              <a:t> đo</a:t>
             </a:r>
             <a:endParaRPr lang="en-US" sz="2250" dirty="0"/>
           </a:p>
@@ -13957,7 +13451,7 @@
               <a:buNone/>
             </a:pPr>
             <a:r>
-              <a:rPr lang="en-US" sz="1800" dirty="0" spc="0" kern="0">
+              <a:rPr lang="en-US" sz="1800" dirty="0" spc="-1" kern="0">
                 <a:solidFill>
                   <a:srgbClr val="9AA0B5"/>
                 </a:solidFill>
@@ -13965,10 +13459,10 @@
                 <a:ea typeface="Be Vietnam Pro" pitchFamily="34" charset="-122"/>
                 <a:cs typeface="Be Vietnam Pro" pitchFamily="34" charset="-120"/>
               </a:rPr>
-              <a:t>Nhận</a:t>
-            </a:r>
-            <a:r>
-              <a:rPr lang="en-US" sz="1800" dirty="0" spc="13" kern="0">
+              <a:t>Giới hạn</a:t>
+            </a:r>
+            <a:r>
+              <a:rPr lang="en-US" sz="1800" dirty="0" spc="3" kern="0">
                 <a:solidFill>
                   <a:srgbClr val="9AA0B5"/>
                 </a:solidFill>
@@ -13976,10 +13470,10 @@
                 <a:ea typeface="Be Vietnam Pro" pitchFamily="34" charset="-122"/>
                 <a:cs typeface="Be Vietnam Pro" pitchFamily="34" charset="-120"/>
               </a:rPr>
-              <a:t> định</a:t>
-            </a:r>
-            <a:r>
-              <a:rPr lang="en-US" sz="1800" dirty="0" spc="3" kern="0">
+              <a:t> của</a:t>
+            </a:r>
+            <a:r>
+              <a:rPr lang="en-US" sz="1800" dirty="0" spc="-2" kern="0">
                 <a:solidFill>
                   <a:srgbClr val="9AA0B5"/>
                 </a:solidFill>
@@ -13987,29 +13481,7 @@
                 <a:ea typeface="Be Vietnam Pro" pitchFamily="34" charset="-122"/>
                 <a:cs typeface="Be Vietnam Pro" pitchFamily="34" charset="-120"/>
               </a:rPr>
-              <a:t> của</a:t>
-            </a:r>
-            <a:r>
-              <a:rPr lang="en-US" sz="1800" dirty="0" spc="-2" kern="0">
-                <a:solidFill>
-                  <a:srgbClr val="9AA0B5"/>
-                </a:solidFill>
-                <a:latin typeface="Be Vietnam Pro" pitchFamily="34" charset="0"/>
-                <a:ea typeface="Be Vietnam Pro" pitchFamily="34" charset="-122"/>
-                <a:cs typeface="Be Vietnam Pro" pitchFamily="34" charset="-120"/>
-              </a:rPr>
               <a:t> bài</a:t>
-            </a:r>
-            <a:r>
-              <a:rPr lang="en-US" sz="1800" dirty="0" spc="-4" kern="0">
-                <a:solidFill>
-                  <a:srgbClr val="9AA0B5"/>
-                </a:solidFill>
-                <a:latin typeface="Be Vietnam Pro" pitchFamily="34" charset="0"/>
-                <a:ea typeface="Be Vietnam Pro" pitchFamily="34" charset="-122"/>
-                <a:cs typeface="Be Vietnam Pro" pitchFamily="34" charset="-120"/>
-              </a:rPr>
-              <a:t> nguồn</a:t>
             </a:r>
             <a:endParaRPr lang="en-US" sz="1800" dirty="0"/>
           </a:p>
@@ -14848,7 +14320,7 @@
               <a:t> có</a:t>
             </a:r>
             <a:r>
-              <a:rPr lang="en-US" sz="2700" dirty="0" spc="-9" kern="0">
+              <a:rPr lang="en-US" sz="2700" dirty="0" spc="2" kern="0">
                 <a:solidFill>
                   <a:srgbClr val="14161C"/>
                 </a:solidFill>
@@ -14856,10 +14328,10 @@
                 <a:ea typeface="Be Vietnam Pro" pitchFamily="34" charset="-122"/>
                 <a:cs typeface="Be Vietnam Pro" pitchFamily="34" charset="-120"/>
               </a:rPr>
-              <a:t> sẵn</a:t>
-            </a:r>
-            <a:r>
-              <a:rPr lang="en-US" sz="2700" dirty="0" spc="2" kern="0">
+              <a:t> thư</a:t>
+            </a:r>
+            <a:r>
+              <a:rPr lang="en-US" sz="2700" dirty="0" spc="-2" kern="0">
                 <a:solidFill>
                   <a:srgbClr val="14161C"/>
                 </a:solidFill>
@@ -14867,7 +14339,29 @@
                 <a:ea typeface="Be Vietnam Pro" pitchFamily="34" charset="-122"/>
                 <a:cs typeface="Be Vietnam Pro" pitchFamily="34" charset="-120"/>
               </a:rPr>
-              <a:t> thư</a:t>
+              <a:t> viện</a:t>
+            </a:r>
+            <a:r>
+              <a:rPr lang="en-US" sz="2700" dirty="0" spc="-3" kern="0">
+                <a:solidFill>
+                  <a:srgbClr val="14161C"/>
+                </a:solidFill>
+                <a:latin typeface="Be Vietnam Pro" pitchFamily="34" charset="0"/>
+                <a:ea typeface="Be Vietnam Pro" pitchFamily="34" charset="-122"/>
+                <a:cs typeface="Be Vietnam Pro" pitchFamily="34" charset="-120"/>
+              </a:rPr>
+              <a:t> xử</a:t>
+            </a:r>
+            <a:r>
+              <a:rPr lang="en-US" sz="2700" dirty="0" spc="-1" kern="0">
+                <a:solidFill>
+                  <a:srgbClr val="14161C"/>
+                </a:solidFill>
+                <a:latin typeface="Be Vietnam Pro" pitchFamily="34" charset="0"/>
+                <a:ea typeface="Be Vietnam Pro" pitchFamily="34" charset="-122"/>
+                <a:cs typeface="Be Vietnam Pro" pitchFamily="34" charset="-120"/>
+              </a:rPr>
+              <a:t> lý</a:t>
             </a:r>
             <a:r>
               <a:rPr lang="en-US" sz="2700" dirty="0" spc="-2" kern="0">
@@ -14878,10 +14372,10 @@
                 <a:ea typeface="Be Vietnam Pro" pitchFamily="34" charset="-122"/>
                 <a:cs typeface="Be Vietnam Pro" pitchFamily="34" charset="-120"/>
               </a:rPr>
-              <a:t> viện</a:t>
-            </a:r>
-            <a:r>
-              <a:rPr lang="en-US" sz="2700" dirty="0" spc="-4" kern="0">
+              <a:t> ảnh</a:t>
+            </a:r>
+            <a:r>
+              <a:rPr lang="en-US" sz="2700" dirty="0" spc="-5" kern="0">
                 <a:solidFill>
                   <a:srgbClr val="14161C"/>
                 </a:solidFill>
@@ -14889,7 +14383,18 @@
                 <a:ea typeface="Be Vietnam Pro" pitchFamily="34" charset="-122"/>
                 <a:cs typeface="Be Vietnam Pro" pitchFamily="34" charset="-120"/>
               </a:rPr>
-              <a:t> nén</a:t>
+              <a:t> viết bằng</a:t>
+            </a:r>
+            <a:r>
+              <a:rPr lang="en-US" sz="2700" dirty="0" spc="-25" kern="0">
+                <a:solidFill>
+                  <a:srgbClr val="14161C"/>
+                </a:solidFill>
+                <a:latin typeface="Be Vietnam Pro" pitchFamily="34" charset="0"/>
+                <a:ea typeface="Be Vietnam Pro" pitchFamily="34" charset="-122"/>
+                <a:cs typeface="Be Vietnam Pro" pitchFamily="34" charset="-120"/>
+              </a:rPr>
+              <a:t> Rust,</a:t>
             </a:r>
             <a:r>
               <a:rPr lang="en-US" sz="2700" dirty="0" spc="-2" kern="0">
@@ -14900,10 +14405,10 @@
                 <a:ea typeface="Be Vietnam Pro" pitchFamily="34" charset="-122"/>
                 <a:cs typeface="Be Vietnam Pro" pitchFamily="34" charset="-120"/>
               </a:rPr>
-              <a:t> video</a:t>
-            </a:r>
-            <a:r>
-              <a:rPr lang="en-US" sz="2700" dirty="0" spc="-5" kern="0">
+              <a:t> muốn</a:t>
+            </a:r>
+            <a:r>
+              <a:rPr lang="en-US" sz="2700" dirty="0" spc="-15" kern="0">
                 <a:solidFill>
                   <a:srgbClr val="14161C"/>
                 </a:solidFill>
@@ -14911,10 +14416,10 @@
                 <a:ea typeface="Be Vietnam Pro" pitchFamily="34" charset="-122"/>
                 <a:cs typeface="Be Vietnam Pro" pitchFamily="34" charset="-120"/>
               </a:rPr>
-              <a:t> viết bằng</a:t>
-            </a:r>
-            <a:r>
-              <a:rPr lang="en-US" sz="2700" dirty="0" spc="3" kern="0">
+              <a:t> gọi</a:t>
+            </a:r>
+            <a:r>
+              <a:rPr lang="en-US" sz="2700" dirty="0" spc="-3" kern="0">
                 <a:solidFill>
                   <a:srgbClr val="14161C"/>
                 </a:solidFill>
@@ -14922,7 +14427,7 @@
                 <a:ea typeface="Be Vietnam Pro" pitchFamily="34" charset="-122"/>
                 <a:cs typeface="Be Vietnam Pro" pitchFamily="34" charset="-120"/>
               </a:rPr>
-              <a:t> C++,</a:t>
+              <a:t> nó</a:t>
             </a:r>
             <a:r>
               <a:rPr lang="en-US" sz="2700" dirty="0" spc="-1" kern="0">
@@ -14933,10 +14438,10 @@
                 <a:ea typeface="Be Vietnam Pro" pitchFamily="34" charset="-122"/>
                 <a:cs typeface="Be Vietnam Pro" pitchFamily="34" charset="-120"/>
               </a:rPr>
-              <a:t> muốn</a:t>
-            </a:r>
-            <a:r>
-              <a:rPr lang="en-US" sz="2700" dirty="0" spc="-3" kern="0">
+              <a:t> từ</a:t>
+            </a:r>
+            <a:r>
+              <a:rPr lang="en-US" sz="2700" dirty="0" spc="-20" kern="0">
                 <a:solidFill>
                   <a:srgbClr val="14161C"/>
                 </a:solidFill>
@@ -14944,18 +14449,7 @@
                 <a:ea typeface="Be Vietnam Pro" pitchFamily="34" charset="-122"/>
                 <a:cs typeface="Be Vietnam Pro" pitchFamily="34" charset="-120"/>
               </a:rPr>
-              <a:t> dùng</a:t>
-            </a:r>
-            <a:r>
-              <a:rPr lang="en-US" sz="2700" dirty="0" spc="-20" kern="0">
-                <a:solidFill>
-                  <a:srgbClr val="14161C"/>
-                </a:solidFill>
-                <a:latin typeface="Be Vietnam Pro" pitchFamily="34" charset="0"/>
-                <a:ea typeface="Be Vietnam Pro" pitchFamily="34" charset="-122"/>
-                <a:cs typeface="Be Vietnam Pro" pitchFamily="34" charset="-120"/>
-              </a:rPr>
-              <a:t> trong trang</a:t>
+              <a:t> trang</a:t>
             </a:r>
             <a:r>
               <a:rPr lang="en-US" sz="2700" dirty="0" spc="-11" kern="0">
@@ -15222,7 +14716,7 @@
               <a:buNone/>
             </a:pPr>
             <a:r>
-              <a:rPr lang="en-US" sz="2850" b="1" dirty="0" spc="-9" kern="0">
+              <a:rPr lang="en-US" sz="2850" b="1" dirty="0" spc="-3" kern="0">
                 <a:solidFill>
                   <a:srgbClr val="14161C"/>
                 </a:solidFill>
@@ -15230,10 +14724,10 @@
                 <a:ea typeface="Be Vietnam Pro" pitchFamily="34" charset="-122"/>
                 <a:cs typeface="Be Vietnam Pro" pitchFamily="34" charset="-120"/>
               </a:rPr>
-              <a:t>Không</a:t>
-            </a:r>
-            <a:r>
-              <a:rPr lang="en-US" sz="2850" b="1" dirty="0" spc="-7" kern="0">
+              <a:t>Biên</a:t>
+            </a:r>
+            <a:r>
+              <a:rPr lang="en-US" sz="2850" b="1" dirty="0" spc="2" kern="0">
                 <a:solidFill>
                   <a:srgbClr val="14161C"/>
                 </a:solidFill>
@@ -15241,10 +14735,10 @@
                 <a:ea typeface="Be Vietnam Pro" pitchFamily="34" charset="-122"/>
                 <a:cs typeface="Be Vietnam Pro" pitchFamily="34" charset="-120"/>
               </a:rPr>
-              <a:t> nhất</a:t>
-            </a:r>
-            <a:r>
-              <a:rPr lang="en-US" sz="2850" b="1" dirty="0" spc="-4" kern="0">
+              <a:t> dịch</a:t>
+            </a:r>
+            <a:r>
+              <a:rPr lang="en-US" sz="2850" b="1" dirty="0" spc="-21" kern="0">
                 <a:solidFill>
                   <a:srgbClr val="14161C"/>
                 </a:solidFill>
@@ -15252,10 +14746,10 @@
                 <a:ea typeface="Be Vietnam Pro" pitchFamily="34" charset="-122"/>
                 <a:cs typeface="Be Vietnam Pro" pitchFamily="34" charset="-120"/>
               </a:rPr>
-              <a:t> thiết</a:t>
-            </a:r>
-            <a:r>
-              <a:rPr lang="en-US" sz="2850" b="1" dirty="0" spc="-3" kern="0">
+              <a:t> ra</a:t>
+            </a:r>
+            <a:r>
+              <a:rPr lang="en-US" sz="2850" b="1" dirty="0" spc="-55" kern="0">
                 <a:solidFill>
                   <a:srgbClr val="14161C"/>
                 </a:solidFill>
@@ -15263,18 +14757,7 @@
                 <a:ea typeface="Be Vietnam Pro" pitchFamily="34" charset="-122"/>
                 <a:cs typeface="Be Vietnam Pro" pitchFamily="34" charset="-120"/>
               </a:rPr>
-              <a:t> viết</a:t>
-            </a:r>
-            <a:r>
-              <a:rPr lang="en-US" sz="2850" b="1" dirty="0" spc="0" kern="0">
-                <a:solidFill>
-                  <a:srgbClr val="14161C"/>
-                </a:solidFill>
-                <a:latin typeface="Be Vietnam Pro" pitchFamily="34" charset="0"/>
-                <a:ea typeface="Be Vietnam Pro" pitchFamily="34" charset="-122"/>
-                <a:cs typeface="Be Vietnam Pro" pitchFamily="34" charset="-120"/>
-              </a:rPr>
-              <a:t> lại</a:t>
+              <a:t> WASM</a:t>
             </a:r>
             <a:endParaRPr lang="en-US" sz="2850" dirty="0"/>
           </a:p>
@@ -15305,7 +14788,7 @@
               <a:buNone/>
             </a:pPr>
             <a:r>
-              <a:rPr lang="en-US" sz="2250" dirty="0" spc="-1" kern="0">
+              <a:rPr lang="en-US" sz="2250" dirty="0" spc="-4" kern="0">
                 <a:solidFill>
                   <a:srgbClr val="1F3FD1"/>
                 </a:solidFill>
@@ -15313,10 +14796,10 @@
                 <a:ea typeface="Be Vietnam Pro" pitchFamily="34" charset="-122"/>
                 <a:cs typeface="Be Vietnam Pro" pitchFamily="34" charset="-120"/>
               </a:rPr>
-              <a:t>biên</a:t>
-            </a:r>
-            <a:r>
-              <a:rPr lang="en-US" sz="2250" dirty="0" spc="2" kern="0">
+              <a:t>bằng</a:t>
+            </a:r>
+            <a:r>
+              <a:rPr lang="en-US" sz="2250" dirty="0" spc="1" kern="0">
                 <a:solidFill>
                   <a:srgbClr val="1F3FD1"/>
                 </a:solidFill>
@@ -15324,10 +14807,10 @@
                 <a:ea typeface="Be Vietnam Pro" pitchFamily="34" charset="-122"/>
                 <a:cs typeface="Be Vietnam Pro" pitchFamily="34" charset="-120"/>
               </a:rPr>
-              <a:t> dịch</a:t>
-            </a:r>
-            <a:r>
-              <a:rPr lang="en-US" sz="2250" dirty="0" spc="-33" kern="0">
+              <a:t> chuỗi</a:t>
+            </a:r>
+            <a:r>
+              <a:rPr lang="en-US" sz="2250" dirty="0" spc="3" kern="0">
                 <a:solidFill>
                   <a:srgbClr val="1F3FD1"/>
                 </a:solidFill>
@@ -15335,10 +14818,10 @@
                 <a:ea typeface="Be Vietnam Pro" pitchFamily="34" charset="-122"/>
                 <a:cs typeface="Be Vietnam Pro" pitchFamily="34" charset="-120"/>
               </a:rPr>
-              <a:t> ra</a:t>
-            </a:r>
-            <a:r>
-              <a:rPr lang="en-US" sz="2250" dirty="0" spc="2" kern="0">
+              <a:t> công</a:t>
+            </a:r>
+            <a:r>
+              <a:rPr lang="en-US" sz="2250" dirty="0" spc="4" kern="0">
                 <a:solidFill>
                   <a:srgbClr val="1F3FD1"/>
                 </a:solidFill>
@@ -15346,10 +14829,10 @@
                 <a:ea typeface="Be Vietnam Pro" pitchFamily="34" charset="-122"/>
                 <a:cs typeface="Be Vietnam Pro" pitchFamily="34" charset="-120"/>
               </a:rPr>
-              <a:t> mô-đun</a:t>
-            </a:r>
-            <a:r>
-              <a:rPr lang="en-US" sz="2250" dirty="0" spc="-48" kern="0">
+              <a:t> cụ</a:t>
+            </a:r>
+            <a:r>
+              <a:rPr lang="en-US" sz="2250" dirty="0" spc="-24" kern="0">
                 <a:solidFill>
                   <a:srgbClr val="1F3FD1"/>
                 </a:solidFill>
@@ -15357,7 +14840,7 @@
                 <a:ea typeface="Be Vietnam Pro" pitchFamily="34" charset="-122"/>
                 <a:cs typeface="Be Vietnam Pro" pitchFamily="34" charset="-120"/>
               </a:rPr>
-              <a:t> WASM</a:t>
+              <a:t> Rust</a:t>
             </a:r>
             <a:endParaRPr lang="en-US" sz="2250" dirty="0"/>
           </a:p>
@@ -15514,7 +14997,7 @@
               <a:buNone/>
             </a:pPr>
             <a:r>
-              <a:rPr lang="en-US" sz="2850" b="1" dirty="0" spc="-90" kern="0">
+              <a:rPr lang="en-US" sz="2850" b="1" dirty="0" spc="-2" kern="0">
                 <a:solidFill>
                   <a:srgbClr val="14161C"/>
                 </a:solidFill>
@@ -15522,7 +15005,18 @@
                 <a:ea typeface="Be Vietnam Pro" pitchFamily="34" charset="-122"/>
                 <a:cs typeface="Be Vietnam Pro" pitchFamily="34" charset="-120"/>
               </a:rPr>
-              <a:t>Tải</a:t>
+              <a:t>Nạp</a:t>
+            </a:r>
+            <a:r>
+              <a:rPr lang="en-US" sz="2850" b="1" dirty="0" spc="-20" kern="0">
+                <a:solidFill>
+                  <a:srgbClr val="14161C"/>
+                </a:solidFill>
+                <a:latin typeface="Be Vietnam Pro" pitchFamily="34" charset="0"/>
+                <a:ea typeface="Be Vietnam Pro" pitchFamily="34" charset="-122"/>
+                <a:cs typeface="Be Vietnam Pro" pitchFamily="34" charset="-120"/>
+              </a:rPr>
+              <a:t> và</a:t>
             </a:r>
             <a:r>
               <a:rPr lang="en-US" sz="2850" b="1" dirty="0" spc="0" kern="0">
@@ -15533,10 +15027,10 @@
                 <a:ea typeface="Be Vietnam Pro" pitchFamily="34" charset="-122"/>
                 <a:cs typeface="Be Vietnam Pro" pitchFamily="34" charset="-120"/>
               </a:rPr>
-              <a:t> cùng</a:t>
-            </a:r>
-            <a:r>
-              <a:rPr lang="en-US" sz="2850" b="1" dirty="0" spc="-9" kern="0">
+              <a:t> tạo</a:t>
+            </a:r>
+            <a:r>
+              <a:rPr lang="en-US" sz="2850" b="1" dirty="0" spc="-6" kern="0">
                 <a:solidFill>
                   <a:srgbClr val="14161C"/>
                 </a:solidFill>
@@ -15544,7 +15038,7 @@
                 <a:ea typeface="Be Vietnam Pro" pitchFamily="34" charset="-122"/>
                 <a:cs typeface="Be Vietnam Pro" pitchFamily="34" charset="-120"/>
               </a:rPr>
-              <a:t> JavaScript</a:t>
+              <a:t> Instance</a:t>
             </a:r>
             <a:endParaRPr lang="en-US" sz="2850" dirty="0"/>
           </a:p>
@@ -15575,7 +15069,7 @@
               <a:buNone/>
             </a:pPr>
             <a:r>
-              <a:rPr lang="en-US" sz="2250" dirty="0" spc="-8" kern="0">
+              <a:rPr lang="en-US" sz="2250" dirty="0" spc="-32" kern="0">
                 <a:solidFill>
                   <a:srgbClr val="B45309"/>
                 </a:solidFill>
@@ -15583,10 +15077,10 @@
                 <a:ea typeface="Be Vietnam Pro" pitchFamily="34" charset="-122"/>
                 <a:cs typeface="Be Vietnam Pro" pitchFamily="34" charset="-120"/>
               </a:rPr>
-              <a:t>JavaScript</a:t>
-            </a:r>
-            <a:r>
-              <a:rPr lang="en-US" sz="2250" dirty="0" spc="-12" kern="0">
+              <a:t>rồi</a:t>
+            </a:r>
+            <a:r>
+              <a:rPr lang="en-US" sz="2250" dirty="0" spc="-11" kern="0">
                 <a:solidFill>
                   <a:srgbClr val="B45309"/>
                 </a:solidFill>
@@ -15597,7 +15091,7 @@
               <a:t> gọi</a:t>
             </a:r>
             <a:r>
-              <a:rPr lang="en-US" sz="2250" dirty="0" spc="2" kern="0">
+              <a:rPr lang="en-US" sz="2250" dirty="0" spc="-2" kern="0">
                 <a:solidFill>
                   <a:srgbClr val="B45309"/>
                 </a:solidFill>
@@ -15605,10 +15099,10 @@
                 <a:ea typeface="Be Vietnam Pro" pitchFamily="34" charset="-122"/>
                 <a:cs typeface="Be Vietnam Pro" pitchFamily="34" charset="-120"/>
               </a:rPr>
-              <a:t> các</a:t>
-            </a:r>
-            <a:r>
-              <a:rPr lang="en-US" sz="2250" dirty="0" spc="-2" kern="0">
+              <a:t> hàm</a:t>
+            </a:r>
+            <a:r>
+              <a:rPr lang="en-US" sz="2250" dirty="0" spc="1" kern="0">
                 <a:solidFill>
                   <a:srgbClr val="B45309"/>
                 </a:solidFill>
@@ -15616,10 +15110,21 @@
                 <a:ea typeface="Be Vietnam Pro" pitchFamily="34" charset="-122"/>
                 <a:cs typeface="Be Vietnam Pro" pitchFamily="34" charset="-120"/>
               </a:rPr>
+              <a:t> như</a:t>
+            </a:r>
+            <a:r>
+              <a:rPr lang="en-US" sz="2250" dirty="0" spc="-1" kern="0">
+                <a:solidFill>
+                  <a:srgbClr val="B45309"/>
+                </a:solidFill>
+                <a:latin typeface="Be Vietnam Pro" pitchFamily="34" charset="0"/>
+                <a:ea typeface="Be Vietnam Pro" pitchFamily="34" charset="-122"/>
+                <a:cs typeface="Be Vietnam Pro" pitchFamily="34" charset="-120"/>
+              </a:rPr>
               <a:t> hàm</a:t>
             </a:r>
             <a:r>
-              <a:rPr lang="en-US" sz="2250" dirty="0" spc="2" kern="0">
+              <a:rPr lang="en-US" sz="2250" dirty="0" spc="-7" kern="0">
                 <a:solidFill>
                   <a:srgbClr val="B45309"/>
                 </a:solidFill>
@@ -15627,7 +15132,7 @@
                 <a:ea typeface="Be Vietnam Pro" pitchFamily="34" charset="-122"/>
                 <a:cs typeface="Be Vietnam Pro" pitchFamily="34" charset="-120"/>
               </a:rPr>
-              <a:t> của mô-đun</a:t>
+              <a:t> JavaScript</a:t>
             </a:r>
             <a:endParaRPr lang="en-US" sz="2250" dirty="0"/>
           </a:p>
@@ -16341,10 +15846,10 @@
                 <a:ea typeface="Be Vietnam Pro" pitchFamily="34" charset="-122"/>
                 <a:cs typeface="Be Vietnam Pro" pitchFamily="34" charset="-120"/>
               </a:rPr>
-              <a:t> Họ có phải</a:t>
-            </a:r>
-            <a:r>
-              <a:rPr lang="en-US" sz="2700" dirty="0" spc="-5" kern="0">
+              <a:t> Họ cần làm</a:t>
+            </a:r>
+            <a:r>
+              <a:rPr lang="en-US" sz="2700" dirty="0" spc="16" kern="0">
                 <a:solidFill>
                   <a:srgbClr val="14161C"/>
                 </a:solidFill>
@@ -16352,10 +15857,10 @@
                 <a:ea typeface="Be Vietnam Pro" pitchFamily="34" charset="-122"/>
                 <a:cs typeface="Be Vietnam Pro" pitchFamily="34" charset="-120"/>
               </a:rPr>
-              <a:t> viết</a:t>
-            </a:r>
-            <a:r>
-              <a:rPr lang="en-US" sz="2700" dirty="0" spc="-1" kern="0">
+              <a:t> những</a:t>
+            </a:r>
+            <a:r>
+              <a:rPr lang="en-US" sz="2700" dirty="0" spc="8" kern="0">
                 <a:solidFill>
                   <a:srgbClr val="14161C"/>
                 </a:solidFill>
@@ -16363,10 +15868,10 @@
                 <a:ea typeface="Be Vietnam Pro" pitchFamily="34" charset="-122"/>
                 <a:cs typeface="Be Vietnam Pro" pitchFamily="34" charset="-120"/>
               </a:rPr>
-              <a:t> lại</a:t>
-            </a:r>
-            <a:r>
-              <a:rPr lang="en-US" sz="2700" dirty="0" spc="-4" kern="0">
+              <a:t> bước</a:t>
+            </a:r>
+            <a:r>
+              <a:rPr lang="en-US" sz="2700" dirty="0" spc="-3" kern="0">
                 <a:solidFill>
                   <a:srgbClr val="14161C"/>
                 </a:solidFill>
@@ -16374,10 +15879,10 @@
                 <a:ea typeface="Be Vietnam Pro" pitchFamily="34" charset="-122"/>
                 <a:cs typeface="Be Vietnam Pro" pitchFamily="34" charset="-120"/>
               </a:rPr>
-              <a:t> bằng</a:t>
-            </a:r>
-            <a:r>
-              <a:rPr lang="en-US" sz="2700" dirty="0" spc="-7" kern="0">
+              <a:t> nào</a:t>
+            </a:r>
+            <a:r>
+              <a:rPr lang="en-US" sz="2700" dirty="0" spc="15" kern="0">
                 <a:solidFill>
                   <a:srgbClr val="14161C"/>
                 </a:solidFill>
@@ -16385,7 +15890,29 @@
                 <a:ea typeface="Be Vietnam Pro" pitchFamily="34" charset="-122"/>
                 <a:cs typeface="Be Vietnam Pro" pitchFamily="34" charset="-120"/>
               </a:rPr>
-              <a:t> JavaScript</a:t>
+              <a:t> để</a:t>
+            </a:r>
+            <a:r>
+              <a:rPr lang="en-US" sz="2700" dirty="0" spc="-15" kern="0">
+                <a:solidFill>
+                  <a:srgbClr val="14161C"/>
+                </a:solidFill>
+                <a:latin typeface="Be Vietnam Pro" pitchFamily="34" charset="0"/>
+                <a:ea typeface="Be Vietnam Pro" pitchFamily="34" charset="-122"/>
+                <a:cs typeface="Be Vietnam Pro" pitchFamily="34" charset="-120"/>
+              </a:rPr>
+              <a:t> gọi</a:t>
+            </a:r>
+            <a:r>
+              <a:rPr lang="en-US" sz="2700" dirty="0" spc="9" kern="0">
+                <a:solidFill>
+                  <a:srgbClr val="14161C"/>
+                </a:solidFill>
+                <a:latin typeface="Be Vietnam Pro" pitchFamily="34" charset="0"/>
+                <a:ea typeface="Be Vietnam Pro" pitchFamily="34" charset="-122"/>
+                <a:cs typeface="Be Vietnam Pro" pitchFamily="34" charset="-120"/>
+              </a:rPr>
+              <a:t> được</a:t>
             </a:r>
             <a:r>
               <a:rPr lang="en-US" sz="2700" dirty="0" spc="-2" kern="0">
@@ -16396,7 +15923,29 @@
                 <a:ea typeface="Be Vietnam Pro" pitchFamily="34" charset="-122"/>
                 <a:cs typeface="Be Vietnam Pro" pitchFamily="34" charset="-120"/>
               </a:rPr>
-              <a:t> không?</a:t>
+              <a:t> hàm</a:t>
+            </a:r>
+            <a:r>
+              <a:rPr lang="en-US" sz="2700" dirty="0" spc="14" kern="0">
+                <a:solidFill>
+                  <a:srgbClr val="14161C"/>
+                </a:solidFill>
+                <a:latin typeface="Be Vietnam Pro" pitchFamily="34" charset="0"/>
+                <a:ea typeface="Be Vietnam Pro" pitchFamily="34" charset="-122"/>
+                <a:cs typeface="Be Vietnam Pro" pitchFamily="34" charset="-120"/>
+              </a:rPr>
+              <a:t> đầu</a:t>
+            </a:r>
+            <a:r>
+              <a:rPr lang="en-US" sz="2700" dirty="0" spc="-2" kern="0">
+                <a:solidFill>
+                  <a:srgbClr val="14161C"/>
+                </a:solidFill>
+                <a:latin typeface="Be Vietnam Pro" pitchFamily="34" charset="0"/>
+                <a:ea typeface="Be Vietnam Pro" pitchFamily="34" charset="-122"/>
+                <a:cs typeface="Be Vietnam Pro" pitchFamily="34" charset="-120"/>
+              </a:rPr>
+              <a:t> tiên?</a:t>
             </a:r>
             <a:endParaRPr lang="en-US" sz="2700" dirty="0"/>
           </a:p>
@@ -16456,7 +16005,7 @@
               <a:buNone/>
             </a:pPr>
             <a:r>
-              <a:rPr lang="en-US" sz="2700" dirty="0" spc="-51" kern="0">
+              <a:rPr lang="en-US" sz="2700" dirty="0" spc="-1" kern="0">
                 <a:solidFill>
                   <a:srgbClr val="14161C"/>
                 </a:solidFill>
@@ -16464,7 +16013,18 @@
                 <a:ea typeface="Be Vietnam Pro" pitchFamily="34" charset="-122"/>
                 <a:cs typeface="Be Vietnam Pro" pitchFamily="34" charset="-120"/>
               </a:rPr>
-              <a:t> Trang</a:t>
+              <a:t> Hàm</a:t>
+            </a:r>
+            <a:r>
+              <a:rPr lang="en-US" sz="2700" dirty="0" spc="16" kern="0">
+                <a:solidFill>
+                  <a:srgbClr val="14161C"/>
+                </a:solidFill>
+                <a:latin typeface="Be Vietnam Pro" pitchFamily="34" charset="0"/>
+                <a:ea typeface="Be Vietnam Pro" pitchFamily="34" charset="-122"/>
+                <a:cs typeface="Be Vietnam Pro" pitchFamily="34" charset="-120"/>
+              </a:rPr>
+              <a:t> đó</a:t>
             </a:r>
             <a:r>
               <a:rPr lang="en-US" sz="2700" dirty="0" spc="-1" kern="0">
@@ -16475,7 +16035,7 @@
                 <a:ea typeface="Be Vietnam Pro" pitchFamily="34" charset="-122"/>
                 <a:cs typeface="Be Vietnam Pro" pitchFamily="34" charset="-120"/>
               </a:rPr>
-              <a:t> cần</a:t>
+              <a:t> phải</a:t>
             </a:r>
             <a:r>
               <a:rPr lang="en-US" sz="2700" dirty="0" spc="0" kern="0">
@@ -16500,6 +16060,61 @@
               <a:t> nhật</a:t>
             </a:r>
             <a:r>
+              <a:rPr lang="en-US" sz="2700" dirty="0" spc="-8" kern="0">
+                <a:solidFill>
+                  <a:srgbClr val="14161C"/>
+                </a:solidFill>
+                <a:latin typeface="Be Vietnam Pro" pitchFamily="34" charset="0"/>
+                <a:ea typeface="Be Vietnam Pro" pitchFamily="34" charset="-122"/>
+                <a:cs typeface="Be Vietnam Pro" pitchFamily="34" charset="-120"/>
+              </a:rPr>
+              <a:t> một</a:t>
+            </a:r>
+            <a:r>
+              <a:rPr lang="en-US" sz="2700" dirty="0" spc="-1" kern="0">
+                <a:solidFill>
+                  <a:srgbClr val="14161C"/>
+                </a:solidFill>
+                <a:latin typeface="Be Vietnam Pro" pitchFamily="34" charset="0"/>
+                <a:ea typeface="Be Vietnam Pro" pitchFamily="34" charset="-122"/>
+                <a:cs typeface="Be Vietnam Pro" pitchFamily="34" charset="-120"/>
+              </a:rPr>
+              <a:t> phần</a:t>
+            </a:r>
+            <a:r>
+              <a:rPr lang="en-US" sz="2700" dirty="0" spc="-2" kern="0">
+                <a:solidFill>
+                  <a:srgbClr val="14161C"/>
+                </a:solidFill>
+                <a:latin typeface="Be Vietnam Pro" pitchFamily="34" charset="0"/>
+                <a:ea typeface="Be Vietnam Pro" pitchFamily="34" charset="-122"/>
+                <a:cs typeface="Be Vietnam Pro" pitchFamily="34" charset="-120"/>
+              </a:rPr>
+              <a:t> tử</a:t>
+            </a:r>
+            <a:r>
+              <a:rPr lang="en-US" sz="2700" dirty="0" spc="-17" kern="0">
+                <a:solidFill>
+                  <a:srgbClr val="14161C"/>
+                </a:solidFill>
+                <a:latin typeface="Be Vietnam Pro" pitchFamily="34" charset="0"/>
+                <a:ea typeface="Be Vietnam Pro" pitchFamily="34" charset="-122"/>
+                <a:cs typeface="Be Vietnam Pro" pitchFamily="34" charset="-120"/>
+              </a:rPr>
+              <a:t> trang:</a:t>
+            </a:r>
+            <a:r>
+              <a:rPr lang="en-US" sz="2700" dirty="0" spc="-2" kern="0">
+                <a:solidFill>
+                  <a:srgbClr val="14161C"/>
+                </a:solidFill>
+                <a:latin typeface="Be Vietnam Pro" pitchFamily="34" charset="0"/>
+                <a:ea typeface="Be Vietnam Pro" pitchFamily="34" charset="-122"/>
+                <a:cs typeface="Be Vietnam Pro" pitchFamily="34" charset="-120"/>
+              </a:rPr>
+              <a:t> mã</a:t>
+            </a:r>
+            <a:r>
               <a:rPr lang="en-US" sz="2700" dirty="0" spc="-3" kern="0">
                 <a:solidFill>
                   <a:srgbClr val="14161C"/>
@@ -16508,7 +16123,7 @@
                 <a:ea typeface="Be Vietnam Pro" pitchFamily="34" charset="-122"/>
                 <a:cs typeface="Be Vietnam Pro" pitchFamily="34" charset="-120"/>
               </a:rPr>
-              <a:t> giao</a:t>
+              <a:t> nào</a:t>
             </a:r>
             <a:r>
               <a:rPr lang="en-US" sz="2700" dirty="0" spc="-1" kern="0">
@@ -16519,62 +16134,7 @@
                 <a:ea typeface="Be Vietnam Pro" pitchFamily="34" charset="-122"/>
                 <a:cs typeface="Be Vietnam Pro" pitchFamily="34" charset="-120"/>
               </a:rPr>
-              <a:t> diện,</a:t>
-            </a:r>
-            <a:r>
-              <a:rPr lang="en-US" sz="2700" dirty="0" spc="-2" kern="0">
-                <a:solidFill>
-                  <a:srgbClr val="14161C"/>
-                </a:solidFill>
-                <a:latin typeface="Be Vietnam Pro" pitchFamily="34" charset="0"/>
-                <a:ea typeface="Be Vietnam Pro" pitchFamily="34" charset="-122"/>
-                <a:cs typeface="Be Vietnam Pro" pitchFamily="34" charset="-120"/>
-              </a:rPr>
-              <a:t> mã</a:t>
-            </a:r>
-            <a:r>
-              <a:rPr lang="en-US" sz="2700" dirty="0" spc="-3" kern="0">
-                <a:solidFill>
-                  <a:srgbClr val="14161C"/>
-                </a:solidFill>
-                <a:latin typeface="Be Vietnam Pro" pitchFamily="34" charset="0"/>
-                <a:ea typeface="Be Vietnam Pro" pitchFamily="34" charset="-122"/>
-                <a:cs typeface="Be Vietnam Pro" pitchFamily="34" charset="-120"/>
-              </a:rPr>
-              <a:t> nào</a:t>
-            </a:r>
-            <a:r>
-              <a:rPr lang="en-US" sz="2700" dirty="0" spc="-1" kern="0">
-                <a:solidFill>
-                  <a:srgbClr val="14161C"/>
-                </a:solidFill>
-                <a:latin typeface="Be Vietnam Pro" pitchFamily="34" charset="0"/>
-                <a:ea typeface="Be Vietnam Pro" pitchFamily="34" charset="-122"/>
-                <a:cs typeface="Be Vietnam Pro" pitchFamily="34" charset="-120"/>
-              </a:rPr>
-              <a:t> làm</a:t>
-            </a:r>
-            <a:r>
-              <a:rPr lang="en-US" sz="2700" dirty="0" spc="-2" kern="0">
-                <a:solidFill>
-                  <a:srgbClr val="14161C"/>
-                </a:solidFill>
-                <a:latin typeface="Be Vietnam Pro" pitchFamily="34" charset="0"/>
-                <a:ea typeface="Be Vietnam Pro" pitchFamily="34" charset="-122"/>
-                <a:cs typeface="Be Vietnam Pro" pitchFamily="34" charset="-120"/>
-              </a:rPr>
-              <a:t> việc</a:t>
-            </a:r>
-            <a:r>
-              <a:rPr lang="en-US" sz="2700" dirty="0" spc="11" kern="0">
-                <a:solidFill>
-                  <a:srgbClr val="14161C"/>
-                </a:solidFill>
-                <a:latin typeface="Be Vietnam Pro" pitchFamily="34" charset="0"/>
-                <a:ea typeface="Be Vietnam Pro" pitchFamily="34" charset="-122"/>
-                <a:cs typeface="Be Vietnam Pro" pitchFamily="34" charset="-120"/>
-              </a:rPr>
-              <a:t> đó?</a:t>
+              <a:t> làm?</a:t>
             </a:r>
             <a:endParaRPr lang="en-US" sz="2700" dirty="0"/>
           </a:p>
@@ -16925,6 +16485,28 @@
               <a:t>ByteByteGo</a:t>
             </a:r>
             <a:r>
+              <a:rPr lang="en-US" sz="2550" dirty="0" spc="-1" kern="0">
+                <a:solidFill>
+                  <a:srgbClr val="F3EEE3"/>
+                </a:solidFill>
+                <a:latin typeface="Be Vietnam Pro" pitchFamily="34" charset="0"/>
+                <a:ea typeface="Be Vietnam Pro" pitchFamily="34" charset="-122"/>
+                <a:cs typeface="Be Vietnam Pro" pitchFamily="34" charset="-120"/>
+              </a:rPr>
+              <a:t> ·</a:t>
+            </a:r>
+            <a:r>
+              <a:rPr lang="en-US" sz="2550" dirty="0" spc="1" kern="0">
+                <a:solidFill>
+                  <a:srgbClr val="F3EEE3"/>
+                </a:solidFill>
+                <a:latin typeface="Be Vietnam Pro" pitchFamily="34" charset="0"/>
+                <a:ea typeface="Be Vietnam Pro" pitchFamily="34" charset="-122"/>
+                <a:cs typeface="Be Vietnam Pro" pitchFamily="34" charset="-120"/>
+              </a:rPr>
+              <a:t> chỉ</a:t>
+            </a:r>
+            <a:r>
               <a:rPr lang="en-US" sz="2550" dirty="0" spc="-10" kern="0">
                 <a:solidFill>
                   <a:srgbClr val="F3EEE3"/>
@@ -16933,7 +16515,29 @@
                 <a:ea typeface="Be Vietnam Pro" pitchFamily="34" charset="-122"/>
                 <a:cs typeface="Be Vietnam Pro" pitchFamily="34" charset="-120"/>
               </a:rPr>
-              <a:t> system-design-101</a:t>
+              <a:t> lấy</a:t>
+            </a:r>
+            <a:r>
+              <a:rPr lang="en-US" sz="2550" dirty="0" spc="-1" kern="0">
+                <a:solidFill>
+                  <a:srgbClr val="F3EEE3"/>
+                </a:solidFill>
+                <a:latin typeface="Be Vietnam Pro" pitchFamily="34" charset="0"/>
+                <a:ea typeface="Be Vietnam Pro" pitchFamily="34" charset="-122"/>
+                <a:cs typeface="Be Vietnam Pro" pitchFamily="34" charset="-120"/>
+              </a:rPr>
+              <a:t> chủ</a:t>
+            </a:r>
+            <a:r>
+              <a:rPr lang="en-US" sz="2550" dirty="0" spc="17" kern="0">
+                <a:solidFill>
+                  <a:srgbClr val="F3EEE3"/>
+                </a:solidFill>
+                <a:latin typeface="Be Vietnam Pro" pitchFamily="34" charset="0"/>
+                <a:ea typeface="Be Vietnam Pro" pitchFamily="34" charset="-122"/>
+                <a:cs typeface="Be Vietnam Pro" pitchFamily="34" charset="-120"/>
+              </a:rPr>
+              <a:t> đề</a:t>
             </a:r>
             <a:endParaRPr lang="en-US" sz="2550" dirty="0"/>
           </a:p>
@@ -17022,7 +16626,7 @@
               <a:buNone/>
             </a:pPr>
             <a:r>
-              <a:rPr lang="en-US" sz="2100" dirty="0" spc="-3" kern="0">
+              <a:rPr lang="en-US" sz="2100" dirty="0" spc="0" kern="0">
                 <a:solidFill>
                   <a:srgbClr val="FF6A4D"/>
                 </a:solidFill>
@@ -17030,10 +16634,10 @@
                 <a:ea typeface="Be Vietnam Pro" pitchFamily="34" charset="-122"/>
                 <a:cs typeface="Be Vietnam Pro" pitchFamily="34" charset="-120"/>
               </a:rPr>
-              <a:t>Ý</a:t>
-            </a:r>
-            <a:r>
-              <a:rPr lang="en-US" sz="2100" dirty="0" spc="-15" kern="0">
+              <a:t>Nhận</a:t>
+            </a:r>
+            <a:r>
+              <a:rPr lang="en-US" sz="2100" dirty="0" spc="18" kern="0">
                 <a:solidFill>
                   <a:srgbClr val="FF6A4D"/>
                 </a:solidFill>
@@ -17041,6 +16645,17 @@
                 <a:ea typeface="Be Vietnam Pro" pitchFamily="34" charset="-122"/>
                 <a:cs typeface="Be Vietnam Pro" pitchFamily="34" charset="-120"/>
               </a:rPr>
+              <a:t> định</a:t>
+            </a:r>
+            <a:r>
+              <a:rPr lang="en-US" sz="2100" dirty="0" spc="-16" kern="0">
+                <a:solidFill>
+                  <a:srgbClr val="FF6A4D"/>
+                </a:solidFill>
+                <a:latin typeface="Be Vietnam Pro" pitchFamily="34" charset="0"/>
+                <a:ea typeface="Be Vietnam Pro" pitchFamily="34" charset="-122"/>
+                <a:cs typeface="Be Vietnam Pro" pitchFamily="34" charset="-120"/>
+              </a:rPr>
               <a:t> về</a:t>
             </a:r>
             <a:r>
@@ -17055,7 +16670,7 @@
               <a:t> serverless</a:t>
             </a:r>
             <a:r>
-              <a:rPr lang="en-US" sz="2100" dirty="0" spc="-18" kern="0">
+              <a:rPr lang="en-US" sz="2100" dirty="0" spc="-1" kern="0">
                 <a:solidFill>
                   <a:srgbClr val="FF6A4D"/>
                 </a:solidFill>
@@ -17063,7 +16678,29 @@
                 <a:ea typeface="Be Vietnam Pro" pitchFamily="34" charset="-122"/>
                 <a:cs typeface="Be Vietnam Pro" pitchFamily="34" charset="-120"/>
               </a:rPr>
-              <a:t> và</a:t>
+              <a:t> của</a:t>
+            </a:r>
+            <a:r>
+              <a:rPr lang="en-US" sz="2100" dirty="0" spc="-5" kern="0">
+                <a:solidFill>
+                  <a:srgbClr val="FF6A4D"/>
+                </a:solidFill>
+                <a:latin typeface="Be Vietnam Pro" pitchFamily="34" charset="0"/>
+                <a:ea typeface="Be Vietnam Pro" pitchFamily="34" charset="-122"/>
+                <a:cs typeface="Be Vietnam Pro" pitchFamily="34" charset="-120"/>
+              </a:rPr>
+              <a:t> bài</a:t>
+            </a:r>
+            <a:r>
+              <a:rPr lang="en-US" sz="2100" dirty="0" spc="0" kern="0">
+                <a:solidFill>
+                  <a:srgbClr val="FF6A4D"/>
+                </a:solidFill>
+                <a:latin typeface="Be Vietnam Pro" pitchFamily="34" charset="0"/>
+                <a:ea typeface="Be Vietnam Pro" pitchFamily="34" charset="-122"/>
+                <a:cs typeface="Be Vietnam Pro" pitchFamily="34" charset="-120"/>
+              </a:rPr>
+              <a:t> nguồn</a:t>
             </a:r>
             <a:r>
               <a:rPr lang="en-US" sz="2100" dirty="0" spc="-1" kern="0">
@@ -17074,10 +16711,10 @@
                 <a:ea typeface="Be Vietnam Pro" pitchFamily="34" charset="-122"/>
                 <a:cs typeface="Be Vietnam Pro" pitchFamily="34" charset="-120"/>
               </a:rPr>
-              <a:t> khởi</a:t>
-            </a:r>
-            <a:r>
-              <a:rPr lang="en-US" sz="2100" dirty="0" spc="8" kern="0">
+              <a:t> không</a:t>
+            </a:r>
+            <a:r>
+              <a:rPr lang="en-US" sz="2100" dirty="0" spc="4" kern="0">
                 <a:solidFill>
                   <a:srgbClr val="FF6A4D"/>
                 </a:solidFill>
@@ -17085,10 +16722,10 @@
                 <a:ea typeface="Be Vietnam Pro" pitchFamily="34" charset="-122"/>
                 <a:cs typeface="Be Vietnam Pro" pitchFamily="34" charset="-120"/>
               </a:rPr>
-              <a:t> động</a:t>
-            </a:r>
-            <a:r>
-              <a:rPr lang="en-US" sz="2100" dirty="0" spc="7" kern="0">
+              <a:t> được</a:t>
+            </a:r>
+            <a:r>
+              <a:rPr lang="en-US" sz="2100" dirty="0" spc="1" kern="0">
                 <a:solidFill>
                   <a:srgbClr val="FF6A4D"/>
                 </a:solidFill>
@@ -17096,10 +16733,10 @@
                 <a:ea typeface="Be Vietnam Pro" pitchFamily="34" charset="-122"/>
                 <a:cs typeface="Be Vietnam Pro" pitchFamily="34" charset="-120"/>
               </a:rPr>
-              <a:t> tức</a:t>
-            </a:r>
-            <a:r>
-              <a:rPr lang="en-US" sz="2100" dirty="0" spc="0" kern="0">
+              <a:t> nêu</a:t>
+            </a:r>
+            <a:r>
+              <a:rPr lang="en-US" sz="2100" dirty="0" spc="-1" kern="0">
                 <a:solidFill>
                   <a:srgbClr val="FF6A4D"/>
                 </a:solidFill>
@@ -17107,73 +16744,7 @@
                 <a:ea typeface="Be Vietnam Pro" pitchFamily="34" charset="-122"/>
                 <a:cs typeface="Be Vietnam Pro" pitchFamily="34" charset="-120"/>
               </a:rPr>
-              <a:t> thì</a:t>
-            </a:r>
-            <a:r>
-              <a:rPr lang="en-US" sz="2100" dirty="0" spc="4" kern="0">
-                <a:solidFill>
-                  <a:srgbClr val="FF6A4D"/>
-                </a:solidFill>
-                <a:latin typeface="Be Vietnam Pro" pitchFamily="34" charset="0"/>
-                <a:ea typeface="Be Vietnam Pro" pitchFamily="34" charset="-122"/>
-                <a:cs typeface="Be Vietnam Pro" pitchFamily="34" charset="-120"/>
-              </a:rPr>
-              <a:t> chưa</a:t>
-            </a:r>
-            <a:r>
-              <a:rPr lang="en-US" sz="2100" dirty="0" spc="1" kern="0">
-                <a:solidFill>
-                  <a:srgbClr val="FF6A4D"/>
-                </a:solidFill>
-                <a:latin typeface="Be Vietnam Pro" pitchFamily="34" charset="0"/>
-                <a:ea typeface="Be Vietnam Pro" pitchFamily="34" charset="-122"/>
-                <a:cs typeface="Be Vietnam Pro" pitchFamily="34" charset="-120"/>
-              </a:rPr>
-              <a:t> kiểm</a:t>
-            </a:r>
-            <a:r>
-              <a:rPr lang="en-US" sz="2100" dirty="0" spc="-23" kern="0">
-                <a:solidFill>
-                  <a:srgbClr val="FF6A4D"/>
-                </a:solidFill>
-                <a:latin typeface="Be Vietnam Pro" pitchFamily="34" charset="0"/>
-                <a:ea typeface="Be Vietnam Pro" pitchFamily="34" charset="-122"/>
-                <a:cs typeface="Be Vietnam Pro" pitchFamily="34" charset="-120"/>
-              </a:rPr>
-              <a:t> tra</a:t>
-            </a:r>
-            <a:r>
-              <a:rPr lang="en-US" sz="2100" dirty="0" spc="-12" kern="0">
-                <a:solidFill>
-                  <a:srgbClr val="FF6A4D"/>
-                </a:solidFill>
-                <a:latin typeface="Be Vietnam Pro" pitchFamily="34" charset="0"/>
-                <a:ea typeface="Be Vietnam Pro" pitchFamily="34" charset="-122"/>
-                <a:cs typeface="Be Vietnam Pro" pitchFamily="34" charset="-120"/>
-              </a:rPr>
-              <a:t> với tài</a:t>
-            </a:r>
-            <a:r>
-              <a:rPr lang="en-US" sz="2100" dirty="0" spc="0" kern="0">
-                <a:solidFill>
-                  <a:srgbClr val="FF6A4D"/>
-                </a:solidFill>
-                <a:latin typeface="Be Vietnam Pro" pitchFamily="34" charset="0"/>
-                <a:ea typeface="Be Vietnam Pro" pitchFamily="34" charset="-122"/>
-                <a:cs typeface="Be Vietnam Pro" pitchFamily="34" charset="-120"/>
-              </a:rPr>
-              <a:t> liệu</a:t>
-            </a:r>
-            <a:r>
-              <a:rPr lang="en-US" sz="2100" dirty="0" spc="-1" kern="0">
-                <a:solidFill>
-                  <a:srgbClr val="FF6A4D"/>
-                </a:solidFill>
-                <a:latin typeface="Be Vietnam Pro" pitchFamily="34" charset="0"/>
-                <a:ea typeface="Be Vietnam Pro" pitchFamily="34" charset="-122"/>
-                <a:cs typeface="Be Vietnam Pro" pitchFamily="34" charset="-120"/>
-              </a:rPr>
-              <a:t> nào.</a:t>
+              <a:t> lại.</a:t>
             </a:r>
             <a:endParaRPr lang="en-US" sz="2100" dirty="0"/>
           </a:p>
@@ -17372,7 +16943,7 @@
               <a:t> nhị phân</a:t>
             </a:r>
             <a:r>
-              <a:rPr lang="en-US" sz="2250" dirty="0" spc="-9" kern="0">
+              <a:rPr lang="en-US" sz="2250" dirty="0" spc="-10" kern="0">
                 <a:solidFill>
                   <a:srgbClr val="F3EEE3"/>
                 </a:solidFill>
@@ -17380,7 +16951,62 @@
                 <a:ea typeface="Be Vietnam Pro" pitchFamily="34" charset="-122"/>
                 <a:cs typeface="Be Vietnam Pro" pitchFamily="34" charset="-120"/>
               </a:rPr>
-              <a:t> gọn,</a:t>
+              <a:t> gọn</a:t>
+            </a:r>
+            <a:r>
+              <a:rPr lang="en-US" sz="2250" dirty="0" spc="-1" kern="0">
+                <a:solidFill>
+                  <a:srgbClr val="F3EEE3"/>
+                </a:solidFill>
+                <a:latin typeface="Be Vietnam Pro" pitchFamily="34" charset="0"/>
+                <a:ea typeface="Be Vietnam Pro" pitchFamily="34" charset="-122"/>
+                <a:cs typeface="Be Vietnam Pro" pitchFamily="34" charset="-120"/>
+              </a:rPr>
+              <a:t> mà</a:t>
+            </a:r>
+            <a:r>
+              <a:rPr lang="en-US" sz="2250" dirty="0" spc="7" kern="0">
+                <a:solidFill>
+                  <a:srgbClr val="F3EEE3"/>
+                </a:solidFill>
+                <a:latin typeface="Be Vietnam Pro" pitchFamily="34" charset="0"/>
+                <a:ea typeface="Be Vietnam Pro" pitchFamily="34" charset="-122"/>
+                <a:cs typeface="Be Vietnam Pro" pitchFamily="34" charset="-120"/>
+              </a:rPr>
+              <a:t> trình</a:t>
+            </a:r>
+            <a:r>
+              <a:rPr lang="en-US" sz="2250" dirty="0" spc="-16" kern="0">
+                <a:solidFill>
+                  <a:srgbClr val="F3EEE3"/>
+                </a:solidFill>
+                <a:latin typeface="Be Vietnam Pro" pitchFamily="34" charset="0"/>
+                <a:ea typeface="Be Vietnam Pro" pitchFamily="34" charset="-122"/>
+                <a:cs typeface="Be Vietnam Pro" pitchFamily="34" charset="-120"/>
+              </a:rPr>
+              <a:t> duyệt</a:t>
+            </a:r>
+            <a:r>
+              <a:rPr lang="en-US" sz="2250" dirty="0" spc="1" kern="0">
+                <a:solidFill>
+                  <a:srgbClr val="F3EEE3"/>
+                </a:solidFill>
+                <a:latin typeface="Be Vietnam Pro" pitchFamily="34" charset="0"/>
+                <a:ea typeface="Be Vietnam Pro" pitchFamily="34" charset="-122"/>
+                <a:cs typeface="Be Vietnam Pro" pitchFamily="34" charset="-120"/>
+              </a:rPr>
+              <a:t> nạp</a:t>
+            </a:r>
+            <a:r>
+              <a:rPr lang="en-US" sz="2250" dirty="0" spc="-17" kern="0">
+                <a:solidFill>
+                  <a:srgbClr val="F3EEE3"/>
+                </a:solidFill>
+                <a:latin typeface="Be Vietnam Pro" pitchFamily="34" charset="0"/>
+                <a:ea typeface="Be Vietnam Pro" pitchFamily="34" charset="-122"/>
+                <a:cs typeface="Be Vietnam Pro" pitchFamily="34" charset="-120"/>
+              </a:rPr>
+              <a:t> và</a:t>
             </a:r>
             <a:r>
               <a:rPr lang="en-US" sz="2250" dirty="0" spc="-6" kern="0">
@@ -17392,61 +17018,6 @@
                 <a:cs typeface="Be Vietnam Pro" pitchFamily="34" charset="-120"/>
               </a:rPr>
               <a:t> chạy</a:t>
-            </a:r>
-            <a:r>
-              <a:rPr lang="en-US" sz="2250" dirty="0" spc="-12" kern="0">
-                <a:solidFill>
-                  <a:srgbClr val="F3EEE3"/>
-                </a:solidFill>
-                <a:latin typeface="Be Vietnam Pro" pitchFamily="34" charset="0"/>
-                <a:ea typeface="Be Vietnam Pro" pitchFamily="34" charset="-122"/>
-                <a:cs typeface="Be Vietnam Pro" pitchFamily="34" charset="-120"/>
-              </a:rPr>
-              <a:t> gần</a:t>
-            </a:r>
-            <a:r>
-              <a:rPr lang="en-US" sz="2250" dirty="0" spc="-11" kern="0">
-                <a:solidFill>
-                  <a:srgbClr val="F3EEE3"/>
-                </a:solidFill>
-                <a:latin typeface="Be Vietnam Pro" pitchFamily="34" charset="0"/>
-                <a:ea typeface="Be Vietnam Pro" pitchFamily="34" charset="-122"/>
-                <a:cs typeface="Be Vietnam Pro" pitchFamily="34" charset="-120"/>
-              </a:rPr>
-              <a:t> tốc</a:t>
-            </a:r>
-            <a:r>
-              <a:rPr lang="en-US" sz="2250" dirty="0" spc="19" kern="0">
-                <a:solidFill>
-                  <a:srgbClr val="F3EEE3"/>
-                </a:solidFill>
-                <a:latin typeface="Be Vietnam Pro" pitchFamily="34" charset="0"/>
-                <a:ea typeface="Be Vietnam Pro" pitchFamily="34" charset="-122"/>
-                <a:cs typeface="Be Vietnam Pro" pitchFamily="34" charset="-120"/>
-              </a:rPr>
-              <a:t> độ</a:t>
-            </a:r>
-            <a:r>
-              <a:rPr lang="en-US" sz="2250" dirty="0" spc="-1" kern="0">
-                <a:solidFill>
-                  <a:srgbClr val="F3EEE3"/>
-                </a:solidFill>
-                <a:latin typeface="Be Vietnam Pro" pitchFamily="34" charset="0"/>
-                <a:ea typeface="Be Vietnam Pro" pitchFamily="34" charset="-122"/>
-                <a:cs typeface="Be Vietnam Pro" pitchFamily="34" charset="-120"/>
-              </a:rPr>
-              <a:t> mã</a:t>
-            </a:r>
-            <a:r>
-              <a:rPr lang="en-US" sz="2250" dirty="0" spc="-11" kern="0">
-                <a:solidFill>
-                  <a:srgbClr val="F3EEE3"/>
-                </a:solidFill>
-                <a:latin typeface="Be Vietnam Pro" pitchFamily="34" charset="0"/>
-                <a:ea typeface="Be Vietnam Pro" pitchFamily="34" charset="-122"/>
-                <a:cs typeface="Be Vietnam Pro" pitchFamily="34" charset="-120"/>
-              </a:rPr>
-              <a:t> gốc</a:t>
             </a:r>
             <a:endParaRPr lang="en-US" sz="2250" dirty="0"/>
           </a:p>
@@ -18644,7 +18215,18 @@
                 <a:ea typeface="Be Vietnam Pro" pitchFamily="34" charset="-122"/>
                 <a:cs typeface="Be Vietnam Pro" pitchFamily="34" charset="-120"/>
               </a:rPr>
-              <a:t> 2026-10-18.</a:t>
+              <a:t> 2026-10-19.</a:t>
+            </a:r>
+            <a:r>
+              <a:rPr lang="en-US" sz="2250" dirty="0" spc="0" kern="0">
+                <a:solidFill>
+                  <a:srgbClr val="C4C8D6"/>
+                </a:solidFill>
+                <a:latin typeface="Be Vietnam Pro" pitchFamily="34" charset="0"/>
+                <a:ea typeface="Be Vietnam Pro" pitchFamily="34" charset="-122"/>
+                <a:cs typeface="Be Vietnam Pro" pitchFamily="34" charset="-120"/>
+              </a:rPr>
+              <a:t> Hình</a:t>
             </a:r>
             <a:r>
               <a:rPr lang="en-US" sz="2250" dirty="0" spc="-1" kern="0">
@@ -18655,7 +18237,7 @@
                 <a:ea typeface="Be Vietnam Pro" pitchFamily="34" charset="-122"/>
                 <a:cs typeface="Be Vietnam Pro" pitchFamily="34" charset="-120"/>
               </a:rPr>
-              <a:t> Hình minh</a:t>
+              <a:t> minh</a:t>
             </a:r>
             <a:r>
               <a:rPr lang="en-US" sz="2250" dirty="0" spc="-2" kern="0">
@@ -18669,7 +18251,7 @@
               <a:t> họa</a:t>
             </a:r>
             <a:r>
-              <a:rPr lang="en-US" sz="2250" dirty="0" spc="0" kern="0">
+              <a:rPr lang="en-US" sz="2250" dirty="0" spc="-1" kern="0">
                 <a:solidFill>
                   <a:srgbClr val="C4C8D6"/>
                 </a:solidFill>
@@ -18680,7 +18262,7 @@
               <a:t> là</a:t>
             </a:r>
             <a:r>
-              <a:rPr lang="en-US" sz="2250" dirty="0" spc="-5" kern="0">
+              <a:rPr lang="en-US" sz="2250" dirty="0" spc="-4" kern="0">
                 <a:solidFill>
                   <a:srgbClr val="C4C8D6"/>
                 </a:solidFill>
@@ -18691,7 +18273,7 @@
               <a:t> thiết</a:t>
             </a:r>
             <a:r>
-              <a:rPr lang="en-US" sz="2250" dirty="0" spc="-34" kern="0">
+              <a:rPr lang="en-US" sz="2250" dirty="0" spc="-35" kern="0">
                 <a:solidFill>
                   <a:srgbClr val="C4C8D6"/>
                 </a:solidFill>
@@ -18702,7 +18284,7 @@
               <a:t> kế</a:t>
             </a:r>
             <a:r>
-              <a:rPr lang="en-US" sz="2250" dirty="0" spc="2" kern="0">
+              <a:rPr lang="en-US" sz="2250" dirty="0" spc="1" kern="0">
                 <a:solidFill>
                   <a:srgbClr val="C4C8D6"/>
                 </a:solidFill>
